--- a/output/wordlabs-post-prefix-3day.pptx
+++ b/output/wordlabs-post-prefix-3day.pptx
@@ -4240,7 +4240,7 @@
                 <a:ea typeface="Calibri" pitchFamily="34" charset="-122"/>
                 <a:cs typeface="Calibri" pitchFamily="34" charset="-120"/>
               </a:rPr>
-              <a:t>"after, behind, later"</a:t>
+              <a:t>"after, later, behind"</a:t>
             </a:r>
             <a:endParaRPr lang="en-US" sz="2200" dirty="0"/>
           </a:p>
@@ -5288,7 +5288,7 @@
                 <a:ea typeface="Calibri" pitchFamily="34" charset="-122"/>
                 <a:cs typeface="Calibri" pitchFamily="34" charset="-120"/>
               </a:rPr>
-              <a:t>Word Labs  •  wordlabs.app  •  Prefix: 'post-' = after, behind, later</a:t>
+              <a:t>Word Labs  •  wordlabs.app  •  Prefix: 'post-' = after, later, behind</a:t>
             </a:r>
             <a:endParaRPr lang="en-US" sz="800" dirty="0"/>
           </a:p>
@@ -5622,7 +5622,7 @@
                 <a:ea typeface="Trebuchet MS" pitchFamily="34" charset="-122"/>
                 <a:cs typeface="Trebuchet MS" pitchFamily="34" charset="-120"/>
               </a:rPr>
-              <a:t>2</a:t>
+              <a:t>1</a:t>
             </a:r>
             <a:pPr algn="ctr" indent="0" marL="0">
               <a:buNone/>
@@ -5636,7 +5636,7 @@
                 <a:ea typeface="Trebuchet MS" pitchFamily="34" charset="-122"/>
                 <a:cs typeface="Trebuchet MS" pitchFamily="34" charset="-120"/>
               </a:rPr>
-              <a:t>  punctuation marks</a:t>
+              <a:t>  punctuation mark</a:t>
             </a:r>
             <a:endParaRPr lang="en-US" sz="2800" dirty="0"/>
           </a:p>
@@ -5928,7 +5928,7 @@
                 <a:ea typeface="Calibri" pitchFamily="34" charset="-122"/>
                 <a:cs typeface="Calibri" pitchFamily="34" charset="-120"/>
               </a:rPr>
-              <a:t>Word Labs  •  wordlabs.app  •  Prefix: 'post-' = after, behind, later</a:t>
+              <a:t>Word Labs  •  wordlabs.app  •  Prefix: 'post-' = after, later, behind</a:t>
             </a:r>
             <a:endParaRPr lang="en-US" sz="800" dirty="0"/>
           </a:p>
@@ -6040,7 +6040,7 @@
                 <a:ea typeface="Calibri" pitchFamily="34" charset="-122"/>
                 <a:cs typeface="Calibri" pitchFamily="34" charset="-120"/>
               </a:rPr>
-              <a:t>We had to </a:t>
+              <a:t>The teacher asked us to </a:t>
             </a:r>
             <a:pPr algn="l" indent="0" marL="0">
               <a:buNone/>
@@ -6071,7 +6071,7 @@
                 <a:ea typeface="Calibri" pitchFamily="34" charset="-122"/>
                 <a:cs typeface="Calibri" pitchFamily="34" charset="-120"/>
               </a:rPr>
-              <a:t> the match, so the </a:t>
+              <a:t> the project and write a </a:t>
             </a:r>
             <a:pPr algn="l" indent="0" marL="0">
               <a:buNone/>
@@ -6088,7 +6088,7 @@
                 <a:ea typeface="Calibri" pitchFamily="34" charset="-122"/>
                 <a:cs typeface="Calibri" pitchFamily="34" charset="-120"/>
               </a:rPr>
-              <a:t>postseason</a:t>
+              <a:t>postscript</a:t>
             </a:r>
             <a:pPr algn="l" indent="0" marL="0">
               <a:buNone/>
@@ -6102,7 +6102,7 @@
                 <a:ea typeface="Calibri" pitchFamily="34" charset="-122"/>
                 <a:cs typeface="Calibri" pitchFamily="34" charset="-120"/>
               </a:rPr>
-              <a:t> finals were moved to next week.</a:t>
+              <a:t> on our last report.</a:t>
             </a:r>
             <a:endParaRPr lang="en-US" sz="1800" dirty="0"/>
           </a:p>
@@ -6385,7 +6385,7 @@
                 <a:ea typeface="Trebuchet MS" pitchFamily="34" charset="-122"/>
                 <a:cs typeface="Trebuchet MS" pitchFamily="34" charset="-120"/>
               </a:rPr>
-              <a:t>postseason</a:t>
+              <a:t>postscript</a:t>
             </a:r>
             <a:endParaRPr lang="en-US" sz="1400" dirty="0"/>
           </a:p>
@@ -6716,7 +6716,7 @@
                 <a:ea typeface="Calibri" pitchFamily="34" charset="-122"/>
                 <a:cs typeface="Calibri" pitchFamily="34" charset="-120"/>
               </a:rPr>
-              <a:t>Word Labs  •  wordlabs.app  •  Prefix: 'post-' = after, behind, later</a:t>
+              <a:t>Word Labs  •  wordlabs.app  •  Prefix: 'post-' = after, later, behind</a:t>
             </a:r>
             <a:endParaRPr lang="en-US" sz="800" dirty="0"/>
           </a:p>
@@ -7543,7 +7543,7 @@
                 <a:ea typeface="Calibri" pitchFamily="34" charset="-122"/>
                 <a:cs typeface="Calibri" pitchFamily="34" charset="-120"/>
               </a:rPr>
-              <a:t>Word Labs  •  wordlabs.app  •  Prefix: 'post-' = after, behind, later</a:t>
+              <a:t>Word Labs  •  wordlabs.app  •  Prefix: 'post-' = after, later, behind</a:t>
             </a:r>
             <a:endParaRPr lang="en-US" sz="800" dirty="0"/>
           </a:p>
@@ -7972,7 +7972,7 @@
                 <a:ea typeface="Calibri" pitchFamily="34" charset="-122"/>
                 <a:cs typeface="Calibri" pitchFamily="34" charset="-120"/>
               </a:rPr>
-              <a:t>to place, to put</a:t>
+              <a:t>to put, to place</a:t>
             </a:r>
             <a:endParaRPr lang="en-US" sz="850" dirty="0"/>
           </a:p>
@@ -8528,7 +8528,7 @@
                 <a:ea typeface="Calibri" pitchFamily="34" charset="-122"/>
                 <a:cs typeface="Calibri" pitchFamily="34" charset="-120"/>
               </a:rPr>
-              <a:t>Word Labs  •  wordlabs.app  •  Prefix: 'post-' = after, behind, later</a:t>
+              <a:t>Word Labs  •  wordlabs.app  •  Prefix: 'post-' = after, later, behind</a:t>
             </a:r>
             <a:endParaRPr lang="en-US" sz="800" dirty="0"/>
           </a:p>
@@ -8957,7 +8957,7 @@
                 <a:ea typeface="Calibri" pitchFamily="34" charset="-122"/>
                 <a:cs typeface="Calibri" pitchFamily="34" charset="-120"/>
               </a:rPr>
-              <a:t>to place, to put</a:t>
+              <a:t>to put, to place</a:t>
             </a:r>
             <a:endParaRPr lang="en-US" sz="850" dirty="0"/>
           </a:p>
@@ -9645,7 +9645,7 @@
                 <a:ea typeface="Calibri" pitchFamily="34" charset="-122"/>
                 <a:cs typeface="Calibri" pitchFamily="34" charset="-120"/>
               </a:rPr>
-              <a:t>Word Labs  •  wordlabs.app  •  Prefix: 'post-' = after, behind, later</a:t>
+              <a:t>Word Labs  •  wordlabs.app  •  Prefix: 'post-' = after, later, behind</a:t>
             </a:r>
             <a:endParaRPr lang="en-US" sz="800" dirty="0"/>
           </a:p>
@@ -10074,7 +10074,7 @@
                 <a:ea typeface="Calibri" pitchFamily="34" charset="-122"/>
                 <a:cs typeface="Calibri" pitchFamily="34" charset="-120"/>
               </a:rPr>
-              <a:t>to place, to put</a:t>
+              <a:t>to put, to place</a:t>
             </a:r>
             <a:endParaRPr lang="en-US" sz="850" dirty="0"/>
           </a:p>
@@ -11185,7 +11185,7 @@
                 <a:ea typeface="Calibri" pitchFamily="34" charset="-122"/>
                 <a:cs typeface="Calibri" pitchFamily="34" charset="-120"/>
               </a:rPr>
-              <a:t>Word Labs  •  wordlabs.app  •  Prefix: 'post-' = after, behind, later</a:t>
+              <a:t>Word Labs  •  wordlabs.app  •  Prefix: 'post-' = after, later, behind</a:t>
             </a:r>
             <a:endParaRPr lang="en-US" sz="800" dirty="0"/>
           </a:p>
@@ -11324,7 +11324,7 @@
                 <a:ea typeface="Trebuchet MS" pitchFamily="34" charset="-122"/>
                 <a:cs typeface="Trebuchet MS" pitchFamily="34" charset="-120"/>
               </a:rPr>
-              <a:t>postseason</a:t>
+              <a:t>postscript</a:t>
             </a:r>
             <a:endParaRPr lang="en-US" sz="2800" dirty="0"/>
           </a:p>
@@ -12012,7 +12012,7 @@
                 <a:ea typeface="Calibri" pitchFamily="34" charset="-122"/>
                 <a:cs typeface="Calibri" pitchFamily="34" charset="-120"/>
               </a:rPr>
-              <a:t>Word Labs  •  wordlabs.app  •  Prefix: 'post-' = after, behind, later</a:t>
+              <a:t>Word Labs  •  wordlabs.app  •  Prefix: 'post-' = after, later, behind</a:t>
             </a:r>
             <a:endParaRPr lang="en-US" sz="800" dirty="0"/>
           </a:p>
@@ -12151,7 +12151,7 @@
                 <a:ea typeface="Trebuchet MS" pitchFamily="34" charset="-122"/>
                 <a:cs typeface="Trebuchet MS" pitchFamily="34" charset="-120"/>
               </a:rPr>
-              <a:t>postseason</a:t>
+              <a:t>postscript</a:t>
             </a:r>
             <a:endParaRPr lang="en-US" sz="2800" dirty="0"/>
           </a:p>
@@ -12402,7 +12402,7 @@
                 <a:ea typeface="Trebuchet MS" pitchFamily="34" charset="-122"/>
                 <a:cs typeface="Trebuchet MS" pitchFamily="34" charset="-120"/>
               </a:rPr>
-              <a:t>season</a:t>
+              <a:t>script</a:t>
             </a:r>
             <a:endParaRPr lang="en-US" sz="1300" dirty="0"/>
           </a:p>
@@ -12441,7 +12441,7 @@
                 <a:ea typeface="Calibri" pitchFamily="34" charset="-122"/>
                 <a:cs typeface="Calibri" pitchFamily="34" charset="-120"/>
               </a:rPr>
-              <a:t>a period of time</a:t>
+              <a:t>something written</a:t>
             </a:r>
             <a:endParaRPr lang="en-US" sz="850" dirty="0"/>
           </a:p>
@@ -12997,7 +12997,7 @@
                 <a:ea typeface="Calibri" pitchFamily="34" charset="-122"/>
                 <a:cs typeface="Calibri" pitchFamily="34" charset="-120"/>
               </a:rPr>
-              <a:t>Word Labs  •  wordlabs.app  •  Prefix: 'post-' = after, behind, later</a:t>
+              <a:t>Word Labs  •  wordlabs.app  •  Prefix: 'post-' = after, later, behind</a:t>
             </a:r>
             <a:endParaRPr lang="en-US" sz="800" dirty="0"/>
           </a:p>
@@ -13136,7 +13136,7 @@
                 <a:ea typeface="Trebuchet MS" pitchFamily="34" charset="-122"/>
                 <a:cs typeface="Trebuchet MS" pitchFamily="34" charset="-120"/>
               </a:rPr>
-              <a:t>postseason</a:t>
+              <a:t>postscript</a:t>
             </a:r>
             <a:endParaRPr lang="en-US" sz="2800" dirty="0"/>
           </a:p>
@@ -13387,7 +13387,7 @@
                 <a:ea typeface="Trebuchet MS" pitchFamily="34" charset="-122"/>
                 <a:cs typeface="Trebuchet MS" pitchFamily="34" charset="-120"/>
               </a:rPr>
-              <a:t>season</a:t>
+              <a:t>script</a:t>
             </a:r>
             <a:endParaRPr lang="en-US" sz="1300" dirty="0"/>
           </a:p>
@@ -13426,7 +13426,7 @@
                 <a:ea typeface="Calibri" pitchFamily="34" charset="-122"/>
                 <a:cs typeface="Calibri" pitchFamily="34" charset="-120"/>
               </a:rPr>
-              <a:t>a period of time</a:t>
+              <a:t>something written</a:t>
             </a:r>
             <a:endParaRPr lang="en-US" sz="850" dirty="0"/>
           </a:p>
@@ -13533,7 +13533,7 @@
         </p:nvSpPr>
         <p:spPr>
           <a:xfrm>
-            <a:off x="2313432" y="3364992"/>
+            <a:off x="2999232" y="3364992"/>
             <a:ext cx="1645920" cy="475488"/>
           </a:xfrm>
           <a:prstGeom prst="rect">
@@ -13560,7 +13560,7 @@
         </p:nvSpPr>
         <p:spPr>
           <a:xfrm>
-            <a:off x="2313432" y="3364992"/>
+            <a:off x="2999232" y="3364992"/>
             <a:ext cx="1645920" cy="475488"/>
           </a:xfrm>
           <a:prstGeom prst="rect">
@@ -13599,8 +13599,8 @@
         </p:nvSpPr>
         <p:spPr>
           <a:xfrm>
-            <a:off x="3959352" y="3364992"/>
-            <a:ext cx="411480" cy="475488"/>
+            <a:off x="4645152" y="3364992"/>
+            <a:ext cx="1097280" cy="475488"/>
           </a:xfrm>
           <a:prstGeom prst="rect">
             <a:avLst/>
@@ -13638,7 +13638,7 @@
         </p:nvSpPr>
         <p:spPr>
           <a:xfrm>
-            <a:off x="4370832" y="3364992"/>
+            <a:off x="5742432" y="3364992"/>
             <a:ext cx="1645920" cy="475488"/>
           </a:xfrm>
           <a:prstGeom prst="rect">
@@ -13665,7 +13665,7 @@
         </p:nvSpPr>
         <p:spPr>
           <a:xfrm>
-            <a:off x="4370832" y="3364992"/>
+            <a:off x="5742432" y="3364992"/>
             <a:ext cx="1645920" cy="475488"/>
           </a:xfrm>
           <a:prstGeom prst="rect">
@@ -13690,7 +13690,7 @@
                 <a:ea typeface="Trebuchet MS" pitchFamily="34" charset="-122"/>
                 <a:cs typeface="Trebuchet MS" pitchFamily="34" charset="-120"/>
               </a:rPr>
-              <a:t>sea</a:t>
+              <a:t>script</a:t>
             </a:r>
             <a:endParaRPr lang="en-US" sz="1400" dirty="0"/>
           </a:p>
@@ -13698,119 +13698,80 @@
       </p:sp>
       <p:sp>
         <p:nvSpPr>
-          <p:cNvPr id="30" name="Text 28"/>
-          <p:cNvSpPr/>
-          <p:nvPr/>
-        </p:nvSpPr>
-        <p:spPr>
-          <a:xfrm>
-            <a:off x="6016752" y="3364992"/>
-            <a:ext cx="411480" cy="475488"/>
-          </a:xfrm>
-          <a:prstGeom prst="rect">
-            <a:avLst/>
-          </a:prstGeom>
-          <a:noFill/>
-          <a:ln/>
-        </p:spPr>
-        <p:txBody>
-          <a:bodyPr wrap="square" lIns="0" tIns="0" rIns="0" bIns="0" rtlCol="0" anchor="ctr"/>
-          <a:lstStyle/>
-          <a:p>
-            <a:pPr algn="ctr" indent="0" marL="0">
-              <a:buNone/>
-            </a:pPr>
-            <a:r>
-              <a:rPr lang="en-US" sz="1600" b="1" dirty="0">
-                <a:solidFill>
-                  <a:srgbClr val="0D9488"/>
+          <p:cNvPr id="30" name="Shape 28"/>
+          <p:cNvSpPr/>
+          <p:nvPr/>
+        </p:nvSpPr>
+        <p:spPr>
+          <a:xfrm>
+            <a:off x="365760" y="4096512"/>
+            <a:ext cx="1371600" cy="804672"/>
+          </a:xfrm>
+          <a:prstGeom prst="rect">
+            <a:avLst>
+              <a:gd name="adj" fmla="val 6818"/>
+            </a:avLst>
+          </a:prstGeom>
+          <a:solidFill>
+            <a:srgbClr val="E2E8F0"/>
+          </a:solidFill>
+          <a:ln w="12700">
+            <a:solidFill>
+              <a:srgbClr val="E2E8F0"/>
+            </a:solidFill>
+            <a:prstDash val="solid"/>
+          </a:ln>
+        </p:spPr>
+      </p:sp>
+      <p:sp>
+        <p:nvSpPr>
+          <p:cNvPr id="31" name="Text 29"/>
+          <p:cNvSpPr/>
+          <p:nvPr/>
+        </p:nvSpPr>
+        <p:spPr>
+          <a:xfrm>
+            <a:off x="365760" y="4096512"/>
+            <a:ext cx="1371600" cy="804672"/>
+          </a:xfrm>
+          <a:prstGeom prst="rect">
+            <a:avLst/>
+          </a:prstGeom>
+          <a:noFill/>
+          <a:ln/>
+        </p:spPr>
+        <p:txBody>
+          <a:bodyPr wrap="square" lIns="0" tIns="0" rIns="0" bIns="0" rtlCol="0" anchor="ctr"/>
+          <a:lstStyle/>
+          <a:p>
+            <a:pPr algn="ctr" indent="0" marL="0">
+              <a:buNone/>
+            </a:pPr>
+            <a:r>
+              <a:rPr lang="en-US" sz="1100" b="1" dirty="0">
+                <a:solidFill>
+                  <a:srgbClr val="475569"/>
                 </a:solidFill>
                 <a:latin typeface="Trebuchet MS" pitchFamily="34" charset="0"/>
                 <a:ea typeface="Trebuchet MS" pitchFamily="34" charset="-122"/>
                 <a:cs typeface="Trebuchet MS" pitchFamily="34" charset="-120"/>
               </a:rPr>
-              <a:t>·</a:t>
-            </a:r>
-            <a:endParaRPr lang="en-US" sz="1600" dirty="0"/>
-          </a:p>
-        </p:txBody>
-      </p:sp>
-      <p:sp>
-        <p:nvSpPr>
-          <p:cNvPr id="31" name="Shape 29"/>
-          <p:cNvSpPr/>
-          <p:nvPr/>
-        </p:nvSpPr>
-        <p:spPr>
-          <a:xfrm>
-            <a:off x="6428232" y="3364992"/>
-            <a:ext cx="1645920" cy="475488"/>
-          </a:xfrm>
-          <a:prstGeom prst="rect">
-            <a:avLst>
-              <a:gd name="adj" fmla="val 9615"/>
-            </a:avLst>
-          </a:prstGeom>
-          <a:solidFill>
-            <a:srgbClr val="FFFFFF"/>
-          </a:solidFill>
-          <a:ln w="12700">
-            <a:solidFill>
-              <a:srgbClr val="0D9488"/>
-            </a:solidFill>
-            <a:prstDash val="solid"/>
-          </a:ln>
-        </p:spPr>
-      </p:sp>
-      <p:sp>
-        <p:nvSpPr>
-          <p:cNvPr id="32" name="Text 30"/>
-          <p:cNvSpPr/>
-          <p:nvPr/>
-        </p:nvSpPr>
-        <p:spPr>
-          <a:xfrm>
-            <a:off x="6428232" y="3364992"/>
-            <a:ext cx="1645920" cy="475488"/>
-          </a:xfrm>
-          <a:prstGeom prst="rect">
-            <a:avLst/>
-          </a:prstGeom>
-          <a:noFill/>
-          <a:ln/>
-        </p:spPr>
-        <p:txBody>
-          <a:bodyPr wrap="square" lIns="0" tIns="0" rIns="0" bIns="0" rtlCol="0" anchor="ctr"/>
-          <a:lstStyle/>
-          <a:p>
-            <a:pPr algn="ctr" indent="0" marL="0">
-              <a:buNone/>
-            </a:pPr>
-            <a:r>
-              <a:rPr lang="en-US" sz="1400" b="1" dirty="0">
-                <a:solidFill>
-                  <a:srgbClr val="0D9488"/>
-                </a:solidFill>
-                <a:latin typeface="Trebuchet MS" pitchFamily="34" charset="0"/>
-                <a:ea typeface="Trebuchet MS" pitchFamily="34" charset="-122"/>
-                <a:cs typeface="Trebuchet MS" pitchFamily="34" charset="-120"/>
-              </a:rPr>
-              <a:t>son</a:t>
-            </a:r>
-            <a:endParaRPr lang="en-US" sz="1400" dirty="0"/>
-          </a:p>
-        </p:txBody>
-      </p:sp>
-      <p:sp>
-        <p:nvSpPr>
-          <p:cNvPr id="33" name="Shape 31"/>
-          <p:cNvSpPr/>
-          <p:nvPr/>
-        </p:nvSpPr>
-        <p:spPr>
-          <a:xfrm>
-            <a:off x="365760" y="4096512"/>
-            <a:ext cx="1371600" cy="804672"/>
+              <a:t>Phonemes</a:t>
+            </a:r>
+            <a:endParaRPr lang="en-US" sz="1100" dirty="0"/>
+          </a:p>
+        </p:txBody>
+      </p:sp>
+      <p:sp>
+        <p:nvSpPr>
+          <p:cNvPr id="32" name="Shape 30"/>
+          <p:cNvSpPr/>
+          <p:nvPr/>
+        </p:nvSpPr>
+        <p:spPr>
+          <a:xfrm>
+            <a:off x="1874520" y="4096512"/>
+            <a:ext cx="6903720" cy="804672"/>
           </a:xfrm>
           <a:prstGeom prst="rect">
             <a:avLst>
@@ -13818,85 +13779,19 @@
             </a:avLst>
           </a:prstGeom>
           <a:solidFill>
-            <a:srgbClr val="E2E8F0"/>
+            <a:srgbClr val="F8FAFC"/>
           </a:solidFill>
           <a:ln w="12700">
             <a:solidFill>
               <a:srgbClr val="E2E8F0"/>
             </a:solidFill>
-            <a:prstDash val="solid"/>
-          </a:ln>
-        </p:spPr>
-      </p:sp>
-      <p:sp>
-        <p:nvSpPr>
-          <p:cNvPr id="34" name="Text 32"/>
-          <p:cNvSpPr/>
-          <p:nvPr/>
-        </p:nvSpPr>
-        <p:spPr>
-          <a:xfrm>
-            <a:off x="365760" y="4096512"/>
-            <a:ext cx="1371600" cy="804672"/>
-          </a:xfrm>
-          <a:prstGeom prst="rect">
-            <a:avLst/>
-          </a:prstGeom>
-          <a:noFill/>
-          <a:ln/>
-        </p:spPr>
-        <p:txBody>
-          <a:bodyPr wrap="square" lIns="0" tIns="0" rIns="0" bIns="0" rtlCol="0" anchor="ctr"/>
-          <a:lstStyle/>
-          <a:p>
-            <a:pPr algn="ctr" indent="0" marL="0">
-              <a:buNone/>
-            </a:pPr>
-            <a:r>
-              <a:rPr lang="en-US" sz="1100" b="1" dirty="0">
-                <a:solidFill>
-                  <a:srgbClr val="475569"/>
-                </a:solidFill>
-                <a:latin typeface="Trebuchet MS" pitchFamily="34" charset="0"/>
-                <a:ea typeface="Trebuchet MS" pitchFamily="34" charset="-122"/>
-                <a:cs typeface="Trebuchet MS" pitchFamily="34" charset="-120"/>
-              </a:rPr>
-              <a:t>Phonemes</a:t>
-            </a:r>
-            <a:endParaRPr lang="en-US" sz="1100" dirty="0"/>
-          </a:p>
-        </p:txBody>
-      </p:sp>
-      <p:sp>
-        <p:nvSpPr>
-          <p:cNvPr id="35" name="Shape 33"/>
-          <p:cNvSpPr/>
-          <p:nvPr/>
-        </p:nvSpPr>
-        <p:spPr>
-          <a:xfrm>
-            <a:off x="1874520" y="4096512"/>
-            <a:ext cx="6903720" cy="804672"/>
-          </a:xfrm>
-          <a:prstGeom prst="rect">
-            <a:avLst>
-              <a:gd name="adj" fmla="val 6818"/>
-            </a:avLst>
-          </a:prstGeom>
-          <a:solidFill>
-            <a:srgbClr val="F8FAFC"/>
-          </a:solidFill>
-          <a:ln w="12700">
-            <a:solidFill>
-              <a:srgbClr val="E2E8F0"/>
-            </a:solidFill>
             <a:prstDash val="dash"/>
           </a:ln>
         </p:spPr>
       </p:sp>
       <p:sp>
         <p:nvSpPr>
-          <p:cNvPr id="36" name="Text 34"/>
+          <p:cNvPr id="33" name="Text 31"/>
           <p:cNvSpPr/>
           <p:nvPr/>
         </p:nvSpPr>
@@ -14128,7 +14023,7 @@
                 <a:ea typeface="Calibri" pitchFamily="34" charset="-122"/>
                 <a:cs typeface="Calibri" pitchFamily="34" charset="-120"/>
               </a:rPr>
-              <a:t>Prefix 'post-' — after, behind, later</a:t>
+              <a:t>Prefix 'post-' — after, later, behind</a:t>
             </a:r>
             <a:endParaRPr lang="en-US" sz="1600" dirty="0"/>
           </a:p>
@@ -14484,7 +14379,7 @@
                 <a:ea typeface="Calibri" pitchFamily="34" charset="-122"/>
                 <a:cs typeface="Calibri" pitchFamily="34" charset="-120"/>
               </a:rPr>
-              <a:t>Word Labs  •  wordlabs.app  •  Prefix: 'post-' = after, behind, later</a:t>
+              <a:t>Word Labs  •  wordlabs.app  •  Prefix: 'post-' = after, later, behind</a:t>
             </a:r>
             <a:endParaRPr lang="en-US" sz="800" dirty="0"/>
           </a:p>
@@ -14623,7 +14518,7 @@
                 <a:ea typeface="Trebuchet MS" pitchFamily="34" charset="-122"/>
                 <a:cs typeface="Trebuchet MS" pitchFamily="34" charset="-120"/>
               </a:rPr>
-              <a:t>postseason</a:t>
+              <a:t>postscript</a:t>
             </a:r>
             <a:endParaRPr lang="en-US" sz="2800" dirty="0"/>
           </a:p>
@@ -14874,7 +14769,7 @@
                 <a:ea typeface="Trebuchet MS" pitchFamily="34" charset="-122"/>
                 <a:cs typeface="Trebuchet MS" pitchFamily="34" charset="-120"/>
               </a:rPr>
-              <a:t>season</a:t>
+              <a:t>script</a:t>
             </a:r>
             <a:endParaRPr lang="en-US" sz="1300" dirty="0"/>
           </a:p>
@@ -14913,7 +14808,7 @@
                 <a:ea typeface="Calibri" pitchFamily="34" charset="-122"/>
                 <a:cs typeface="Calibri" pitchFamily="34" charset="-120"/>
               </a:rPr>
-              <a:t>a period of time</a:t>
+              <a:t>something written</a:t>
             </a:r>
             <a:endParaRPr lang="en-US" sz="850" dirty="0"/>
           </a:p>
@@ -15020,7 +14915,7 @@
         </p:nvSpPr>
         <p:spPr>
           <a:xfrm>
-            <a:off x="2313432" y="3364992"/>
+            <a:off x="2999232" y="3364992"/>
             <a:ext cx="1645920" cy="475488"/>
           </a:xfrm>
           <a:prstGeom prst="rect">
@@ -15047,7 +14942,7 @@
         </p:nvSpPr>
         <p:spPr>
           <a:xfrm>
-            <a:off x="2313432" y="3364992"/>
+            <a:off x="2999232" y="3364992"/>
             <a:ext cx="1645920" cy="475488"/>
           </a:xfrm>
           <a:prstGeom prst="rect">
@@ -15086,8 +14981,8 @@
         </p:nvSpPr>
         <p:spPr>
           <a:xfrm>
-            <a:off x="3959352" y="3364992"/>
-            <a:ext cx="411480" cy="475488"/>
+            <a:off x="4645152" y="3364992"/>
+            <a:ext cx="1097280" cy="475488"/>
           </a:xfrm>
           <a:prstGeom prst="rect">
             <a:avLst/>
@@ -15125,7 +15020,7 @@
         </p:nvSpPr>
         <p:spPr>
           <a:xfrm>
-            <a:off x="4370832" y="3364992"/>
+            <a:off x="5742432" y="3364992"/>
             <a:ext cx="1645920" cy="475488"/>
           </a:xfrm>
           <a:prstGeom prst="rect">
@@ -15152,7 +15047,7 @@
         </p:nvSpPr>
         <p:spPr>
           <a:xfrm>
-            <a:off x="4370832" y="3364992"/>
+            <a:off x="5742432" y="3364992"/>
             <a:ext cx="1645920" cy="475488"/>
           </a:xfrm>
           <a:prstGeom prst="rect">
@@ -15177,7 +15072,7 @@
                 <a:ea typeface="Trebuchet MS" pitchFamily="34" charset="-122"/>
                 <a:cs typeface="Trebuchet MS" pitchFamily="34" charset="-120"/>
               </a:rPr>
-              <a:t>sea</a:t>
+              <a:t>script</a:t>
             </a:r>
             <a:endParaRPr lang="en-US" sz="1400" dirty="0"/>
           </a:p>
@@ -15185,212 +15080,239 @@
       </p:sp>
       <p:sp>
         <p:nvSpPr>
-          <p:cNvPr id="30" name="Text 28"/>
-          <p:cNvSpPr/>
-          <p:nvPr/>
-        </p:nvSpPr>
-        <p:spPr>
-          <a:xfrm>
-            <a:off x="6016752" y="3364992"/>
-            <a:ext cx="411480" cy="475488"/>
-          </a:xfrm>
-          <a:prstGeom prst="rect">
-            <a:avLst/>
-          </a:prstGeom>
-          <a:noFill/>
-          <a:ln/>
-        </p:spPr>
-        <p:txBody>
-          <a:bodyPr wrap="square" lIns="0" tIns="0" rIns="0" bIns="0" rtlCol="0" anchor="ctr"/>
-          <a:lstStyle/>
-          <a:p>
-            <a:pPr algn="ctr" indent="0" marL="0">
-              <a:buNone/>
-            </a:pPr>
-            <a:r>
-              <a:rPr lang="en-US" sz="1600" b="1" dirty="0">
-                <a:solidFill>
-                  <a:srgbClr val="0D9488"/>
+          <p:cNvPr id="30" name="Shape 28"/>
+          <p:cNvSpPr/>
+          <p:nvPr/>
+        </p:nvSpPr>
+        <p:spPr>
+          <a:xfrm>
+            <a:off x="365760" y="4096512"/>
+            <a:ext cx="1371600" cy="804672"/>
+          </a:xfrm>
+          <a:prstGeom prst="rect">
+            <a:avLst>
+              <a:gd name="adj" fmla="val 6818"/>
+            </a:avLst>
+          </a:prstGeom>
+          <a:solidFill>
+            <a:srgbClr val="E2E8F0"/>
+          </a:solidFill>
+          <a:ln w="12700">
+            <a:solidFill>
+              <a:srgbClr val="E2E8F0"/>
+            </a:solidFill>
+            <a:prstDash val="solid"/>
+          </a:ln>
+        </p:spPr>
+      </p:sp>
+      <p:sp>
+        <p:nvSpPr>
+          <p:cNvPr id="31" name="Text 29"/>
+          <p:cNvSpPr/>
+          <p:nvPr/>
+        </p:nvSpPr>
+        <p:spPr>
+          <a:xfrm>
+            <a:off x="365760" y="4096512"/>
+            <a:ext cx="1371600" cy="804672"/>
+          </a:xfrm>
+          <a:prstGeom prst="rect">
+            <a:avLst/>
+          </a:prstGeom>
+          <a:noFill/>
+          <a:ln/>
+        </p:spPr>
+        <p:txBody>
+          <a:bodyPr wrap="square" lIns="0" tIns="0" rIns="0" bIns="0" rtlCol="0" anchor="ctr"/>
+          <a:lstStyle/>
+          <a:p>
+            <a:pPr algn="ctr" indent="0" marL="0">
+              <a:buNone/>
+            </a:pPr>
+            <a:r>
+              <a:rPr lang="en-US" sz="1100" b="1" dirty="0">
+                <a:solidFill>
+                  <a:srgbClr val="475569"/>
                 </a:solidFill>
                 <a:latin typeface="Trebuchet MS" pitchFamily="34" charset="0"/>
                 <a:ea typeface="Trebuchet MS" pitchFamily="34" charset="-122"/>
                 <a:cs typeface="Trebuchet MS" pitchFamily="34" charset="-120"/>
               </a:rPr>
-              <a:t>·</a:t>
-            </a:r>
-            <a:endParaRPr lang="en-US" sz="1600" dirty="0"/>
-          </a:p>
-        </p:txBody>
-      </p:sp>
-      <p:sp>
-        <p:nvSpPr>
-          <p:cNvPr id="31" name="Shape 29"/>
-          <p:cNvSpPr/>
-          <p:nvPr/>
-        </p:nvSpPr>
-        <p:spPr>
-          <a:xfrm>
-            <a:off x="6428232" y="3364992"/>
-            <a:ext cx="1645920" cy="475488"/>
+              <a:t>Phonemes</a:t>
+            </a:r>
+            <a:endParaRPr lang="en-US" sz="1100" dirty="0"/>
+          </a:p>
+        </p:txBody>
+      </p:sp>
+      <p:sp>
+        <p:nvSpPr>
+          <p:cNvPr id="32" name="Shape 30"/>
+          <p:cNvSpPr/>
+          <p:nvPr/>
+        </p:nvSpPr>
+        <p:spPr>
+          <a:xfrm>
+            <a:off x="1874520" y="4096512"/>
+            <a:ext cx="6903720" cy="658368"/>
           </a:xfrm>
           <a:prstGeom prst="rect">
             <a:avLst>
-              <a:gd name="adj" fmla="val 9615"/>
+              <a:gd name="adj" fmla="val 8333"/>
             </a:avLst>
           </a:prstGeom>
           <a:solidFill>
+            <a:srgbClr val="FCE7F3"/>
+          </a:solidFill>
+          <a:ln w="12700">
+            <a:solidFill>
+              <a:srgbClr val="DB2777"/>
+            </a:solidFill>
+            <a:prstDash val="solid"/>
+          </a:ln>
+        </p:spPr>
+      </p:sp>
+      <p:sp>
+        <p:nvSpPr>
+          <p:cNvPr id="33" name="Shape 31"/>
+          <p:cNvSpPr/>
+          <p:nvPr/>
+        </p:nvSpPr>
+        <p:spPr>
+          <a:xfrm>
+            <a:off x="1951828" y="4169664"/>
+            <a:ext cx="603504" cy="475488"/>
+          </a:xfrm>
+          <a:prstGeom prst="rect">
+            <a:avLst>
+              <a:gd name="adj" fmla="val 7692"/>
+            </a:avLst>
+          </a:prstGeom>
+          <a:solidFill>
             <a:srgbClr val="FFFFFF"/>
           </a:solidFill>
           <a:ln w="12700">
             <a:solidFill>
-              <a:srgbClr val="0D9488"/>
-            </a:solidFill>
-            <a:prstDash val="solid"/>
-          </a:ln>
-        </p:spPr>
-      </p:sp>
-      <p:sp>
-        <p:nvSpPr>
-          <p:cNvPr id="32" name="Text 30"/>
-          <p:cNvSpPr/>
-          <p:nvPr/>
-        </p:nvSpPr>
-        <p:spPr>
-          <a:xfrm>
-            <a:off x="6428232" y="3364992"/>
-            <a:ext cx="1645920" cy="475488"/>
-          </a:xfrm>
-          <a:prstGeom prst="rect">
-            <a:avLst/>
-          </a:prstGeom>
-          <a:noFill/>
-          <a:ln/>
-        </p:spPr>
-        <p:txBody>
-          <a:bodyPr wrap="square" lIns="0" tIns="0" rIns="0" bIns="0" rtlCol="0" anchor="ctr"/>
-          <a:lstStyle/>
-          <a:p>
-            <a:pPr algn="ctr" indent="0" marL="0">
-              <a:buNone/>
-            </a:pPr>
-            <a:r>
-              <a:rPr lang="en-US" sz="1400" b="1" dirty="0">
-                <a:solidFill>
-                  <a:srgbClr val="0D9488"/>
+              <a:srgbClr val="DB2777"/>
+            </a:solidFill>
+            <a:prstDash val="solid"/>
+          </a:ln>
+        </p:spPr>
+      </p:sp>
+      <p:sp>
+        <p:nvSpPr>
+          <p:cNvPr id="34" name="Text 32"/>
+          <p:cNvSpPr/>
+          <p:nvPr/>
+        </p:nvSpPr>
+        <p:spPr>
+          <a:xfrm>
+            <a:off x="1951828" y="4169664"/>
+            <a:ext cx="603504" cy="475488"/>
+          </a:xfrm>
+          <a:prstGeom prst="rect">
+            <a:avLst/>
+          </a:prstGeom>
+          <a:noFill/>
+          <a:ln/>
+        </p:spPr>
+        <p:txBody>
+          <a:bodyPr wrap="square" lIns="0" tIns="0" rIns="0" bIns="0" rtlCol="0" anchor="ctr"/>
+          <a:lstStyle/>
+          <a:p>
+            <a:pPr algn="ctr" indent="0" marL="0">
+              <a:buNone/>
+            </a:pPr>
+            <a:r>
+              <a:rPr lang="en-US" sz="900" b="1" dirty="0">
+                <a:solidFill>
+                  <a:srgbClr val="9D174D"/>
                 </a:solidFill>
                 <a:latin typeface="Trebuchet MS" pitchFamily="34" charset="0"/>
                 <a:ea typeface="Trebuchet MS" pitchFamily="34" charset="-122"/>
                 <a:cs typeface="Trebuchet MS" pitchFamily="34" charset="-120"/>
               </a:rPr>
-              <a:t>son</a:t>
-            </a:r>
-            <a:endParaRPr lang="en-US" sz="1400" dirty="0"/>
-          </a:p>
-        </p:txBody>
-      </p:sp>
-      <p:sp>
-        <p:nvSpPr>
-          <p:cNvPr id="33" name="Shape 31"/>
-          <p:cNvSpPr/>
-          <p:nvPr/>
-        </p:nvSpPr>
-        <p:spPr>
-          <a:xfrm>
-            <a:off x="365760" y="4096512"/>
-            <a:ext cx="1371600" cy="804672"/>
+              <a:t>p</a:t>
+            </a:r>
+            <a:endParaRPr lang="en-US" sz="900" dirty="0"/>
+          </a:p>
+        </p:txBody>
+      </p:sp>
+      <p:sp>
+        <p:nvSpPr>
+          <p:cNvPr id="35" name="Shape 33"/>
+          <p:cNvSpPr/>
+          <p:nvPr/>
+        </p:nvSpPr>
+        <p:spPr>
+          <a:xfrm>
+            <a:off x="2605209" y="4169664"/>
+            <a:ext cx="603504" cy="475488"/>
           </a:xfrm>
           <a:prstGeom prst="rect">
             <a:avLst>
-              <a:gd name="adj" fmla="val 6818"/>
+              <a:gd name="adj" fmla="val 7692"/>
             </a:avLst>
           </a:prstGeom>
           <a:solidFill>
-            <a:srgbClr val="E2E8F0"/>
-          </a:solidFill>
-          <a:ln w="12700">
-            <a:solidFill>
-              <a:srgbClr val="E2E8F0"/>
-            </a:solidFill>
-            <a:prstDash val="solid"/>
-          </a:ln>
-        </p:spPr>
-      </p:sp>
-      <p:sp>
-        <p:nvSpPr>
-          <p:cNvPr id="34" name="Text 32"/>
-          <p:cNvSpPr/>
-          <p:nvPr/>
-        </p:nvSpPr>
-        <p:spPr>
-          <a:xfrm>
-            <a:off x="365760" y="4096512"/>
-            <a:ext cx="1371600" cy="804672"/>
-          </a:xfrm>
-          <a:prstGeom prst="rect">
-            <a:avLst/>
-          </a:prstGeom>
-          <a:noFill/>
-          <a:ln/>
-        </p:spPr>
-        <p:txBody>
-          <a:bodyPr wrap="square" lIns="0" tIns="0" rIns="0" bIns="0" rtlCol="0" anchor="ctr"/>
-          <a:lstStyle/>
-          <a:p>
-            <a:pPr algn="ctr" indent="0" marL="0">
-              <a:buNone/>
-            </a:pPr>
-            <a:r>
-              <a:rPr lang="en-US" sz="1100" b="1" dirty="0">
-                <a:solidFill>
-                  <a:srgbClr val="475569"/>
+            <a:srgbClr val="FFFFFF"/>
+          </a:solidFill>
+          <a:ln w="12700">
+            <a:solidFill>
+              <a:srgbClr val="DB2777"/>
+            </a:solidFill>
+            <a:prstDash val="solid"/>
+          </a:ln>
+        </p:spPr>
+      </p:sp>
+      <p:sp>
+        <p:nvSpPr>
+          <p:cNvPr id="36" name="Text 34"/>
+          <p:cNvSpPr/>
+          <p:nvPr/>
+        </p:nvSpPr>
+        <p:spPr>
+          <a:xfrm>
+            <a:off x="2605209" y="4169664"/>
+            <a:ext cx="603504" cy="475488"/>
+          </a:xfrm>
+          <a:prstGeom prst="rect">
+            <a:avLst/>
+          </a:prstGeom>
+          <a:noFill/>
+          <a:ln/>
+        </p:spPr>
+        <p:txBody>
+          <a:bodyPr wrap="square" lIns="0" tIns="0" rIns="0" bIns="0" rtlCol="0" anchor="ctr"/>
+          <a:lstStyle/>
+          <a:p>
+            <a:pPr algn="ctr" indent="0" marL="0">
+              <a:buNone/>
+            </a:pPr>
+            <a:r>
+              <a:rPr lang="en-US" sz="900" b="1" dirty="0">
+                <a:solidFill>
+                  <a:srgbClr val="9D174D"/>
                 </a:solidFill>
                 <a:latin typeface="Trebuchet MS" pitchFamily="34" charset="0"/>
                 <a:ea typeface="Trebuchet MS" pitchFamily="34" charset="-122"/>
                 <a:cs typeface="Trebuchet MS" pitchFamily="34" charset="-120"/>
               </a:rPr>
-              <a:t>Phonemes</a:t>
-            </a:r>
-            <a:endParaRPr lang="en-US" sz="1100" dirty="0"/>
-          </a:p>
-        </p:txBody>
-      </p:sp>
-      <p:sp>
-        <p:nvSpPr>
-          <p:cNvPr id="35" name="Shape 33"/>
-          <p:cNvSpPr/>
-          <p:nvPr/>
-        </p:nvSpPr>
-        <p:spPr>
-          <a:xfrm>
-            <a:off x="1874520" y="4096512"/>
-            <a:ext cx="6903720" cy="658368"/>
-          </a:xfrm>
-          <a:prstGeom prst="rect">
-            <a:avLst>
-              <a:gd name="adj" fmla="val 8333"/>
-            </a:avLst>
-          </a:prstGeom>
-          <a:solidFill>
-            <a:srgbClr val="FCE7F3"/>
-          </a:solidFill>
-          <a:ln w="12700">
-            <a:solidFill>
-              <a:srgbClr val="DB2777"/>
-            </a:solidFill>
-            <a:prstDash val="solid"/>
-          </a:ln>
-        </p:spPr>
-      </p:sp>
-      <p:sp>
-        <p:nvSpPr>
-          <p:cNvPr id="36" name="Shape 34"/>
-          <p:cNvSpPr/>
-          <p:nvPr/>
-        </p:nvSpPr>
-        <p:spPr>
-          <a:xfrm>
-            <a:off x="1951330" y="4169664"/>
-            <a:ext cx="676656" cy="475488"/>
+              <a:t>o</a:t>
+            </a:r>
+            <a:endParaRPr lang="en-US" sz="900" dirty="0"/>
+          </a:p>
+        </p:txBody>
+      </p:sp>
+      <p:sp>
+        <p:nvSpPr>
+          <p:cNvPr id="37" name="Shape 35"/>
+          <p:cNvSpPr/>
+          <p:nvPr/>
+        </p:nvSpPr>
+        <p:spPr>
+          <a:xfrm>
+            <a:off x="3258589" y="4169664"/>
+            <a:ext cx="603504" cy="475488"/>
           </a:xfrm>
           <a:prstGeom prst="rect">
             <a:avLst>
@@ -15410,14 +15332,14 @@
       </p:sp>
       <p:sp>
         <p:nvSpPr>
-          <p:cNvPr id="37" name="Text 35"/>
-          <p:cNvSpPr/>
-          <p:nvPr/>
-        </p:nvSpPr>
-        <p:spPr>
-          <a:xfrm>
-            <a:off x="1951330" y="4169664"/>
-            <a:ext cx="676656" cy="475488"/>
+          <p:cNvPr id="38" name="Text 36"/>
+          <p:cNvSpPr/>
+          <p:nvPr/>
+        </p:nvSpPr>
+        <p:spPr>
+          <a:xfrm>
+            <a:off x="3258589" y="4169664"/>
+            <a:ext cx="603504" cy="475488"/>
           </a:xfrm>
           <a:prstGeom prst="rect">
             <a:avLst/>
@@ -15441,7 +15363,7 @@
                 <a:ea typeface="Trebuchet MS" pitchFamily="34" charset="-122"/>
                 <a:cs typeface="Trebuchet MS" pitchFamily="34" charset="-120"/>
               </a:rPr>
-              <a:t>p</a:t>
+              <a:t>s</a:t>
             </a:r>
             <a:endParaRPr lang="en-US" sz="900" dirty="0"/>
           </a:p>
@@ -15449,14 +15371,14 @@
       </p:sp>
       <p:sp>
         <p:nvSpPr>
-          <p:cNvPr id="38" name="Shape 36"/>
-          <p:cNvSpPr/>
-          <p:nvPr/>
-        </p:nvSpPr>
-        <p:spPr>
-          <a:xfrm>
-            <a:off x="2677363" y="4169664"/>
-            <a:ext cx="676656" cy="475488"/>
+          <p:cNvPr id="39" name="Shape 37"/>
+          <p:cNvSpPr/>
+          <p:nvPr/>
+        </p:nvSpPr>
+        <p:spPr>
+          <a:xfrm>
+            <a:off x="3911969" y="4169664"/>
+            <a:ext cx="603504" cy="475488"/>
           </a:xfrm>
           <a:prstGeom prst="rect">
             <a:avLst>
@@ -15476,14 +15398,14 @@
       </p:sp>
       <p:sp>
         <p:nvSpPr>
-          <p:cNvPr id="39" name="Text 37"/>
-          <p:cNvSpPr/>
-          <p:nvPr/>
-        </p:nvSpPr>
-        <p:spPr>
-          <a:xfrm>
-            <a:off x="2677363" y="4169664"/>
-            <a:ext cx="676656" cy="475488"/>
+          <p:cNvPr id="40" name="Text 38"/>
+          <p:cNvSpPr/>
+          <p:nvPr/>
+        </p:nvSpPr>
+        <p:spPr>
+          <a:xfrm>
+            <a:off x="3911969" y="4169664"/>
+            <a:ext cx="603504" cy="475488"/>
           </a:xfrm>
           <a:prstGeom prst="rect">
             <a:avLst/>
@@ -15507,7 +15429,7 @@
                 <a:ea typeface="Trebuchet MS" pitchFamily="34" charset="-122"/>
                 <a:cs typeface="Trebuchet MS" pitchFamily="34" charset="-120"/>
               </a:rPr>
-              <a:t>o</a:t>
+              <a:t>t</a:t>
             </a:r>
             <a:endParaRPr lang="en-US" sz="900" dirty="0"/>
           </a:p>
@@ -15515,14 +15437,14 @@
       </p:sp>
       <p:sp>
         <p:nvSpPr>
-          <p:cNvPr id="40" name="Shape 38"/>
-          <p:cNvSpPr/>
-          <p:nvPr/>
-        </p:nvSpPr>
-        <p:spPr>
-          <a:xfrm>
-            <a:off x="3403397" y="4169664"/>
-            <a:ext cx="676656" cy="475488"/>
+          <p:cNvPr id="41" name="Shape 39"/>
+          <p:cNvSpPr/>
+          <p:nvPr/>
+        </p:nvSpPr>
+        <p:spPr>
+          <a:xfrm>
+            <a:off x="4565350" y="4169664"/>
+            <a:ext cx="603504" cy="475488"/>
           </a:xfrm>
           <a:prstGeom prst="rect">
             <a:avLst>
@@ -15542,14 +15464,14 @@
       </p:sp>
       <p:sp>
         <p:nvSpPr>
-          <p:cNvPr id="41" name="Text 39"/>
-          <p:cNvSpPr/>
-          <p:nvPr/>
-        </p:nvSpPr>
-        <p:spPr>
-          <a:xfrm>
-            <a:off x="3403397" y="4169664"/>
-            <a:ext cx="676656" cy="475488"/>
+          <p:cNvPr id="42" name="Text 40"/>
+          <p:cNvSpPr/>
+          <p:nvPr/>
+        </p:nvSpPr>
+        <p:spPr>
+          <a:xfrm>
+            <a:off x="4565350" y="4169664"/>
+            <a:ext cx="603504" cy="475488"/>
           </a:xfrm>
           <a:prstGeom prst="rect">
             <a:avLst/>
@@ -15581,14 +15503,14 @@
       </p:sp>
       <p:sp>
         <p:nvSpPr>
-          <p:cNvPr id="42" name="Shape 40"/>
-          <p:cNvSpPr/>
-          <p:nvPr/>
-        </p:nvSpPr>
-        <p:spPr>
-          <a:xfrm>
-            <a:off x="4129430" y="4169664"/>
-            <a:ext cx="676656" cy="475488"/>
+          <p:cNvPr id="43" name="Shape 41"/>
+          <p:cNvSpPr/>
+          <p:nvPr/>
+        </p:nvSpPr>
+        <p:spPr>
+          <a:xfrm>
+            <a:off x="5218730" y="4169664"/>
+            <a:ext cx="603504" cy="475488"/>
           </a:xfrm>
           <a:prstGeom prst="rect">
             <a:avLst>
@@ -15608,14 +15530,14 @@
       </p:sp>
       <p:sp>
         <p:nvSpPr>
-          <p:cNvPr id="43" name="Text 41"/>
-          <p:cNvSpPr/>
-          <p:nvPr/>
-        </p:nvSpPr>
-        <p:spPr>
-          <a:xfrm>
-            <a:off x="4129430" y="4169664"/>
-            <a:ext cx="676656" cy="475488"/>
+          <p:cNvPr id="44" name="Text 42"/>
+          <p:cNvSpPr/>
+          <p:nvPr/>
+        </p:nvSpPr>
+        <p:spPr>
+          <a:xfrm>
+            <a:off x="5218730" y="4169664"/>
+            <a:ext cx="603504" cy="475488"/>
           </a:xfrm>
           <a:prstGeom prst="rect">
             <a:avLst/>
@@ -15639,7 +15561,7 @@
                 <a:ea typeface="Trebuchet MS" pitchFamily="34" charset="-122"/>
                 <a:cs typeface="Trebuchet MS" pitchFamily="34" charset="-120"/>
               </a:rPr>
-              <a:t>t</a:t>
+              <a:t>c</a:t>
             </a:r>
             <a:endParaRPr lang="en-US" sz="900" dirty="0"/>
           </a:p>
@@ -15647,14 +15569,14 @@
       </p:sp>
       <p:sp>
         <p:nvSpPr>
-          <p:cNvPr id="44" name="Shape 42"/>
-          <p:cNvSpPr/>
-          <p:nvPr/>
-        </p:nvSpPr>
-        <p:spPr>
-          <a:xfrm>
-            <a:off x="4855464" y="4169664"/>
-            <a:ext cx="676656" cy="475488"/>
+          <p:cNvPr id="45" name="Shape 43"/>
+          <p:cNvSpPr/>
+          <p:nvPr/>
+        </p:nvSpPr>
+        <p:spPr>
+          <a:xfrm>
+            <a:off x="5872111" y="4169664"/>
+            <a:ext cx="603504" cy="475488"/>
           </a:xfrm>
           <a:prstGeom prst="rect">
             <a:avLst>
@@ -15674,14 +15596,14 @@
       </p:sp>
       <p:sp>
         <p:nvSpPr>
-          <p:cNvPr id="45" name="Text 43"/>
-          <p:cNvSpPr/>
-          <p:nvPr/>
-        </p:nvSpPr>
-        <p:spPr>
-          <a:xfrm>
-            <a:off x="4855464" y="4169664"/>
-            <a:ext cx="676656" cy="475488"/>
+          <p:cNvPr id="46" name="Text 44"/>
+          <p:cNvSpPr/>
+          <p:nvPr/>
+        </p:nvSpPr>
+        <p:spPr>
+          <a:xfrm>
+            <a:off x="5872111" y="4169664"/>
+            <a:ext cx="603504" cy="475488"/>
           </a:xfrm>
           <a:prstGeom prst="rect">
             <a:avLst/>
@@ -15705,7 +15627,7 @@
                 <a:ea typeface="Trebuchet MS" pitchFamily="34" charset="-122"/>
                 <a:cs typeface="Trebuchet MS" pitchFamily="34" charset="-120"/>
               </a:rPr>
-              <a:t>s</a:t>
+              <a:t>r</a:t>
             </a:r>
             <a:endParaRPr lang="en-US" sz="900" dirty="0"/>
           </a:p>
@@ -15713,14 +15635,14 @@
       </p:sp>
       <p:sp>
         <p:nvSpPr>
-          <p:cNvPr id="46" name="Shape 44"/>
-          <p:cNvSpPr/>
-          <p:nvPr/>
-        </p:nvSpPr>
-        <p:spPr>
-          <a:xfrm>
-            <a:off x="5581498" y="4169664"/>
-            <a:ext cx="676656" cy="475488"/>
+          <p:cNvPr id="47" name="Shape 45"/>
+          <p:cNvSpPr/>
+          <p:nvPr/>
+        </p:nvSpPr>
+        <p:spPr>
+          <a:xfrm>
+            <a:off x="6525491" y="4169664"/>
+            <a:ext cx="603504" cy="475488"/>
           </a:xfrm>
           <a:prstGeom prst="rect">
             <a:avLst>
@@ -15740,14 +15662,14 @@
       </p:sp>
       <p:sp>
         <p:nvSpPr>
-          <p:cNvPr id="47" name="Text 45"/>
-          <p:cNvSpPr/>
-          <p:nvPr/>
-        </p:nvSpPr>
-        <p:spPr>
-          <a:xfrm>
-            <a:off x="5581498" y="4169664"/>
-            <a:ext cx="676656" cy="475488"/>
+          <p:cNvPr id="48" name="Text 46"/>
+          <p:cNvSpPr/>
+          <p:nvPr/>
+        </p:nvSpPr>
+        <p:spPr>
+          <a:xfrm>
+            <a:off x="6525491" y="4169664"/>
+            <a:ext cx="603504" cy="475488"/>
           </a:xfrm>
           <a:prstGeom prst="rect">
             <a:avLst/>
@@ -15771,7 +15693,7 @@
                 <a:ea typeface="Trebuchet MS" pitchFamily="34" charset="-122"/>
                 <a:cs typeface="Trebuchet MS" pitchFamily="34" charset="-120"/>
               </a:rPr>
-              <a:t>ea</a:t>
+              <a:t>i</a:t>
             </a:r>
             <a:endParaRPr lang="en-US" sz="900" dirty="0"/>
           </a:p>
@@ -15779,14 +15701,14 @@
       </p:sp>
       <p:sp>
         <p:nvSpPr>
-          <p:cNvPr id="48" name="Shape 46"/>
-          <p:cNvSpPr/>
-          <p:nvPr/>
-        </p:nvSpPr>
-        <p:spPr>
-          <a:xfrm>
-            <a:off x="6307531" y="4169664"/>
-            <a:ext cx="676656" cy="475488"/>
+          <p:cNvPr id="49" name="Shape 47"/>
+          <p:cNvSpPr/>
+          <p:nvPr/>
+        </p:nvSpPr>
+        <p:spPr>
+          <a:xfrm>
+            <a:off x="7178871" y="4169664"/>
+            <a:ext cx="603504" cy="475488"/>
           </a:xfrm>
           <a:prstGeom prst="rect">
             <a:avLst>
@@ -15806,14 +15728,14 @@
       </p:sp>
       <p:sp>
         <p:nvSpPr>
-          <p:cNvPr id="49" name="Text 47"/>
-          <p:cNvSpPr/>
-          <p:nvPr/>
-        </p:nvSpPr>
-        <p:spPr>
-          <a:xfrm>
-            <a:off x="6307531" y="4169664"/>
-            <a:ext cx="676656" cy="475488"/>
+          <p:cNvPr id="50" name="Text 48"/>
+          <p:cNvSpPr/>
+          <p:nvPr/>
+        </p:nvSpPr>
+        <p:spPr>
+          <a:xfrm>
+            <a:off x="7178871" y="4169664"/>
+            <a:ext cx="603504" cy="475488"/>
           </a:xfrm>
           <a:prstGeom prst="rect">
             <a:avLst/>
@@ -15837,7 +15759,7 @@
                 <a:ea typeface="Trebuchet MS" pitchFamily="34" charset="-122"/>
                 <a:cs typeface="Trebuchet MS" pitchFamily="34" charset="-120"/>
               </a:rPr>
-              <a:t>s</a:t>
+              <a:t>p</a:t>
             </a:r>
             <a:endParaRPr lang="en-US" sz="900" dirty="0"/>
           </a:p>
@@ -15845,14 +15767,14 @@
       </p:sp>
       <p:sp>
         <p:nvSpPr>
-          <p:cNvPr id="50" name="Shape 48"/>
-          <p:cNvSpPr/>
-          <p:nvPr/>
-        </p:nvSpPr>
-        <p:spPr>
-          <a:xfrm>
-            <a:off x="7033565" y="4169664"/>
-            <a:ext cx="676656" cy="475488"/>
+          <p:cNvPr id="51" name="Shape 49"/>
+          <p:cNvSpPr/>
+          <p:nvPr/>
+        </p:nvSpPr>
+        <p:spPr>
+          <a:xfrm>
+            <a:off x="7832252" y="4169664"/>
+            <a:ext cx="603504" cy="475488"/>
           </a:xfrm>
           <a:prstGeom prst="rect">
             <a:avLst>
@@ -15872,14 +15794,14 @@
       </p:sp>
       <p:sp>
         <p:nvSpPr>
-          <p:cNvPr id="51" name="Text 49"/>
-          <p:cNvSpPr/>
-          <p:nvPr/>
-        </p:nvSpPr>
-        <p:spPr>
-          <a:xfrm>
-            <a:off x="7033565" y="4169664"/>
-            <a:ext cx="676656" cy="475488"/>
+          <p:cNvPr id="52" name="Text 50"/>
+          <p:cNvSpPr/>
+          <p:nvPr/>
+        </p:nvSpPr>
+        <p:spPr>
+          <a:xfrm>
+            <a:off x="7832252" y="4169664"/>
+            <a:ext cx="603504" cy="475488"/>
           </a:xfrm>
           <a:prstGeom prst="rect">
             <a:avLst/>
@@ -15903,73 +15825,7 @@
                 <a:ea typeface="Trebuchet MS" pitchFamily="34" charset="-122"/>
                 <a:cs typeface="Trebuchet MS" pitchFamily="34" charset="-120"/>
               </a:rPr>
-              <a:t>o</a:t>
-            </a:r>
-            <a:endParaRPr lang="en-US" sz="900" dirty="0"/>
-          </a:p>
-        </p:txBody>
-      </p:sp>
-      <p:sp>
-        <p:nvSpPr>
-          <p:cNvPr id="52" name="Shape 50"/>
-          <p:cNvSpPr/>
-          <p:nvPr/>
-        </p:nvSpPr>
-        <p:spPr>
-          <a:xfrm>
-            <a:off x="7759598" y="4169664"/>
-            <a:ext cx="676656" cy="475488"/>
-          </a:xfrm>
-          <a:prstGeom prst="rect">
-            <a:avLst>
-              <a:gd name="adj" fmla="val 7692"/>
-            </a:avLst>
-          </a:prstGeom>
-          <a:solidFill>
-            <a:srgbClr val="FFFFFF"/>
-          </a:solidFill>
-          <a:ln w="12700">
-            <a:solidFill>
-              <a:srgbClr val="DB2777"/>
-            </a:solidFill>
-            <a:prstDash val="solid"/>
-          </a:ln>
-        </p:spPr>
-      </p:sp>
-      <p:sp>
-        <p:nvSpPr>
-          <p:cNvPr id="53" name="Text 51"/>
-          <p:cNvSpPr/>
-          <p:nvPr/>
-        </p:nvSpPr>
-        <p:spPr>
-          <a:xfrm>
-            <a:off x="7759598" y="4169664"/>
-            <a:ext cx="676656" cy="475488"/>
-          </a:xfrm>
-          <a:prstGeom prst="rect">
-            <a:avLst/>
-          </a:prstGeom>
-          <a:noFill/>
-          <a:ln/>
-        </p:spPr>
-        <p:txBody>
-          <a:bodyPr wrap="square" lIns="0" tIns="0" rIns="0" bIns="0" rtlCol="0" anchor="ctr"/>
-          <a:lstStyle/>
-          <a:p>
-            <a:pPr algn="ctr" indent="0" marL="0">
-              <a:buNone/>
-            </a:pPr>
-            <a:r>
-              <a:rPr lang="en-US" sz="900" b="1" dirty="0">
-                <a:solidFill>
-                  <a:srgbClr val="9D174D"/>
-                </a:solidFill>
-                <a:latin typeface="Trebuchet MS" pitchFamily="34" charset="0"/>
-                <a:ea typeface="Trebuchet MS" pitchFamily="34" charset="-122"/>
-                <a:cs typeface="Trebuchet MS" pitchFamily="34" charset="-120"/>
-              </a:rPr>
-              <a:t>n</a:t>
+              <a:t>t</a:t>
             </a:r>
             <a:endParaRPr lang="en-US" sz="900" dirty="0"/>
           </a:p>
@@ -16543,7 +16399,7 @@
                 <a:ea typeface="Calibri" pitchFamily="34" charset="-122"/>
                 <a:cs typeface="Calibri" pitchFamily="34" charset="-120"/>
               </a:rPr>
-              <a:t>Word Labs  •  wordlabs.app  •  Prefix: 'post-' = after, behind, later</a:t>
+              <a:t>Word Labs  •  wordlabs.app  •  Prefix: 'post-' = after, later, behind</a:t>
             </a:r>
             <a:endParaRPr lang="en-US" sz="800" dirty="0"/>
           </a:p>
@@ -16877,7 +16733,7 @@
                 <a:ea typeface="Trebuchet MS" pitchFamily="34" charset="-122"/>
                 <a:cs typeface="Trebuchet MS" pitchFamily="34" charset="-120"/>
               </a:rPr>
-              <a:t>3</a:t>
+              <a:t>2</a:t>
             </a:r>
             <a:pPr algn="ctr" indent="0" marL="0">
               <a:buNone/>
@@ -17183,7 +17039,7 @@
                 <a:ea typeface="Calibri" pitchFamily="34" charset="-122"/>
                 <a:cs typeface="Calibri" pitchFamily="34" charset="-120"/>
               </a:rPr>
-              <a:t>Word Labs  •  wordlabs.app  •  Prefix: 'post-' = after, behind, later</a:t>
+              <a:t>Word Labs  •  wordlabs.app  •  Prefix: 'post-' = after, later, behind</a:t>
             </a:r>
             <a:endParaRPr lang="en-US" sz="800" dirty="0"/>
           </a:p>
@@ -17326,7 +17182,7 @@
                 <a:ea typeface="Calibri" pitchFamily="34" charset="-122"/>
                 <a:cs typeface="Calibri" pitchFamily="34" charset="-120"/>
               </a:rPr>
-              <a:t> years, people sent </a:t>
+              <a:t> period, </a:t>
             </a:r>
             <a:pPr algn="l" indent="0" marL="0">
               <a:buNone/>
@@ -17343,7 +17199,7 @@
                 <a:ea typeface="Calibri" pitchFamily="34" charset="-122"/>
                 <a:cs typeface="Calibri" pitchFamily="34" charset="-120"/>
               </a:rPr>
-              <a:t>postcards</a:t>
+              <a:t>postgraduate</a:t>
             </a:r>
             <a:pPr algn="l" indent="0" marL="0">
               <a:buNone/>
@@ -17357,7 +17213,7 @@
                 <a:ea typeface="Calibri" pitchFamily="34" charset="-122"/>
                 <a:cs typeface="Calibri" pitchFamily="34" charset="-120"/>
               </a:rPr>
-              <a:t> to friends, and many chose to </a:t>
+              <a:t> students studied </a:t>
             </a:r>
             <a:pPr algn="l" indent="0" marL="0">
               <a:buNone/>
@@ -17374,7 +17230,7 @@
                 <a:ea typeface="Calibri" pitchFamily="34" charset="-122"/>
                 <a:cs typeface="Calibri" pitchFamily="34" charset="-120"/>
               </a:rPr>
-              <a:t>postpone</a:t>
+              <a:t>postnatal</a:t>
             </a:r>
             <a:pPr algn="l" indent="0" marL="0">
               <a:buNone/>
@@ -17388,7 +17244,7 @@
                 <a:ea typeface="Calibri" pitchFamily="34" charset="-122"/>
                 <a:cs typeface="Calibri" pitchFamily="34" charset="-120"/>
               </a:rPr>
-              <a:t> large celebrations.</a:t>
+              <a:t> care for families.</a:t>
             </a:r>
             <a:endParaRPr lang="en-US" sz="1800" dirty="0"/>
           </a:p>
@@ -17671,7 +17527,7 @@
                 <a:ea typeface="Trebuchet MS" pitchFamily="34" charset="-122"/>
                 <a:cs typeface="Trebuchet MS" pitchFamily="34" charset="-120"/>
               </a:rPr>
-              <a:t>postcards</a:t>
+              <a:t>postgraduate</a:t>
             </a:r>
             <a:endParaRPr lang="en-US" sz="1400" dirty="0"/>
           </a:p>
@@ -17799,7 +17655,7 @@
                 <a:ea typeface="Trebuchet MS" pitchFamily="34" charset="-122"/>
                 <a:cs typeface="Trebuchet MS" pitchFamily="34" charset="-120"/>
               </a:rPr>
-              <a:t>postpone</a:t>
+              <a:t>postnatal</a:t>
             </a:r>
             <a:endParaRPr lang="en-US" sz="1400" dirty="0"/>
           </a:p>
@@ -18130,7 +17986,7 @@
                 <a:ea typeface="Calibri" pitchFamily="34" charset="-122"/>
                 <a:cs typeface="Calibri" pitchFamily="34" charset="-120"/>
               </a:rPr>
-              <a:t>Word Labs  •  wordlabs.app  •  Prefix: 'post-' = after, behind, later</a:t>
+              <a:t>Word Labs  •  wordlabs.app  •  Prefix: 'post-' = after, later, behind</a:t>
             </a:r>
             <a:endParaRPr lang="en-US" sz="800" dirty="0"/>
           </a:p>
@@ -18957,7 +18813,7 @@
                 <a:ea typeface="Calibri" pitchFamily="34" charset="-122"/>
                 <a:cs typeface="Calibri" pitchFamily="34" charset="-120"/>
               </a:rPr>
-              <a:t>Word Labs  •  wordlabs.app  •  Prefix: 'post-' = after, behind, later</a:t>
+              <a:t>Word Labs  •  wordlabs.app  •  Prefix: 'post-' = after, later, behind</a:t>
             </a:r>
             <a:endParaRPr lang="en-US" sz="800" dirty="0"/>
           </a:p>
@@ -19386,7 +19242,7 @@
                 <a:ea typeface="Calibri" pitchFamily="34" charset="-122"/>
                 <a:cs typeface="Calibri" pitchFamily="34" charset="-120"/>
               </a:rPr>
-              <a:t>armed conflict between countries</a:t>
+              <a:t>armed conflict</a:t>
             </a:r>
             <a:endParaRPr lang="en-US" sz="850" dirty="0"/>
           </a:p>
@@ -19942,7 +19798,7 @@
                 <a:ea typeface="Calibri" pitchFamily="34" charset="-122"/>
                 <a:cs typeface="Calibri" pitchFamily="34" charset="-120"/>
               </a:rPr>
-              <a:t>Word Labs  •  wordlabs.app  •  Prefix: 'post-' = after, behind, later</a:t>
+              <a:t>Word Labs  •  wordlabs.app  •  Prefix: 'post-' = after, later, behind</a:t>
             </a:r>
             <a:endParaRPr lang="en-US" sz="800" dirty="0"/>
           </a:p>
@@ -20371,7 +20227,7 @@
                 <a:ea typeface="Calibri" pitchFamily="34" charset="-122"/>
                 <a:cs typeface="Calibri" pitchFamily="34" charset="-120"/>
               </a:rPr>
-              <a:t>armed conflict between countries</a:t>
+              <a:t>armed conflict</a:t>
             </a:r>
             <a:endParaRPr lang="en-US" sz="850" dirty="0"/>
           </a:p>
@@ -21059,7 +20915,7 @@
                 <a:ea typeface="Calibri" pitchFamily="34" charset="-122"/>
                 <a:cs typeface="Calibri" pitchFamily="34" charset="-120"/>
               </a:rPr>
-              <a:t>Word Labs  •  wordlabs.app  •  Prefix: 'post-' = after, behind, later</a:t>
+              <a:t>Word Labs  •  wordlabs.app  •  Prefix: 'post-' = after, later, behind</a:t>
             </a:r>
             <a:endParaRPr lang="en-US" sz="800" dirty="0"/>
           </a:p>
@@ -21488,7 +21344,7 @@
                 <a:ea typeface="Calibri" pitchFamily="34" charset="-122"/>
                 <a:cs typeface="Calibri" pitchFamily="34" charset="-120"/>
               </a:rPr>
-              <a:t>armed conflict between countries</a:t>
+              <a:t>armed conflict</a:t>
             </a:r>
             <a:endParaRPr lang="en-US" sz="850" dirty="0"/>
           </a:p>
@@ -22533,7 +22389,7 @@
                 <a:ea typeface="Calibri" pitchFamily="34" charset="-122"/>
                 <a:cs typeface="Calibri" pitchFamily="34" charset="-120"/>
               </a:rPr>
-              <a:t>Word Labs  •  wordlabs.app  •  Prefix: 'post-' = after, behind, later</a:t>
+              <a:t>Word Labs  •  wordlabs.app  •  Prefix: 'post-' = after, later, behind</a:t>
             </a:r>
             <a:endParaRPr lang="en-US" sz="800" dirty="0"/>
           </a:p>
@@ -22672,7 +22528,7 @@
                 <a:ea typeface="Trebuchet MS" pitchFamily="34" charset="-122"/>
                 <a:cs typeface="Trebuchet MS" pitchFamily="34" charset="-120"/>
               </a:rPr>
-              <a:t>postcards</a:t>
+              <a:t>postgraduate</a:t>
             </a:r>
             <a:endParaRPr lang="en-US" sz="2800" dirty="0"/>
           </a:p>
@@ -23360,7 +23216,7 @@
                 <a:ea typeface="Calibri" pitchFamily="34" charset="-122"/>
                 <a:cs typeface="Calibri" pitchFamily="34" charset="-120"/>
               </a:rPr>
-              <a:t>Word Labs  •  wordlabs.app  •  Prefix: 'post-' = after, behind, later</a:t>
+              <a:t>Word Labs  •  wordlabs.app  •  Prefix: 'post-' = after, later, behind</a:t>
             </a:r>
             <a:endParaRPr lang="en-US" sz="800" dirty="0"/>
           </a:p>
@@ -23499,7 +23355,7 @@
                 <a:ea typeface="Trebuchet MS" pitchFamily="34" charset="-122"/>
                 <a:cs typeface="Trebuchet MS" pitchFamily="34" charset="-120"/>
               </a:rPr>
-              <a:t>postcards</a:t>
+              <a:t>postgraduate</a:t>
             </a:r>
             <a:endParaRPr lang="en-US" sz="2800" dirty="0"/>
           </a:p>
@@ -23579,8 +23435,8 @@
         </p:nvSpPr>
         <p:spPr>
           <a:xfrm>
-            <a:off x="2221992" y="2258568"/>
-            <a:ext cx="1828800" cy="292608"/>
+            <a:off x="1989734" y="2258568"/>
+            <a:ext cx="1581912" cy="292608"/>
           </a:xfrm>
           <a:prstGeom prst="rect">
             <a:avLst>
@@ -23613,8 +23469,8 @@
         </p:nvSpPr>
         <p:spPr>
           <a:xfrm>
-            <a:off x="2221992" y="2258568"/>
-            <a:ext cx="1828800" cy="292608"/>
+            <a:off x="1989734" y="2258568"/>
+            <a:ext cx="1581912" cy="292608"/>
           </a:xfrm>
           <a:prstGeom prst="rect">
             <a:avLst/>
@@ -23652,8 +23508,8 @@
         </p:nvSpPr>
         <p:spPr>
           <a:xfrm>
-            <a:off x="2221992" y="2569464"/>
-            <a:ext cx="1828800" cy="201168"/>
+            <a:off x="1989734" y="2569464"/>
+            <a:ext cx="1581912" cy="201168"/>
           </a:xfrm>
           <a:prstGeom prst="rect">
             <a:avLst/>
@@ -23691,8 +23547,8 @@
         </p:nvSpPr>
         <p:spPr>
           <a:xfrm>
-            <a:off x="4370832" y="2258568"/>
-            <a:ext cx="1828800" cy="292608"/>
+            <a:off x="3659429" y="2258568"/>
+            <a:ext cx="1581912" cy="292608"/>
           </a:xfrm>
           <a:prstGeom prst="rect">
             <a:avLst>
@@ -23725,8 +23581,8 @@
         </p:nvSpPr>
         <p:spPr>
           <a:xfrm>
-            <a:off x="4370832" y="2258568"/>
-            <a:ext cx="1828800" cy="292608"/>
+            <a:off x="3659429" y="2258568"/>
+            <a:ext cx="1581912" cy="292608"/>
           </a:xfrm>
           <a:prstGeom prst="rect">
             <a:avLst/>
@@ -23750,7 +23606,7 @@
                 <a:ea typeface="Trebuchet MS" pitchFamily="34" charset="-122"/>
                 <a:cs typeface="Trebuchet MS" pitchFamily="34" charset="-120"/>
               </a:rPr>
-              <a:t>card</a:t>
+              <a:t>grad</a:t>
             </a:r>
             <a:endParaRPr lang="en-US" sz="1300" dirty="0"/>
           </a:p>
@@ -23764,8 +23620,8 @@
         </p:nvSpPr>
         <p:spPr>
           <a:xfrm>
-            <a:off x="4370832" y="2569464"/>
-            <a:ext cx="1828800" cy="201168"/>
+            <a:off x="3659429" y="2569464"/>
+            <a:ext cx="1581912" cy="201168"/>
           </a:xfrm>
           <a:prstGeom prst="rect">
             <a:avLst/>
@@ -23789,7 +23645,7 @@
                 <a:ea typeface="Calibri" pitchFamily="34" charset="-122"/>
                 <a:cs typeface="Calibri" pitchFamily="34" charset="-120"/>
               </a:rPr>
-              <a:t>a flat piece of stiff paper</a:t>
+              <a:t>step, degree</a:t>
             </a:r>
             <a:endParaRPr lang="en-US" sz="850" dirty="0"/>
           </a:p>
@@ -23803,8 +23659,8 @@
         </p:nvSpPr>
         <p:spPr>
           <a:xfrm>
-            <a:off x="6519672" y="2258568"/>
-            <a:ext cx="1828800" cy="292608"/>
+            <a:off x="5329123" y="2258568"/>
+            <a:ext cx="1581912" cy="292608"/>
           </a:xfrm>
           <a:prstGeom prst="rect">
             <a:avLst>
@@ -23837,8 +23693,8 @@
         </p:nvSpPr>
         <p:spPr>
           <a:xfrm>
-            <a:off x="6519672" y="2258568"/>
-            <a:ext cx="1828800" cy="292608"/>
+            <a:off x="5329123" y="2258568"/>
+            <a:ext cx="1581912" cy="292608"/>
           </a:xfrm>
           <a:prstGeom prst="rect">
             <a:avLst/>
@@ -23862,7 +23718,7 @@
                 <a:ea typeface="Trebuchet MS" pitchFamily="34" charset="-122"/>
                 <a:cs typeface="Trebuchet MS" pitchFamily="34" charset="-120"/>
               </a:rPr>
-              <a:t>s</a:t>
+              <a:t>u</a:t>
             </a:r>
             <a:endParaRPr lang="en-US" sz="1300" dirty="0"/>
           </a:p>
@@ -23876,8 +23732,8 @@
         </p:nvSpPr>
         <p:spPr>
           <a:xfrm>
-            <a:off x="6519672" y="2569464"/>
-            <a:ext cx="1828800" cy="201168"/>
+            <a:off x="5329123" y="2569464"/>
+            <a:ext cx="1581912" cy="201168"/>
           </a:xfrm>
           <a:prstGeom prst="rect">
             <a:avLst/>
@@ -23901,7 +23757,7 @@
                 <a:ea typeface="Calibri" pitchFamily="34" charset="-122"/>
                 <a:cs typeface="Calibri" pitchFamily="34" charset="-120"/>
               </a:rPr>
-              <a:t>more than one</a:t>
+              <a:t>connecting vowel</a:t>
             </a:r>
             <a:endParaRPr lang="en-US" sz="850" dirty="0"/>
           </a:p>
@@ -23909,7 +23765,158 @@
       </p:sp>
       <p:sp>
         <p:nvSpPr>
-          <p:cNvPr id="25" name="Shape 23"/>
+          <p:cNvPr id="25" name="Text 23"/>
+          <p:cNvSpPr/>
+          <p:nvPr/>
+        </p:nvSpPr>
+        <p:spPr>
+          <a:xfrm>
+            <a:off x="5329123" y="2752344"/>
+            <a:ext cx="1581912" cy="182880"/>
+          </a:xfrm>
+          <a:prstGeom prst="rect">
+            <a:avLst/>
+          </a:prstGeom>
+          <a:noFill/>
+          <a:ln/>
+        </p:spPr>
+        <p:txBody>
+          <a:bodyPr wrap="square" lIns="0" tIns="0" rIns="0" bIns="0" rtlCol="0" anchor="t"/>
+          <a:lstStyle/>
+          <a:p>
+            <a:pPr algn="ctr" indent="0" marL="0">
+              <a:buNone/>
+            </a:pPr>
+            <a:r>
+              <a:rPr lang="en-US" sz="700" i="1" dirty="0">
+                <a:solidFill>
+                  <a:srgbClr val="94A3B8"/>
+                </a:solidFill>
+                <a:latin typeface="Calibri" pitchFamily="34" charset="0"/>
+                <a:ea typeface="Calibri" pitchFamily="34" charset="-122"/>
+                <a:cs typeface="Calibri" pitchFamily="34" charset="-120"/>
+              </a:rPr>
+              <a:t>links base to suffix</a:t>
+            </a:r>
+            <a:endParaRPr lang="en-US" sz="700" dirty="0"/>
+          </a:p>
+        </p:txBody>
+      </p:sp>
+      <p:sp>
+        <p:nvSpPr>
+          <p:cNvPr id="26" name="Shape 24"/>
+          <p:cNvSpPr/>
+          <p:nvPr/>
+        </p:nvSpPr>
+        <p:spPr>
+          <a:xfrm>
+            <a:off x="6998818" y="2258568"/>
+            <a:ext cx="1581912" cy="292608"/>
+          </a:xfrm>
+          <a:prstGeom prst="rect">
+            <a:avLst>
+              <a:gd name="adj" fmla="val 25000"/>
+            </a:avLst>
+          </a:prstGeom>
+          <a:solidFill>
+            <a:srgbClr val="FCE7F3"/>
+          </a:solidFill>
+          <a:ln w="19050">
+            <a:solidFill>
+              <a:srgbClr val="DB2777"/>
+            </a:solidFill>
+            <a:prstDash val="solid"/>
+          </a:ln>
+          <a:effectLst>
+            <a:outerShdw sx="100000" sy="100000" kx="0" ky="0" algn="bl" rotWithShape="0" blurRad="101600" dist="38100" dir="8100000">
+              <a:srgbClr val="000000">
+                <a:alpha val="12000"/>
+              </a:srgbClr>
+            </a:outerShdw>
+          </a:effectLst>
+        </p:spPr>
+      </p:sp>
+      <p:sp>
+        <p:nvSpPr>
+          <p:cNvPr id="27" name="Text 25"/>
+          <p:cNvSpPr/>
+          <p:nvPr/>
+        </p:nvSpPr>
+        <p:spPr>
+          <a:xfrm>
+            <a:off x="6998818" y="2258568"/>
+            <a:ext cx="1581912" cy="292608"/>
+          </a:xfrm>
+          <a:prstGeom prst="rect">
+            <a:avLst/>
+          </a:prstGeom>
+          <a:noFill/>
+          <a:ln/>
+        </p:spPr>
+        <p:txBody>
+          <a:bodyPr wrap="square" lIns="0" tIns="0" rIns="0" bIns="0" rtlCol="0" anchor="ctr"/>
+          <a:lstStyle/>
+          <a:p>
+            <a:pPr algn="ctr" indent="0" marL="0">
+              <a:buNone/>
+            </a:pPr>
+            <a:r>
+              <a:rPr lang="en-US" sz="1300" b="1" dirty="0">
+                <a:solidFill>
+                  <a:srgbClr val="9D174D"/>
+                </a:solidFill>
+                <a:latin typeface="Trebuchet MS" pitchFamily="34" charset="0"/>
+                <a:ea typeface="Trebuchet MS" pitchFamily="34" charset="-122"/>
+                <a:cs typeface="Trebuchet MS" pitchFamily="34" charset="-120"/>
+              </a:rPr>
+              <a:t>ate</a:t>
+            </a:r>
+            <a:endParaRPr lang="en-US" sz="1300" dirty="0"/>
+          </a:p>
+        </p:txBody>
+      </p:sp>
+      <p:sp>
+        <p:nvSpPr>
+          <p:cNvPr id="28" name="Text 26"/>
+          <p:cNvSpPr/>
+          <p:nvPr/>
+        </p:nvSpPr>
+        <p:spPr>
+          <a:xfrm>
+            <a:off x="6998818" y="2569464"/>
+            <a:ext cx="1581912" cy="201168"/>
+          </a:xfrm>
+          <a:prstGeom prst="rect">
+            <a:avLst/>
+          </a:prstGeom>
+          <a:noFill/>
+          <a:ln/>
+        </p:spPr>
+        <p:txBody>
+          <a:bodyPr wrap="square" lIns="0" tIns="0" rIns="0" bIns="0" rtlCol="0" anchor="t"/>
+          <a:lstStyle/>
+          <a:p>
+            <a:pPr algn="ctr" indent="0" marL="0">
+              <a:buNone/>
+            </a:pPr>
+            <a:r>
+              <a:rPr lang="en-US" sz="850" dirty="0">
+                <a:solidFill>
+                  <a:srgbClr val="475569"/>
+                </a:solidFill>
+                <a:latin typeface="Calibri" pitchFamily="34" charset="0"/>
+                <a:ea typeface="Calibri" pitchFamily="34" charset="-122"/>
+                <a:cs typeface="Calibri" pitchFamily="34" charset="-120"/>
+              </a:rPr>
+              <a:t>having a particular quality</a:t>
+            </a:r>
+            <a:endParaRPr lang="en-US" sz="850" dirty="0"/>
+          </a:p>
+        </p:txBody>
+      </p:sp>
+      <p:sp>
+        <p:nvSpPr>
+          <p:cNvPr id="29" name="Shape 27"/>
           <p:cNvSpPr/>
           <p:nvPr/>
         </p:nvSpPr>
@@ -23936,7 +23943,7 @@
       </p:sp>
       <p:sp>
         <p:nvSpPr>
-          <p:cNvPr id="26" name="Text 24"/>
+          <p:cNvPr id="30" name="Text 28"/>
           <p:cNvSpPr/>
           <p:nvPr/>
         </p:nvSpPr>
@@ -23975,7 +23982,7 @@
       </p:sp>
       <p:sp>
         <p:nvSpPr>
-          <p:cNvPr id="27" name="Shape 25"/>
+          <p:cNvPr id="31" name="Shape 29"/>
           <p:cNvSpPr/>
           <p:nvPr/>
         </p:nvSpPr>
@@ -24002,7 +24009,7 @@
       </p:sp>
       <p:sp>
         <p:nvSpPr>
-          <p:cNvPr id="28" name="Text 26"/>
+          <p:cNvPr id="32" name="Text 30"/>
           <p:cNvSpPr/>
           <p:nvPr/>
         </p:nvSpPr>
@@ -24041,7 +24048,7 @@
       </p:sp>
       <p:sp>
         <p:nvSpPr>
-          <p:cNvPr id="29" name="Shape 27"/>
+          <p:cNvPr id="33" name="Shape 31"/>
           <p:cNvSpPr/>
           <p:nvPr/>
         </p:nvSpPr>
@@ -24068,7 +24075,7 @@
       </p:sp>
       <p:sp>
         <p:nvSpPr>
-          <p:cNvPr id="30" name="Text 28"/>
+          <p:cNvPr id="34" name="Text 32"/>
           <p:cNvSpPr/>
           <p:nvPr/>
         </p:nvSpPr>
@@ -24107,7 +24114,7 @@
       </p:sp>
       <p:sp>
         <p:nvSpPr>
-          <p:cNvPr id="31" name="Shape 29"/>
+          <p:cNvPr id="35" name="Shape 33"/>
           <p:cNvSpPr/>
           <p:nvPr/>
         </p:nvSpPr>
@@ -24134,7 +24141,7 @@
       </p:sp>
       <p:sp>
         <p:nvSpPr>
-          <p:cNvPr id="32" name="Text 30"/>
+          <p:cNvPr id="36" name="Text 34"/>
           <p:cNvSpPr/>
           <p:nvPr/>
         </p:nvSpPr>
@@ -24457,7 +24464,7 @@
                 <a:ea typeface="Calibri" pitchFamily="34" charset="-122"/>
                 <a:cs typeface="Calibri" pitchFamily="34" charset="-120"/>
               </a:rPr>
-              <a:t>Word Labs  •  wordlabs.app  •  Prefix: 'post-' = after, behind, later</a:t>
+              <a:t>Word Labs  •  wordlabs.app  •  Prefix: 'post-' = after, later, behind</a:t>
             </a:r>
             <a:endParaRPr lang="en-US" sz="800" dirty="0"/>
           </a:p>
@@ -24530,7 +24537,7 @@
                 <a:ea typeface="Trebuchet MS" pitchFamily="34" charset="-122"/>
                 <a:cs typeface="Trebuchet MS" pitchFamily="34" charset="-120"/>
               </a:rPr>
-              <a:t>We are learning that the prefix 'post-' means 'after, behind, later'.</a:t>
+              <a:t>We are learning that the prefix 'post-' means 'after, later, behind'.</a:t>
             </a:r>
             <a:endParaRPr lang="en-US" sz="2000" dirty="0"/>
           </a:p>
@@ -25176,7 +25183,7 @@
                 <a:ea typeface="Calibri" pitchFamily="34" charset="-122"/>
                 <a:cs typeface="Calibri" pitchFamily="34" charset="-120"/>
               </a:rPr>
-              <a:t>Word Labs  •  wordlabs.app  •  Prefix: 'post-' = after, behind, later</a:t>
+              <a:t>Word Labs  •  wordlabs.app  •  Prefix: 'post-' = after, later, behind</a:t>
             </a:r>
             <a:endParaRPr lang="en-US" sz="800" dirty="0"/>
           </a:p>
@@ -25315,7 +25322,7 @@
                 <a:ea typeface="Trebuchet MS" pitchFamily="34" charset="-122"/>
                 <a:cs typeface="Trebuchet MS" pitchFamily="34" charset="-120"/>
               </a:rPr>
-              <a:t>postcards</a:t>
+              <a:t>postgraduate</a:t>
             </a:r>
             <a:endParaRPr lang="en-US" sz="2800" dirty="0"/>
           </a:p>
@@ -25395,8 +25402,8 @@
         </p:nvSpPr>
         <p:spPr>
           <a:xfrm>
-            <a:off x="2221992" y="2258568"/>
-            <a:ext cx="1828800" cy="292608"/>
+            <a:off x="1989734" y="2258568"/>
+            <a:ext cx="1581912" cy="292608"/>
           </a:xfrm>
           <a:prstGeom prst="rect">
             <a:avLst>
@@ -25429,8 +25436,8 @@
         </p:nvSpPr>
         <p:spPr>
           <a:xfrm>
-            <a:off x="2221992" y="2258568"/>
-            <a:ext cx="1828800" cy="292608"/>
+            <a:off x="1989734" y="2258568"/>
+            <a:ext cx="1581912" cy="292608"/>
           </a:xfrm>
           <a:prstGeom prst="rect">
             <a:avLst/>
@@ -25468,8 +25475,8 @@
         </p:nvSpPr>
         <p:spPr>
           <a:xfrm>
-            <a:off x="2221992" y="2569464"/>
-            <a:ext cx="1828800" cy="201168"/>
+            <a:off x="1989734" y="2569464"/>
+            <a:ext cx="1581912" cy="201168"/>
           </a:xfrm>
           <a:prstGeom prst="rect">
             <a:avLst/>
@@ -25507,8 +25514,8 @@
         </p:nvSpPr>
         <p:spPr>
           <a:xfrm>
-            <a:off x="4370832" y="2258568"/>
-            <a:ext cx="1828800" cy="292608"/>
+            <a:off x="3659429" y="2258568"/>
+            <a:ext cx="1581912" cy="292608"/>
           </a:xfrm>
           <a:prstGeom prst="rect">
             <a:avLst>
@@ -25541,8 +25548,8 @@
         </p:nvSpPr>
         <p:spPr>
           <a:xfrm>
-            <a:off x="4370832" y="2258568"/>
-            <a:ext cx="1828800" cy="292608"/>
+            <a:off x="3659429" y="2258568"/>
+            <a:ext cx="1581912" cy="292608"/>
           </a:xfrm>
           <a:prstGeom prst="rect">
             <a:avLst/>
@@ -25566,7 +25573,7 @@
                 <a:ea typeface="Trebuchet MS" pitchFamily="34" charset="-122"/>
                 <a:cs typeface="Trebuchet MS" pitchFamily="34" charset="-120"/>
               </a:rPr>
-              <a:t>card</a:t>
+              <a:t>grad</a:t>
             </a:r>
             <a:endParaRPr lang="en-US" sz="1300" dirty="0"/>
           </a:p>
@@ -25580,8 +25587,8 @@
         </p:nvSpPr>
         <p:spPr>
           <a:xfrm>
-            <a:off x="4370832" y="2569464"/>
-            <a:ext cx="1828800" cy="201168"/>
+            <a:off x="3659429" y="2569464"/>
+            <a:ext cx="1581912" cy="201168"/>
           </a:xfrm>
           <a:prstGeom prst="rect">
             <a:avLst/>
@@ -25605,7 +25612,7 @@
                 <a:ea typeface="Calibri" pitchFamily="34" charset="-122"/>
                 <a:cs typeface="Calibri" pitchFamily="34" charset="-120"/>
               </a:rPr>
-              <a:t>a flat piece of stiff paper</a:t>
+              <a:t>step, degree</a:t>
             </a:r>
             <a:endParaRPr lang="en-US" sz="850" dirty="0"/>
           </a:p>
@@ -25619,8 +25626,8 @@
         </p:nvSpPr>
         <p:spPr>
           <a:xfrm>
-            <a:off x="6519672" y="2258568"/>
-            <a:ext cx="1828800" cy="292608"/>
+            <a:off x="5329123" y="2258568"/>
+            <a:ext cx="1581912" cy="292608"/>
           </a:xfrm>
           <a:prstGeom prst="rect">
             <a:avLst>
@@ -25653,8 +25660,8 @@
         </p:nvSpPr>
         <p:spPr>
           <a:xfrm>
-            <a:off x="6519672" y="2258568"/>
-            <a:ext cx="1828800" cy="292608"/>
+            <a:off x="5329123" y="2258568"/>
+            <a:ext cx="1581912" cy="292608"/>
           </a:xfrm>
           <a:prstGeom prst="rect">
             <a:avLst/>
@@ -25678,7 +25685,7 @@
                 <a:ea typeface="Trebuchet MS" pitchFamily="34" charset="-122"/>
                 <a:cs typeface="Trebuchet MS" pitchFamily="34" charset="-120"/>
               </a:rPr>
-              <a:t>s</a:t>
+              <a:t>u</a:t>
             </a:r>
             <a:endParaRPr lang="en-US" sz="1300" dirty="0"/>
           </a:p>
@@ -25692,8 +25699,8 @@
         </p:nvSpPr>
         <p:spPr>
           <a:xfrm>
-            <a:off x="6519672" y="2569464"/>
-            <a:ext cx="1828800" cy="201168"/>
+            <a:off x="5329123" y="2569464"/>
+            <a:ext cx="1581912" cy="201168"/>
           </a:xfrm>
           <a:prstGeom prst="rect">
             <a:avLst/>
@@ -25717,7 +25724,7 @@
                 <a:ea typeface="Calibri" pitchFamily="34" charset="-122"/>
                 <a:cs typeface="Calibri" pitchFamily="34" charset="-120"/>
               </a:rPr>
-              <a:t>more than one</a:t>
+              <a:t>connecting vowel</a:t>
             </a:r>
             <a:endParaRPr lang="en-US" sz="850" dirty="0"/>
           </a:p>
@@ -25725,7 +25732,158 @@
       </p:sp>
       <p:sp>
         <p:nvSpPr>
-          <p:cNvPr id="25" name="Shape 23"/>
+          <p:cNvPr id="25" name="Text 23"/>
+          <p:cNvSpPr/>
+          <p:nvPr/>
+        </p:nvSpPr>
+        <p:spPr>
+          <a:xfrm>
+            <a:off x="5329123" y="2752344"/>
+            <a:ext cx="1581912" cy="182880"/>
+          </a:xfrm>
+          <a:prstGeom prst="rect">
+            <a:avLst/>
+          </a:prstGeom>
+          <a:noFill/>
+          <a:ln/>
+        </p:spPr>
+        <p:txBody>
+          <a:bodyPr wrap="square" lIns="0" tIns="0" rIns="0" bIns="0" rtlCol="0" anchor="t"/>
+          <a:lstStyle/>
+          <a:p>
+            <a:pPr algn="ctr" indent="0" marL="0">
+              <a:buNone/>
+            </a:pPr>
+            <a:r>
+              <a:rPr lang="en-US" sz="700" i="1" dirty="0">
+                <a:solidFill>
+                  <a:srgbClr val="94A3B8"/>
+                </a:solidFill>
+                <a:latin typeface="Calibri" pitchFamily="34" charset="0"/>
+                <a:ea typeface="Calibri" pitchFamily="34" charset="-122"/>
+                <a:cs typeface="Calibri" pitchFamily="34" charset="-120"/>
+              </a:rPr>
+              <a:t>links base to suffix</a:t>
+            </a:r>
+            <a:endParaRPr lang="en-US" sz="700" dirty="0"/>
+          </a:p>
+        </p:txBody>
+      </p:sp>
+      <p:sp>
+        <p:nvSpPr>
+          <p:cNvPr id="26" name="Shape 24"/>
+          <p:cNvSpPr/>
+          <p:nvPr/>
+        </p:nvSpPr>
+        <p:spPr>
+          <a:xfrm>
+            <a:off x="6998818" y="2258568"/>
+            <a:ext cx="1581912" cy="292608"/>
+          </a:xfrm>
+          <a:prstGeom prst="rect">
+            <a:avLst>
+              <a:gd name="adj" fmla="val 25000"/>
+            </a:avLst>
+          </a:prstGeom>
+          <a:solidFill>
+            <a:srgbClr val="FCE7F3"/>
+          </a:solidFill>
+          <a:ln w="19050">
+            <a:solidFill>
+              <a:srgbClr val="DB2777"/>
+            </a:solidFill>
+            <a:prstDash val="solid"/>
+          </a:ln>
+          <a:effectLst>
+            <a:outerShdw sx="100000" sy="100000" kx="0" ky="0" algn="bl" rotWithShape="0" blurRad="101600" dist="38100" dir="8100000">
+              <a:srgbClr val="000000">
+                <a:alpha val="12000"/>
+              </a:srgbClr>
+            </a:outerShdw>
+          </a:effectLst>
+        </p:spPr>
+      </p:sp>
+      <p:sp>
+        <p:nvSpPr>
+          <p:cNvPr id="27" name="Text 25"/>
+          <p:cNvSpPr/>
+          <p:nvPr/>
+        </p:nvSpPr>
+        <p:spPr>
+          <a:xfrm>
+            <a:off x="6998818" y="2258568"/>
+            <a:ext cx="1581912" cy="292608"/>
+          </a:xfrm>
+          <a:prstGeom prst="rect">
+            <a:avLst/>
+          </a:prstGeom>
+          <a:noFill/>
+          <a:ln/>
+        </p:spPr>
+        <p:txBody>
+          <a:bodyPr wrap="square" lIns="0" tIns="0" rIns="0" bIns="0" rtlCol="0" anchor="ctr"/>
+          <a:lstStyle/>
+          <a:p>
+            <a:pPr algn="ctr" indent="0" marL="0">
+              <a:buNone/>
+            </a:pPr>
+            <a:r>
+              <a:rPr lang="en-US" sz="1300" b="1" dirty="0">
+                <a:solidFill>
+                  <a:srgbClr val="9D174D"/>
+                </a:solidFill>
+                <a:latin typeface="Trebuchet MS" pitchFamily="34" charset="0"/>
+                <a:ea typeface="Trebuchet MS" pitchFamily="34" charset="-122"/>
+                <a:cs typeface="Trebuchet MS" pitchFamily="34" charset="-120"/>
+              </a:rPr>
+              <a:t>ate</a:t>
+            </a:r>
+            <a:endParaRPr lang="en-US" sz="1300" dirty="0"/>
+          </a:p>
+        </p:txBody>
+      </p:sp>
+      <p:sp>
+        <p:nvSpPr>
+          <p:cNvPr id="28" name="Text 26"/>
+          <p:cNvSpPr/>
+          <p:nvPr/>
+        </p:nvSpPr>
+        <p:spPr>
+          <a:xfrm>
+            <a:off x="6998818" y="2569464"/>
+            <a:ext cx="1581912" cy="201168"/>
+          </a:xfrm>
+          <a:prstGeom prst="rect">
+            <a:avLst/>
+          </a:prstGeom>
+          <a:noFill/>
+          <a:ln/>
+        </p:spPr>
+        <p:txBody>
+          <a:bodyPr wrap="square" lIns="0" tIns="0" rIns="0" bIns="0" rtlCol="0" anchor="t"/>
+          <a:lstStyle/>
+          <a:p>
+            <a:pPr algn="ctr" indent="0" marL="0">
+              <a:buNone/>
+            </a:pPr>
+            <a:r>
+              <a:rPr lang="en-US" sz="850" dirty="0">
+                <a:solidFill>
+                  <a:srgbClr val="475569"/>
+                </a:solidFill>
+                <a:latin typeface="Calibri" pitchFamily="34" charset="0"/>
+                <a:ea typeface="Calibri" pitchFamily="34" charset="-122"/>
+                <a:cs typeface="Calibri" pitchFamily="34" charset="-120"/>
+              </a:rPr>
+              <a:t>having a particular quality</a:t>
+            </a:r>
+            <a:endParaRPr lang="en-US" sz="850" dirty="0"/>
+          </a:p>
+        </p:txBody>
+      </p:sp>
+      <p:sp>
+        <p:nvSpPr>
+          <p:cNvPr id="29" name="Shape 27"/>
           <p:cNvSpPr/>
           <p:nvPr/>
         </p:nvSpPr>
@@ -25752,7 +25910,7 @@
       </p:sp>
       <p:sp>
         <p:nvSpPr>
-          <p:cNvPr id="26" name="Text 24"/>
+          <p:cNvPr id="30" name="Text 28"/>
           <p:cNvSpPr/>
           <p:nvPr/>
         </p:nvSpPr>
@@ -25791,7 +25949,7 @@
       </p:sp>
       <p:sp>
         <p:nvSpPr>
-          <p:cNvPr id="27" name="Shape 25"/>
+          <p:cNvPr id="31" name="Shape 29"/>
           <p:cNvSpPr/>
           <p:nvPr/>
         </p:nvSpPr>
@@ -25818,14 +25976,14 @@
       </p:sp>
       <p:sp>
         <p:nvSpPr>
-          <p:cNvPr id="28" name="Shape 26"/>
-          <p:cNvSpPr/>
-          <p:nvPr/>
-        </p:nvSpPr>
-        <p:spPr>
-          <a:xfrm>
-            <a:off x="2999232" y="3364992"/>
-            <a:ext cx="1645920" cy="475488"/>
+          <p:cNvPr id="32" name="Shape 30"/>
+          <p:cNvSpPr/>
+          <p:nvPr/>
+        </p:nvSpPr>
+        <p:spPr>
+          <a:xfrm>
+            <a:off x="1975104" y="3364992"/>
+            <a:ext cx="1554480" cy="475488"/>
           </a:xfrm>
           <a:prstGeom prst="rect">
             <a:avLst>
@@ -25845,14 +26003,14 @@
       </p:sp>
       <p:sp>
         <p:nvSpPr>
-          <p:cNvPr id="29" name="Text 27"/>
-          <p:cNvSpPr/>
-          <p:nvPr/>
-        </p:nvSpPr>
-        <p:spPr>
-          <a:xfrm>
-            <a:off x="2999232" y="3364992"/>
-            <a:ext cx="1645920" cy="475488"/>
+          <p:cNvPr id="33" name="Text 31"/>
+          <p:cNvSpPr/>
+          <p:nvPr/>
+        </p:nvSpPr>
+        <p:spPr>
+          <a:xfrm>
+            <a:off x="1975104" y="3364992"/>
+            <a:ext cx="1554480" cy="475488"/>
           </a:xfrm>
           <a:prstGeom prst="rect">
             <a:avLst/>
@@ -25884,14 +26042,14 @@
       </p:sp>
       <p:sp>
         <p:nvSpPr>
-          <p:cNvPr id="30" name="Text 28"/>
-          <p:cNvSpPr/>
-          <p:nvPr/>
-        </p:nvSpPr>
-        <p:spPr>
-          <a:xfrm>
-            <a:off x="4645152" y="3364992"/>
-            <a:ext cx="1097280" cy="475488"/>
+          <p:cNvPr id="34" name="Text 32"/>
+          <p:cNvSpPr/>
+          <p:nvPr/>
+        </p:nvSpPr>
+        <p:spPr>
+          <a:xfrm>
+            <a:off x="3529584" y="3364992"/>
+            <a:ext cx="73152" cy="475488"/>
           </a:xfrm>
           <a:prstGeom prst="rect">
             <a:avLst/>
@@ -25923,14 +26081,14 @@
       </p:sp>
       <p:sp>
         <p:nvSpPr>
-          <p:cNvPr id="31" name="Shape 29"/>
-          <p:cNvSpPr/>
-          <p:nvPr/>
-        </p:nvSpPr>
-        <p:spPr>
-          <a:xfrm>
-            <a:off x="5742432" y="3364992"/>
-            <a:ext cx="1645920" cy="475488"/>
+          <p:cNvPr id="35" name="Shape 33"/>
+          <p:cNvSpPr/>
+          <p:nvPr/>
+        </p:nvSpPr>
+        <p:spPr>
+          <a:xfrm>
+            <a:off x="3602736" y="3364992"/>
+            <a:ext cx="1554480" cy="475488"/>
           </a:xfrm>
           <a:prstGeom prst="rect">
             <a:avLst>
@@ -25950,14 +26108,14 @@
       </p:sp>
       <p:sp>
         <p:nvSpPr>
-          <p:cNvPr id="32" name="Text 30"/>
-          <p:cNvSpPr/>
-          <p:nvPr/>
-        </p:nvSpPr>
-        <p:spPr>
-          <a:xfrm>
-            <a:off x="5742432" y="3364992"/>
-            <a:ext cx="1645920" cy="475488"/>
+          <p:cNvPr id="36" name="Text 34"/>
+          <p:cNvSpPr/>
+          <p:nvPr/>
+        </p:nvSpPr>
+        <p:spPr>
+          <a:xfrm>
+            <a:off x="3602736" y="3364992"/>
+            <a:ext cx="1554480" cy="475488"/>
           </a:xfrm>
           <a:prstGeom prst="rect">
             <a:avLst/>
@@ -25981,7 +26139,7 @@
                 <a:ea typeface="Trebuchet MS" pitchFamily="34" charset="-122"/>
                 <a:cs typeface="Trebuchet MS" pitchFamily="34" charset="-120"/>
               </a:rPr>
-              <a:t>cards</a:t>
+              <a:t>grad</a:t>
             </a:r>
             <a:endParaRPr lang="en-US" sz="1400" dirty="0"/>
           </a:p>
@@ -25989,7 +26147,217 @@
       </p:sp>
       <p:sp>
         <p:nvSpPr>
-          <p:cNvPr id="33" name="Shape 31"/>
+          <p:cNvPr id="37" name="Text 35"/>
+          <p:cNvSpPr/>
+          <p:nvPr/>
+        </p:nvSpPr>
+        <p:spPr>
+          <a:xfrm>
+            <a:off x="5157216" y="3364992"/>
+            <a:ext cx="73152" cy="475488"/>
+          </a:xfrm>
+          <a:prstGeom prst="rect">
+            <a:avLst/>
+          </a:prstGeom>
+          <a:noFill/>
+          <a:ln/>
+        </p:spPr>
+        <p:txBody>
+          <a:bodyPr wrap="square" lIns="0" tIns="0" rIns="0" bIns="0" rtlCol="0" anchor="ctr"/>
+          <a:lstStyle/>
+          <a:p>
+            <a:pPr algn="ctr" indent="0" marL="0">
+              <a:buNone/>
+            </a:pPr>
+            <a:r>
+              <a:rPr lang="en-US" sz="1600" b="1" dirty="0">
+                <a:solidFill>
+                  <a:srgbClr val="0D9488"/>
+                </a:solidFill>
+                <a:latin typeface="Trebuchet MS" pitchFamily="34" charset="0"/>
+                <a:ea typeface="Trebuchet MS" pitchFamily="34" charset="-122"/>
+                <a:cs typeface="Trebuchet MS" pitchFamily="34" charset="-120"/>
+              </a:rPr>
+              <a:t>·</a:t>
+            </a:r>
+            <a:endParaRPr lang="en-US" sz="1600" dirty="0"/>
+          </a:p>
+        </p:txBody>
+      </p:sp>
+      <p:sp>
+        <p:nvSpPr>
+          <p:cNvPr id="38" name="Shape 36"/>
+          <p:cNvSpPr/>
+          <p:nvPr/>
+        </p:nvSpPr>
+        <p:spPr>
+          <a:xfrm>
+            <a:off x="5230368" y="3364992"/>
+            <a:ext cx="1554480" cy="475488"/>
+          </a:xfrm>
+          <a:prstGeom prst="rect">
+            <a:avLst>
+              <a:gd name="adj" fmla="val 9615"/>
+            </a:avLst>
+          </a:prstGeom>
+          <a:solidFill>
+            <a:srgbClr val="FFFFFF"/>
+          </a:solidFill>
+          <a:ln w="12700">
+            <a:solidFill>
+              <a:srgbClr val="0D9488"/>
+            </a:solidFill>
+            <a:prstDash val="solid"/>
+          </a:ln>
+        </p:spPr>
+      </p:sp>
+      <p:sp>
+        <p:nvSpPr>
+          <p:cNvPr id="39" name="Text 37"/>
+          <p:cNvSpPr/>
+          <p:nvPr/>
+        </p:nvSpPr>
+        <p:spPr>
+          <a:xfrm>
+            <a:off x="5230368" y="3364992"/>
+            <a:ext cx="1554480" cy="475488"/>
+          </a:xfrm>
+          <a:prstGeom prst="rect">
+            <a:avLst/>
+          </a:prstGeom>
+          <a:noFill/>
+          <a:ln/>
+        </p:spPr>
+        <p:txBody>
+          <a:bodyPr wrap="square" lIns="0" tIns="0" rIns="0" bIns="0" rtlCol="0" anchor="ctr"/>
+          <a:lstStyle/>
+          <a:p>
+            <a:pPr algn="ctr" indent="0" marL="0">
+              <a:buNone/>
+            </a:pPr>
+            <a:r>
+              <a:rPr lang="en-US" sz="1400" b="1" dirty="0">
+                <a:solidFill>
+                  <a:srgbClr val="0D9488"/>
+                </a:solidFill>
+                <a:latin typeface="Trebuchet MS" pitchFamily="34" charset="0"/>
+                <a:ea typeface="Trebuchet MS" pitchFamily="34" charset="-122"/>
+                <a:cs typeface="Trebuchet MS" pitchFamily="34" charset="-120"/>
+              </a:rPr>
+              <a:t>u</a:t>
+            </a:r>
+            <a:endParaRPr lang="en-US" sz="1400" dirty="0"/>
+          </a:p>
+        </p:txBody>
+      </p:sp>
+      <p:sp>
+        <p:nvSpPr>
+          <p:cNvPr id="40" name="Text 38"/>
+          <p:cNvSpPr/>
+          <p:nvPr/>
+        </p:nvSpPr>
+        <p:spPr>
+          <a:xfrm>
+            <a:off x="6784848" y="3364992"/>
+            <a:ext cx="73152" cy="475488"/>
+          </a:xfrm>
+          <a:prstGeom prst="rect">
+            <a:avLst/>
+          </a:prstGeom>
+          <a:noFill/>
+          <a:ln/>
+        </p:spPr>
+        <p:txBody>
+          <a:bodyPr wrap="square" lIns="0" tIns="0" rIns="0" bIns="0" rtlCol="0" anchor="ctr"/>
+          <a:lstStyle/>
+          <a:p>
+            <a:pPr algn="ctr" indent="0" marL="0">
+              <a:buNone/>
+            </a:pPr>
+            <a:r>
+              <a:rPr lang="en-US" sz="1600" b="1" dirty="0">
+                <a:solidFill>
+                  <a:srgbClr val="0D9488"/>
+                </a:solidFill>
+                <a:latin typeface="Trebuchet MS" pitchFamily="34" charset="0"/>
+                <a:ea typeface="Trebuchet MS" pitchFamily="34" charset="-122"/>
+                <a:cs typeface="Trebuchet MS" pitchFamily="34" charset="-120"/>
+              </a:rPr>
+              <a:t>·</a:t>
+            </a:r>
+            <a:endParaRPr lang="en-US" sz="1600" dirty="0"/>
+          </a:p>
+        </p:txBody>
+      </p:sp>
+      <p:sp>
+        <p:nvSpPr>
+          <p:cNvPr id="41" name="Shape 39"/>
+          <p:cNvSpPr/>
+          <p:nvPr/>
+        </p:nvSpPr>
+        <p:spPr>
+          <a:xfrm>
+            <a:off x="6858000" y="3364992"/>
+            <a:ext cx="1554480" cy="475488"/>
+          </a:xfrm>
+          <a:prstGeom prst="rect">
+            <a:avLst>
+              <a:gd name="adj" fmla="val 9615"/>
+            </a:avLst>
+          </a:prstGeom>
+          <a:solidFill>
+            <a:srgbClr val="FFFFFF"/>
+          </a:solidFill>
+          <a:ln w="12700">
+            <a:solidFill>
+              <a:srgbClr val="0D9488"/>
+            </a:solidFill>
+            <a:prstDash val="solid"/>
+          </a:ln>
+        </p:spPr>
+      </p:sp>
+      <p:sp>
+        <p:nvSpPr>
+          <p:cNvPr id="42" name="Text 40"/>
+          <p:cNvSpPr/>
+          <p:nvPr/>
+        </p:nvSpPr>
+        <p:spPr>
+          <a:xfrm>
+            <a:off x="6858000" y="3364992"/>
+            <a:ext cx="1554480" cy="475488"/>
+          </a:xfrm>
+          <a:prstGeom prst="rect">
+            <a:avLst/>
+          </a:prstGeom>
+          <a:noFill/>
+          <a:ln/>
+        </p:spPr>
+        <p:txBody>
+          <a:bodyPr wrap="square" lIns="0" tIns="0" rIns="0" bIns="0" rtlCol="0" anchor="ctr"/>
+          <a:lstStyle/>
+          <a:p>
+            <a:pPr algn="ctr" indent="0" marL="0">
+              <a:buNone/>
+            </a:pPr>
+            <a:r>
+              <a:rPr lang="en-US" sz="1400" b="1" dirty="0">
+                <a:solidFill>
+                  <a:srgbClr val="0D9488"/>
+                </a:solidFill>
+                <a:latin typeface="Trebuchet MS" pitchFamily="34" charset="0"/>
+                <a:ea typeface="Trebuchet MS" pitchFamily="34" charset="-122"/>
+                <a:cs typeface="Trebuchet MS" pitchFamily="34" charset="-120"/>
+              </a:rPr>
+              <a:t>ate</a:t>
+            </a:r>
+            <a:endParaRPr lang="en-US" sz="1400" dirty="0"/>
+          </a:p>
+        </p:txBody>
+      </p:sp>
+      <p:sp>
+        <p:nvSpPr>
+          <p:cNvPr id="43" name="Shape 41"/>
           <p:cNvSpPr/>
           <p:nvPr/>
         </p:nvSpPr>
@@ -26016,7 +26384,7 @@
       </p:sp>
       <p:sp>
         <p:nvSpPr>
-          <p:cNvPr id="34" name="Text 32"/>
+          <p:cNvPr id="44" name="Text 42"/>
           <p:cNvSpPr/>
           <p:nvPr/>
         </p:nvSpPr>
@@ -26055,7 +26423,7 @@
       </p:sp>
       <p:sp>
         <p:nvSpPr>
-          <p:cNvPr id="35" name="Shape 33"/>
+          <p:cNvPr id="45" name="Shape 43"/>
           <p:cNvSpPr/>
           <p:nvPr/>
         </p:nvSpPr>
@@ -26082,7 +26450,7 @@
       </p:sp>
       <p:sp>
         <p:nvSpPr>
-          <p:cNvPr id="36" name="Text 34"/>
+          <p:cNvPr id="46" name="Text 44"/>
           <p:cNvSpPr/>
           <p:nvPr/>
         </p:nvSpPr>
@@ -26405,7 +26773,7 @@
                 <a:ea typeface="Calibri" pitchFamily="34" charset="-122"/>
                 <a:cs typeface="Calibri" pitchFamily="34" charset="-120"/>
               </a:rPr>
-              <a:t>Word Labs  •  wordlabs.app  •  Prefix: 'post-' = after, behind, later</a:t>
+              <a:t>Word Labs  •  wordlabs.app  •  Prefix: 'post-' = after, later, behind</a:t>
             </a:r>
             <a:endParaRPr lang="en-US" sz="800" dirty="0"/>
           </a:p>
@@ -26544,7 +26912,7 @@
                 <a:ea typeface="Trebuchet MS" pitchFamily="34" charset="-122"/>
                 <a:cs typeface="Trebuchet MS" pitchFamily="34" charset="-120"/>
               </a:rPr>
-              <a:t>postcards</a:t>
+              <a:t>postgraduate</a:t>
             </a:r>
             <a:endParaRPr lang="en-US" sz="2800" dirty="0"/>
           </a:p>
@@ -26624,8 +26992,8 @@
         </p:nvSpPr>
         <p:spPr>
           <a:xfrm>
-            <a:off x="2221992" y="2258568"/>
-            <a:ext cx="1828800" cy="292608"/>
+            <a:off x="1989734" y="2258568"/>
+            <a:ext cx="1581912" cy="292608"/>
           </a:xfrm>
           <a:prstGeom prst="rect">
             <a:avLst>
@@ -26658,8 +27026,8 @@
         </p:nvSpPr>
         <p:spPr>
           <a:xfrm>
-            <a:off x="2221992" y="2258568"/>
-            <a:ext cx="1828800" cy="292608"/>
+            <a:off x="1989734" y="2258568"/>
+            <a:ext cx="1581912" cy="292608"/>
           </a:xfrm>
           <a:prstGeom prst="rect">
             <a:avLst/>
@@ -26697,8 +27065,8 @@
         </p:nvSpPr>
         <p:spPr>
           <a:xfrm>
-            <a:off x="2221992" y="2569464"/>
-            <a:ext cx="1828800" cy="201168"/>
+            <a:off x="1989734" y="2569464"/>
+            <a:ext cx="1581912" cy="201168"/>
           </a:xfrm>
           <a:prstGeom prst="rect">
             <a:avLst/>
@@ -26736,8 +27104,8 @@
         </p:nvSpPr>
         <p:spPr>
           <a:xfrm>
-            <a:off x="4370832" y="2258568"/>
-            <a:ext cx="1828800" cy="292608"/>
+            <a:off x="3659429" y="2258568"/>
+            <a:ext cx="1581912" cy="292608"/>
           </a:xfrm>
           <a:prstGeom prst="rect">
             <a:avLst>
@@ -26770,8 +27138,8 @@
         </p:nvSpPr>
         <p:spPr>
           <a:xfrm>
-            <a:off x="4370832" y="2258568"/>
-            <a:ext cx="1828800" cy="292608"/>
+            <a:off x="3659429" y="2258568"/>
+            <a:ext cx="1581912" cy="292608"/>
           </a:xfrm>
           <a:prstGeom prst="rect">
             <a:avLst/>
@@ -26795,7 +27163,7 @@
                 <a:ea typeface="Trebuchet MS" pitchFamily="34" charset="-122"/>
                 <a:cs typeface="Trebuchet MS" pitchFamily="34" charset="-120"/>
               </a:rPr>
-              <a:t>card</a:t>
+              <a:t>grad</a:t>
             </a:r>
             <a:endParaRPr lang="en-US" sz="1300" dirty="0"/>
           </a:p>
@@ -26809,8 +27177,8 @@
         </p:nvSpPr>
         <p:spPr>
           <a:xfrm>
-            <a:off x="4370832" y="2569464"/>
-            <a:ext cx="1828800" cy="201168"/>
+            <a:off x="3659429" y="2569464"/>
+            <a:ext cx="1581912" cy="201168"/>
           </a:xfrm>
           <a:prstGeom prst="rect">
             <a:avLst/>
@@ -26834,7 +27202,7 @@
                 <a:ea typeface="Calibri" pitchFamily="34" charset="-122"/>
                 <a:cs typeface="Calibri" pitchFamily="34" charset="-120"/>
               </a:rPr>
-              <a:t>a flat piece of stiff paper</a:t>
+              <a:t>step, degree</a:t>
             </a:r>
             <a:endParaRPr lang="en-US" sz="850" dirty="0"/>
           </a:p>
@@ -26848,8 +27216,8 @@
         </p:nvSpPr>
         <p:spPr>
           <a:xfrm>
-            <a:off x="6519672" y="2258568"/>
-            <a:ext cx="1828800" cy="292608"/>
+            <a:off x="5329123" y="2258568"/>
+            <a:ext cx="1581912" cy="292608"/>
           </a:xfrm>
           <a:prstGeom prst="rect">
             <a:avLst>
@@ -26882,8 +27250,8 @@
         </p:nvSpPr>
         <p:spPr>
           <a:xfrm>
-            <a:off x="6519672" y="2258568"/>
-            <a:ext cx="1828800" cy="292608"/>
+            <a:off x="5329123" y="2258568"/>
+            <a:ext cx="1581912" cy="292608"/>
           </a:xfrm>
           <a:prstGeom prst="rect">
             <a:avLst/>
@@ -26907,7 +27275,7 @@
                 <a:ea typeface="Trebuchet MS" pitchFamily="34" charset="-122"/>
                 <a:cs typeface="Trebuchet MS" pitchFamily="34" charset="-120"/>
               </a:rPr>
-              <a:t>s</a:t>
+              <a:t>u</a:t>
             </a:r>
             <a:endParaRPr lang="en-US" sz="1300" dirty="0"/>
           </a:p>
@@ -26921,8 +27289,8 @@
         </p:nvSpPr>
         <p:spPr>
           <a:xfrm>
-            <a:off x="6519672" y="2569464"/>
-            <a:ext cx="1828800" cy="201168"/>
+            <a:off x="5329123" y="2569464"/>
+            <a:ext cx="1581912" cy="201168"/>
           </a:xfrm>
           <a:prstGeom prst="rect">
             <a:avLst/>
@@ -26946,7 +27314,7 @@
                 <a:ea typeface="Calibri" pitchFamily="34" charset="-122"/>
                 <a:cs typeface="Calibri" pitchFamily="34" charset="-120"/>
               </a:rPr>
-              <a:t>more than one</a:t>
+              <a:t>connecting vowel</a:t>
             </a:r>
             <a:endParaRPr lang="en-US" sz="850" dirty="0"/>
           </a:p>
@@ -26954,7 +27322,158 @@
       </p:sp>
       <p:sp>
         <p:nvSpPr>
-          <p:cNvPr id="25" name="Shape 23"/>
+          <p:cNvPr id="25" name="Text 23"/>
+          <p:cNvSpPr/>
+          <p:nvPr/>
+        </p:nvSpPr>
+        <p:spPr>
+          <a:xfrm>
+            <a:off x="5329123" y="2752344"/>
+            <a:ext cx="1581912" cy="182880"/>
+          </a:xfrm>
+          <a:prstGeom prst="rect">
+            <a:avLst/>
+          </a:prstGeom>
+          <a:noFill/>
+          <a:ln/>
+        </p:spPr>
+        <p:txBody>
+          <a:bodyPr wrap="square" lIns="0" tIns="0" rIns="0" bIns="0" rtlCol="0" anchor="t"/>
+          <a:lstStyle/>
+          <a:p>
+            <a:pPr algn="ctr" indent="0" marL="0">
+              <a:buNone/>
+            </a:pPr>
+            <a:r>
+              <a:rPr lang="en-US" sz="700" i="1" dirty="0">
+                <a:solidFill>
+                  <a:srgbClr val="94A3B8"/>
+                </a:solidFill>
+                <a:latin typeface="Calibri" pitchFamily="34" charset="0"/>
+                <a:ea typeface="Calibri" pitchFamily="34" charset="-122"/>
+                <a:cs typeface="Calibri" pitchFamily="34" charset="-120"/>
+              </a:rPr>
+              <a:t>links base to suffix</a:t>
+            </a:r>
+            <a:endParaRPr lang="en-US" sz="700" dirty="0"/>
+          </a:p>
+        </p:txBody>
+      </p:sp>
+      <p:sp>
+        <p:nvSpPr>
+          <p:cNvPr id="26" name="Shape 24"/>
+          <p:cNvSpPr/>
+          <p:nvPr/>
+        </p:nvSpPr>
+        <p:spPr>
+          <a:xfrm>
+            <a:off x="6998818" y="2258568"/>
+            <a:ext cx="1581912" cy="292608"/>
+          </a:xfrm>
+          <a:prstGeom prst="rect">
+            <a:avLst>
+              <a:gd name="adj" fmla="val 25000"/>
+            </a:avLst>
+          </a:prstGeom>
+          <a:solidFill>
+            <a:srgbClr val="FCE7F3"/>
+          </a:solidFill>
+          <a:ln w="19050">
+            <a:solidFill>
+              <a:srgbClr val="DB2777"/>
+            </a:solidFill>
+            <a:prstDash val="solid"/>
+          </a:ln>
+          <a:effectLst>
+            <a:outerShdw sx="100000" sy="100000" kx="0" ky="0" algn="bl" rotWithShape="0" blurRad="101600" dist="38100" dir="8100000">
+              <a:srgbClr val="000000">
+                <a:alpha val="12000"/>
+              </a:srgbClr>
+            </a:outerShdw>
+          </a:effectLst>
+        </p:spPr>
+      </p:sp>
+      <p:sp>
+        <p:nvSpPr>
+          <p:cNvPr id="27" name="Text 25"/>
+          <p:cNvSpPr/>
+          <p:nvPr/>
+        </p:nvSpPr>
+        <p:spPr>
+          <a:xfrm>
+            <a:off x="6998818" y="2258568"/>
+            <a:ext cx="1581912" cy="292608"/>
+          </a:xfrm>
+          <a:prstGeom prst="rect">
+            <a:avLst/>
+          </a:prstGeom>
+          <a:noFill/>
+          <a:ln/>
+        </p:spPr>
+        <p:txBody>
+          <a:bodyPr wrap="square" lIns="0" tIns="0" rIns="0" bIns="0" rtlCol="0" anchor="ctr"/>
+          <a:lstStyle/>
+          <a:p>
+            <a:pPr algn="ctr" indent="0" marL="0">
+              <a:buNone/>
+            </a:pPr>
+            <a:r>
+              <a:rPr lang="en-US" sz="1300" b="1" dirty="0">
+                <a:solidFill>
+                  <a:srgbClr val="9D174D"/>
+                </a:solidFill>
+                <a:latin typeface="Trebuchet MS" pitchFamily="34" charset="0"/>
+                <a:ea typeface="Trebuchet MS" pitchFamily="34" charset="-122"/>
+                <a:cs typeface="Trebuchet MS" pitchFamily="34" charset="-120"/>
+              </a:rPr>
+              <a:t>ate</a:t>
+            </a:r>
+            <a:endParaRPr lang="en-US" sz="1300" dirty="0"/>
+          </a:p>
+        </p:txBody>
+      </p:sp>
+      <p:sp>
+        <p:nvSpPr>
+          <p:cNvPr id="28" name="Text 26"/>
+          <p:cNvSpPr/>
+          <p:nvPr/>
+        </p:nvSpPr>
+        <p:spPr>
+          <a:xfrm>
+            <a:off x="6998818" y="2569464"/>
+            <a:ext cx="1581912" cy="201168"/>
+          </a:xfrm>
+          <a:prstGeom prst="rect">
+            <a:avLst/>
+          </a:prstGeom>
+          <a:noFill/>
+          <a:ln/>
+        </p:spPr>
+        <p:txBody>
+          <a:bodyPr wrap="square" lIns="0" tIns="0" rIns="0" bIns="0" rtlCol="0" anchor="t"/>
+          <a:lstStyle/>
+          <a:p>
+            <a:pPr algn="ctr" indent="0" marL="0">
+              <a:buNone/>
+            </a:pPr>
+            <a:r>
+              <a:rPr lang="en-US" sz="850" dirty="0">
+                <a:solidFill>
+                  <a:srgbClr val="475569"/>
+                </a:solidFill>
+                <a:latin typeface="Calibri" pitchFamily="34" charset="0"/>
+                <a:ea typeface="Calibri" pitchFamily="34" charset="-122"/>
+                <a:cs typeface="Calibri" pitchFamily="34" charset="-120"/>
+              </a:rPr>
+              <a:t>having a particular quality</a:t>
+            </a:r>
+            <a:endParaRPr lang="en-US" sz="850" dirty="0"/>
+          </a:p>
+        </p:txBody>
+      </p:sp>
+      <p:sp>
+        <p:nvSpPr>
+          <p:cNvPr id="29" name="Shape 27"/>
           <p:cNvSpPr/>
           <p:nvPr/>
         </p:nvSpPr>
@@ -26981,7 +27500,7 @@
       </p:sp>
       <p:sp>
         <p:nvSpPr>
-          <p:cNvPr id="26" name="Text 24"/>
+          <p:cNvPr id="30" name="Text 28"/>
           <p:cNvSpPr/>
           <p:nvPr/>
         </p:nvSpPr>
@@ -27020,7 +27539,7 @@
       </p:sp>
       <p:sp>
         <p:nvSpPr>
-          <p:cNvPr id="27" name="Shape 25"/>
+          <p:cNvPr id="31" name="Shape 29"/>
           <p:cNvSpPr/>
           <p:nvPr/>
         </p:nvSpPr>
@@ -27047,14 +27566,14 @@
       </p:sp>
       <p:sp>
         <p:nvSpPr>
-          <p:cNvPr id="28" name="Shape 26"/>
-          <p:cNvSpPr/>
-          <p:nvPr/>
-        </p:nvSpPr>
-        <p:spPr>
-          <a:xfrm>
-            <a:off x="2999232" y="3364992"/>
-            <a:ext cx="1645920" cy="475488"/>
+          <p:cNvPr id="32" name="Shape 30"/>
+          <p:cNvSpPr/>
+          <p:nvPr/>
+        </p:nvSpPr>
+        <p:spPr>
+          <a:xfrm>
+            <a:off x="1975104" y="3364992"/>
+            <a:ext cx="1554480" cy="475488"/>
           </a:xfrm>
           <a:prstGeom prst="rect">
             <a:avLst>
@@ -27074,14 +27593,14 @@
       </p:sp>
       <p:sp>
         <p:nvSpPr>
-          <p:cNvPr id="29" name="Text 27"/>
-          <p:cNvSpPr/>
-          <p:nvPr/>
-        </p:nvSpPr>
-        <p:spPr>
-          <a:xfrm>
-            <a:off x="2999232" y="3364992"/>
-            <a:ext cx="1645920" cy="475488"/>
+          <p:cNvPr id="33" name="Text 31"/>
+          <p:cNvSpPr/>
+          <p:nvPr/>
+        </p:nvSpPr>
+        <p:spPr>
+          <a:xfrm>
+            <a:off x="1975104" y="3364992"/>
+            <a:ext cx="1554480" cy="475488"/>
           </a:xfrm>
           <a:prstGeom prst="rect">
             <a:avLst/>
@@ -27113,14 +27632,14 @@
       </p:sp>
       <p:sp>
         <p:nvSpPr>
-          <p:cNvPr id="30" name="Text 28"/>
-          <p:cNvSpPr/>
-          <p:nvPr/>
-        </p:nvSpPr>
-        <p:spPr>
-          <a:xfrm>
-            <a:off x="4645152" y="3364992"/>
-            <a:ext cx="1097280" cy="475488"/>
+          <p:cNvPr id="34" name="Text 32"/>
+          <p:cNvSpPr/>
+          <p:nvPr/>
+        </p:nvSpPr>
+        <p:spPr>
+          <a:xfrm>
+            <a:off x="3529584" y="3364992"/>
+            <a:ext cx="73152" cy="475488"/>
           </a:xfrm>
           <a:prstGeom prst="rect">
             <a:avLst/>
@@ -27152,14 +27671,14 @@
       </p:sp>
       <p:sp>
         <p:nvSpPr>
-          <p:cNvPr id="31" name="Shape 29"/>
-          <p:cNvSpPr/>
-          <p:nvPr/>
-        </p:nvSpPr>
-        <p:spPr>
-          <a:xfrm>
-            <a:off x="5742432" y="3364992"/>
-            <a:ext cx="1645920" cy="475488"/>
+          <p:cNvPr id="35" name="Shape 33"/>
+          <p:cNvSpPr/>
+          <p:nvPr/>
+        </p:nvSpPr>
+        <p:spPr>
+          <a:xfrm>
+            <a:off x="3602736" y="3364992"/>
+            <a:ext cx="1554480" cy="475488"/>
           </a:xfrm>
           <a:prstGeom prst="rect">
             <a:avLst>
@@ -27179,14 +27698,14 @@
       </p:sp>
       <p:sp>
         <p:nvSpPr>
-          <p:cNvPr id="32" name="Text 30"/>
-          <p:cNvSpPr/>
-          <p:nvPr/>
-        </p:nvSpPr>
-        <p:spPr>
-          <a:xfrm>
-            <a:off x="5742432" y="3364992"/>
-            <a:ext cx="1645920" cy="475488"/>
+          <p:cNvPr id="36" name="Text 34"/>
+          <p:cNvSpPr/>
+          <p:nvPr/>
+        </p:nvSpPr>
+        <p:spPr>
+          <a:xfrm>
+            <a:off x="3602736" y="3364992"/>
+            <a:ext cx="1554480" cy="475488"/>
           </a:xfrm>
           <a:prstGeom prst="rect">
             <a:avLst/>
@@ -27210,7 +27729,7 @@
                 <a:ea typeface="Trebuchet MS" pitchFamily="34" charset="-122"/>
                 <a:cs typeface="Trebuchet MS" pitchFamily="34" charset="-120"/>
               </a:rPr>
-              <a:t>cards</a:t>
+              <a:t>grad</a:t>
             </a:r>
             <a:endParaRPr lang="en-US" sz="1400" dirty="0"/>
           </a:p>
@@ -27218,7 +27737,217 @@
       </p:sp>
       <p:sp>
         <p:nvSpPr>
-          <p:cNvPr id="33" name="Shape 31"/>
+          <p:cNvPr id="37" name="Text 35"/>
+          <p:cNvSpPr/>
+          <p:nvPr/>
+        </p:nvSpPr>
+        <p:spPr>
+          <a:xfrm>
+            <a:off x="5157216" y="3364992"/>
+            <a:ext cx="73152" cy="475488"/>
+          </a:xfrm>
+          <a:prstGeom prst="rect">
+            <a:avLst/>
+          </a:prstGeom>
+          <a:noFill/>
+          <a:ln/>
+        </p:spPr>
+        <p:txBody>
+          <a:bodyPr wrap="square" lIns="0" tIns="0" rIns="0" bIns="0" rtlCol="0" anchor="ctr"/>
+          <a:lstStyle/>
+          <a:p>
+            <a:pPr algn="ctr" indent="0" marL="0">
+              <a:buNone/>
+            </a:pPr>
+            <a:r>
+              <a:rPr lang="en-US" sz="1600" b="1" dirty="0">
+                <a:solidFill>
+                  <a:srgbClr val="0D9488"/>
+                </a:solidFill>
+                <a:latin typeface="Trebuchet MS" pitchFamily="34" charset="0"/>
+                <a:ea typeface="Trebuchet MS" pitchFamily="34" charset="-122"/>
+                <a:cs typeface="Trebuchet MS" pitchFamily="34" charset="-120"/>
+              </a:rPr>
+              <a:t>·</a:t>
+            </a:r>
+            <a:endParaRPr lang="en-US" sz="1600" dirty="0"/>
+          </a:p>
+        </p:txBody>
+      </p:sp>
+      <p:sp>
+        <p:nvSpPr>
+          <p:cNvPr id="38" name="Shape 36"/>
+          <p:cNvSpPr/>
+          <p:nvPr/>
+        </p:nvSpPr>
+        <p:spPr>
+          <a:xfrm>
+            <a:off x="5230368" y="3364992"/>
+            <a:ext cx="1554480" cy="475488"/>
+          </a:xfrm>
+          <a:prstGeom prst="rect">
+            <a:avLst>
+              <a:gd name="adj" fmla="val 9615"/>
+            </a:avLst>
+          </a:prstGeom>
+          <a:solidFill>
+            <a:srgbClr val="FFFFFF"/>
+          </a:solidFill>
+          <a:ln w="12700">
+            <a:solidFill>
+              <a:srgbClr val="0D9488"/>
+            </a:solidFill>
+            <a:prstDash val="solid"/>
+          </a:ln>
+        </p:spPr>
+      </p:sp>
+      <p:sp>
+        <p:nvSpPr>
+          <p:cNvPr id="39" name="Text 37"/>
+          <p:cNvSpPr/>
+          <p:nvPr/>
+        </p:nvSpPr>
+        <p:spPr>
+          <a:xfrm>
+            <a:off x="5230368" y="3364992"/>
+            <a:ext cx="1554480" cy="475488"/>
+          </a:xfrm>
+          <a:prstGeom prst="rect">
+            <a:avLst/>
+          </a:prstGeom>
+          <a:noFill/>
+          <a:ln/>
+        </p:spPr>
+        <p:txBody>
+          <a:bodyPr wrap="square" lIns="0" tIns="0" rIns="0" bIns="0" rtlCol="0" anchor="ctr"/>
+          <a:lstStyle/>
+          <a:p>
+            <a:pPr algn="ctr" indent="0" marL="0">
+              <a:buNone/>
+            </a:pPr>
+            <a:r>
+              <a:rPr lang="en-US" sz="1400" b="1" dirty="0">
+                <a:solidFill>
+                  <a:srgbClr val="0D9488"/>
+                </a:solidFill>
+                <a:latin typeface="Trebuchet MS" pitchFamily="34" charset="0"/>
+                <a:ea typeface="Trebuchet MS" pitchFamily="34" charset="-122"/>
+                <a:cs typeface="Trebuchet MS" pitchFamily="34" charset="-120"/>
+              </a:rPr>
+              <a:t>u</a:t>
+            </a:r>
+            <a:endParaRPr lang="en-US" sz="1400" dirty="0"/>
+          </a:p>
+        </p:txBody>
+      </p:sp>
+      <p:sp>
+        <p:nvSpPr>
+          <p:cNvPr id="40" name="Text 38"/>
+          <p:cNvSpPr/>
+          <p:nvPr/>
+        </p:nvSpPr>
+        <p:spPr>
+          <a:xfrm>
+            <a:off x="6784848" y="3364992"/>
+            <a:ext cx="73152" cy="475488"/>
+          </a:xfrm>
+          <a:prstGeom prst="rect">
+            <a:avLst/>
+          </a:prstGeom>
+          <a:noFill/>
+          <a:ln/>
+        </p:spPr>
+        <p:txBody>
+          <a:bodyPr wrap="square" lIns="0" tIns="0" rIns="0" bIns="0" rtlCol="0" anchor="ctr"/>
+          <a:lstStyle/>
+          <a:p>
+            <a:pPr algn="ctr" indent="0" marL="0">
+              <a:buNone/>
+            </a:pPr>
+            <a:r>
+              <a:rPr lang="en-US" sz="1600" b="1" dirty="0">
+                <a:solidFill>
+                  <a:srgbClr val="0D9488"/>
+                </a:solidFill>
+                <a:latin typeface="Trebuchet MS" pitchFamily="34" charset="0"/>
+                <a:ea typeface="Trebuchet MS" pitchFamily="34" charset="-122"/>
+                <a:cs typeface="Trebuchet MS" pitchFamily="34" charset="-120"/>
+              </a:rPr>
+              <a:t>·</a:t>
+            </a:r>
+            <a:endParaRPr lang="en-US" sz="1600" dirty="0"/>
+          </a:p>
+        </p:txBody>
+      </p:sp>
+      <p:sp>
+        <p:nvSpPr>
+          <p:cNvPr id="41" name="Shape 39"/>
+          <p:cNvSpPr/>
+          <p:nvPr/>
+        </p:nvSpPr>
+        <p:spPr>
+          <a:xfrm>
+            <a:off x="6858000" y="3364992"/>
+            <a:ext cx="1554480" cy="475488"/>
+          </a:xfrm>
+          <a:prstGeom prst="rect">
+            <a:avLst>
+              <a:gd name="adj" fmla="val 9615"/>
+            </a:avLst>
+          </a:prstGeom>
+          <a:solidFill>
+            <a:srgbClr val="FFFFFF"/>
+          </a:solidFill>
+          <a:ln w="12700">
+            <a:solidFill>
+              <a:srgbClr val="0D9488"/>
+            </a:solidFill>
+            <a:prstDash val="solid"/>
+          </a:ln>
+        </p:spPr>
+      </p:sp>
+      <p:sp>
+        <p:nvSpPr>
+          <p:cNvPr id="42" name="Text 40"/>
+          <p:cNvSpPr/>
+          <p:nvPr/>
+        </p:nvSpPr>
+        <p:spPr>
+          <a:xfrm>
+            <a:off x="6858000" y="3364992"/>
+            <a:ext cx="1554480" cy="475488"/>
+          </a:xfrm>
+          <a:prstGeom prst="rect">
+            <a:avLst/>
+          </a:prstGeom>
+          <a:noFill/>
+          <a:ln/>
+        </p:spPr>
+        <p:txBody>
+          <a:bodyPr wrap="square" lIns="0" tIns="0" rIns="0" bIns="0" rtlCol="0" anchor="ctr"/>
+          <a:lstStyle/>
+          <a:p>
+            <a:pPr algn="ctr" indent="0" marL="0">
+              <a:buNone/>
+            </a:pPr>
+            <a:r>
+              <a:rPr lang="en-US" sz="1400" b="1" dirty="0">
+                <a:solidFill>
+                  <a:srgbClr val="0D9488"/>
+                </a:solidFill>
+                <a:latin typeface="Trebuchet MS" pitchFamily="34" charset="0"/>
+                <a:ea typeface="Trebuchet MS" pitchFamily="34" charset="-122"/>
+                <a:cs typeface="Trebuchet MS" pitchFamily="34" charset="-120"/>
+              </a:rPr>
+              <a:t>ate</a:t>
+            </a:r>
+            <a:endParaRPr lang="en-US" sz="1400" dirty="0"/>
+          </a:p>
+        </p:txBody>
+      </p:sp>
+      <p:sp>
+        <p:nvSpPr>
+          <p:cNvPr id="43" name="Shape 41"/>
           <p:cNvSpPr/>
           <p:nvPr/>
         </p:nvSpPr>
@@ -27245,7 +27974,7 @@
       </p:sp>
       <p:sp>
         <p:nvSpPr>
-          <p:cNvPr id="34" name="Text 32"/>
+          <p:cNvPr id="44" name="Text 42"/>
           <p:cNvSpPr/>
           <p:nvPr/>
         </p:nvSpPr>
@@ -27284,7 +28013,7 @@
       </p:sp>
       <p:sp>
         <p:nvSpPr>
-          <p:cNvPr id="35" name="Shape 33"/>
+          <p:cNvPr id="45" name="Shape 43"/>
           <p:cNvSpPr/>
           <p:nvPr/>
         </p:nvSpPr>
@@ -27311,14 +28040,14 @@
       </p:sp>
       <p:sp>
         <p:nvSpPr>
-          <p:cNvPr id="36" name="Shape 34"/>
-          <p:cNvSpPr/>
-          <p:nvPr/>
-        </p:nvSpPr>
-        <p:spPr>
-          <a:xfrm>
-            <a:off x="2023872" y="4169664"/>
-            <a:ext cx="685800" cy="475488"/>
+          <p:cNvPr id="46" name="Shape 44"/>
+          <p:cNvSpPr/>
+          <p:nvPr/>
+        </p:nvSpPr>
+        <p:spPr>
+          <a:xfrm>
+            <a:off x="1952244" y="4169664"/>
+            <a:ext cx="543652" cy="475488"/>
           </a:xfrm>
           <a:prstGeom prst="rect">
             <a:avLst>
@@ -27338,14 +28067,14 @@
       </p:sp>
       <p:sp>
         <p:nvSpPr>
-          <p:cNvPr id="37" name="Text 35"/>
-          <p:cNvSpPr/>
-          <p:nvPr/>
-        </p:nvSpPr>
-        <p:spPr>
-          <a:xfrm>
-            <a:off x="2023872" y="4169664"/>
-            <a:ext cx="685800" cy="475488"/>
+          <p:cNvPr id="47" name="Text 45"/>
+          <p:cNvSpPr/>
+          <p:nvPr/>
+        </p:nvSpPr>
+        <p:spPr>
+          <a:xfrm>
+            <a:off x="1952244" y="4169664"/>
+            <a:ext cx="543652" cy="475488"/>
           </a:xfrm>
           <a:prstGeom prst="rect">
             <a:avLst/>
@@ -27377,14 +28106,14 @@
       </p:sp>
       <p:sp>
         <p:nvSpPr>
-          <p:cNvPr id="38" name="Shape 36"/>
-          <p:cNvSpPr/>
-          <p:nvPr/>
-        </p:nvSpPr>
-        <p:spPr>
-          <a:xfrm>
-            <a:off x="2831592" y="4169664"/>
-            <a:ext cx="685800" cy="475488"/>
+          <p:cNvPr id="48" name="Shape 46"/>
+          <p:cNvSpPr/>
+          <p:nvPr/>
+        </p:nvSpPr>
+        <p:spPr>
+          <a:xfrm>
+            <a:off x="2546188" y="4169664"/>
+            <a:ext cx="543652" cy="475488"/>
           </a:xfrm>
           <a:prstGeom prst="rect">
             <a:avLst>
@@ -27404,14 +28133,14 @@
       </p:sp>
       <p:sp>
         <p:nvSpPr>
-          <p:cNvPr id="39" name="Text 37"/>
-          <p:cNvSpPr/>
-          <p:nvPr/>
-        </p:nvSpPr>
-        <p:spPr>
-          <a:xfrm>
-            <a:off x="2831592" y="4169664"/>
-            <a:ext cx="685800" cy="475488"/>
+          <p:cNvPr id="49" name="Text 47"/>
+          <p:cNvSpPr/>
+          <p:nvPr/>
+        </p:nvSpPr>
+        <p:spPr>
+          <a:xfrm>
+            <a:off x="2546188" y="4169664"/>
+            <a:ext cx="543652" cy="475488"/>
           </a:xfrm>
           <a:prstGeom prst="rect">
             <a:avLst/>
@@ -27443,14 +28172,14 @@
       </p:sp>
       <p:sp>
         <p:nvSpPr>
-          <p:cNvPr id="40" name="Shape 38"/>
-          <p:cNvSpPr/>
-          <p:nvPr/>
-        </p:nvSpPr>
-        <p:spPr>
-          <a:xfrm>
-            <a:off x="3639312" y="4169664"/>
-            <a:ext cx="685800" cy="475488"/>
+          <p:cNvPr id="50" name="Shape 48"/>
+          <p:cNvSpPr/>
+          <p:nvPr/>
+        </p:nvSpPr>
+        <p:spPr>
+          <a:xfrm>
+            <a:off x="3140133" y="4169664"/>
+            <a:ext cx="543652" cy="475488"/>
           </a:xfrm>
           <a:prstGeom prst="rect">
             <a:avLst>
@@ -27470,14 +28199,14 @@
       </p:sp>
       <p:sp>
         <p:nvSpPr>
-          <p:cNvPr id="41" name="Text 39"/>
-          <p:cNvSpPr/>
-          <p:nvPr/>
-        </p:nvSpPr>
-        <p:spPr>
-          <a:xfrm>
-            <a:off x="3639312" y="4169664"/>
-            <a:ext cx="685800" cy="475488"/>
+          <p:cNvPr id="51" name="Text 49"/>
+          <p:cNvSpPr/>
+          <p:nvPr/>
+        </p:nvSpPr>
+        <p:spPr>
+          <a:xfrm>
+            <a:off x="3140133" y="4169664"/>
+            <a:ext cx="543652" cy="475488"/>
           </a:xfrm>
           <a:prstGeom prst="rect">
             <a:avLst/>
@@ -27509,14 +28238,14 @@
       </p:sp>
       <p:sp>
         <p:nvSpPr>
-          <p:cNvPr id="42" name="Shape 40"/>
-          <p:cNvSpPr/>
-          <p:nvPr/>
-        </p:nvSpPr>
-        <p:spPr>
-          <a:xfrm>
-            <a:off x="4447032" y="4169664"/>
-            <a:ext cx="685800" cy="475488"/>
+          <p:cNvPr id="52" name="Shape 50"/>
+          <p:cNvSpPr/>
+          <p:nvPr/>
+        </p:nvSpPr>
+        <p:spPr>
+          <a:xfrm>
+            <a:off x="3734077" y="4169664"/>
+            <a:ext cx="543652" cy="475488"/>
           </a:xfrm>
           <a:prstGeom prst="rect">
             <a:avLst>
@@ -27536,14 +28265,14 @@
       </p:sp>
       <p:sp>
         <p:nvSpPr>
-          <p:cNvPr id="43" name="Text 41"/>
-          <p:cNvSpPr/>
-          <p:nvPr/>
-        </p:nvSpPr>
-        <p:spPr>
-          <a:xfrm>
-            <a:off x="4447032" y="4169664"/>
-            <a:ext cx="685800" cy="475488"/>
+          <p:cNvPr id="53" name="Text 51"/>
+          <p:cNvSpPr/>
+          <p:nvPr/>
+        </p:nvSpPr>
+        <p:spPr>
+          <a:xfrm>
+            <a:off x="3734077" y="4169664"/>
+            <a:ext cx="543652" cy="475488"/>
           </a:xfrm>
           <a:prstGeom prst="rect">
             <a:avLst/>
@@ -27575,14 +28304,14 @@
       </p:sp>
       <p:sp>
         <p:nvSpPr>
-          <p:cNvPr id="44" name="Shape 42"/>
-          <p:cNvSpPr/>
-          <p:nvPr/>
-        </p:nvSpPr>
-        <p:spPr>
-          <a:xfrm>
-            <a:off x="5254752" y="4169664"/>
-            <a:ext cx="685800" cy="475488"/>
+          <p:cNvPr id="54" name="Shape 52"/>
+          <p:cNvSpPr/>
+          <p:nvPr/>
+        </p:nvSpPr>
+        <p:spPr>
+          <a:xfrm>
+            <a:off x="4328021" y="4169664"/>
+            <a:ext cx="543652" cy="475488"/>
           </a:xfrm>
           <a:prstGeom prst="rect">
             <a:avLst>
@@ -27602,14 +28331,14 @@
       </p:sp>
       <p:sp>
         <p:nvSpPr>
-          <p:cNvPr id="45" name="Text 43"/>
-          <p:cNvSpPr/>
-          <p:nvPr/>
-        </p:nvSpPr>
-        <p:spPr>
-          <a:xfrm>
-            <a:off x="5254752" y="4169664"/>
-            <a:ext cx="685800" cy="475488"/>
+          <p:cNvPr id="55" name="Text 53"/>
+          <p:cNvSpPr/>
+          <p:nvPr/>
+        </p:nvSpPr>
+        <p:spPr>
+          <a:xfrm>
+            <a:off x="4328021" y="4169664"/>
+            <a:ext cx="543652" cy="475488"/>
           </a:xfrm>
           <a:prstGeom prst="rect">
             <a:avLst/>
@@ -27633,7 +28362,7 @@
                 <a:ea typeface="Trebuchet MS" pitchFamily="34" charset="-122"/>
                 <a:cs typeface="Trebuchet MS" pitchFamily="34" charset="-120"/>
               </a:rPr>
-              <a:t>c</a:t>
+              <a:t>g</a:t>
             </a:r>
             <a:endParaRPr lang="en-US" sz="900" dirty="0"/>
           </a:p>
@@ -27641,14 +28370,14 @@
       </p:sp>
       <p:sp>
         <p:nvSpPr>
-          <p:cNvPr id="46" name="Shape 44"/>
-          <p:cNvSpPr/>
-          <p:nvPr/>
-        </p:nvSpPr>
-        <p:spPr>
-          <a:xfrm>
-            <a:off x="6062472" y="4169664"/>
-            <a:ext cx="685800" cy="475488"/>
+          <p:cNvPr id="56" name="Shape 54"/>
+          <p:cNvSpPr/>
+          <p:nvPr/>
+        </p:nvSpPr>
+        <p:spPr>
+          <a:xfrm>
+            <a:off x="4921966" y="4169664"/>
+            <a:ext cx="543652" cy="475488"/>
           </a:xfrm>
           <a:prstGeom prst="rect">
             <a:avLst>
@@ -27668,14 +28397,14 @@
       </p:sp>
       <p:sp>
         <p:nvSpPr>
-          <p:cNvPr id="47" name="Text 45"/>
-          <p:cNvSpPr/>
-          <p:nvPr/>
-        </p:nvSpPr>
-        <p:spPr>
-          <a:xfrm>
-            <a:off x="6062472" y="4169664"/>
-            <a:ext cx="685800" cy="475488"/>
+          <p:cNvPr id="57" name="Text 55"/>
+          <p:cNvSpPr/>
+          <p:nvPr/>
+        </p:nvSpPr>
+        <p:spPr>
+          <a:xfrm>
+            <a:off x="4921966" y="4169664"/>
+            <a:ext cx="543652" cy="475488"/>
           </a:xfrm>
           <a:prstGeom prst="rect">
             <a:avLst/>
@@ -27699,7 +28428,7 @@
                 <a:ea typeface="Trebuchet MS" pitchFamily="34" charset="-122"/>
                 <a:cs typeface="Trebuchet MS" pitchFamily="34" charset="-120"/>
               </a:rPr>
-              <a:t>ar</a:t>
+              <a:t>r</a:t>
             </a:r>
             <a:endParaRPr lang="en-US" sz="900" dirty="0"/>
           </a:p>
@@ -27707,14 +28436,14 @@
       </p:sp>
       <p:sp>
         <p:nvSpPr>
-          <p:cNvPr id="48" name="Shape 46"/>
-          <p:cNvSpPr/>
-          <p:nvPr/>
-        </p:nvSpPr>
-        <p:spPr>
-          <a:xfrm>
-            <a:off x="6870192" y="4169664"/>
-            <a:ext cx="685800" cy="475488"/>
+          <p:cNvPr id="58" name="Shape 56"/>
+          <p:cNvSpPr/>
+          <p:nvPr/>
+        </p:nvSpPr>
+        <p:spPr>
+          <a:xfrm>
+            <a:off x="5515910" y="4169664"/>
+            <a:ext cx="543652" cy="475488"/>
           </a:xfrm>
           <a:prstGeom prst="rect">
             <a:avLst>
@@ -27734,14 +28463,14 @@
       </p:sp>
       <p:sp>
         <p:nvSpPr>
-          <p:cNvPr id="49" name="Text 47"/>
-          <p:cNvSpPr/>
-          <p:nvPr/>
-        </p:nvSpPr>
-        <p:spPr>
-          <a:xfrm>
-            <a:off x="6870192" y="4169664"/>
-            <a:ext cx="685800" cy="475488"/>
+          <p:cNvPr id="59" name="Text 57"/>
+          <p:cNvSpPr/>
+          <p:nvPr/>
+        </p:nvSpPr>
+        <p:spPr>
+          <a:xfrm>
+            <a:off x="5515910" y="4169664"/>
+            <a:ext cx="543652" cy="475488"/>
           </a:xfrm>
           <a:prstGeom prst="rect">
             <a:avLst/>
@@ -27765,7 +28494,7 @@
                 <a:ea typeface="Trebuchet MS" pitchFamily="34" charset="-122"/>
                 <a:cs typeface="Trebuchet MS" pitchFamily="34" charset="-120"/>
               </a:rPr>
-              <a:t>d</a:t>
+              <a:t>a</a:t>
             </a:r>
             <a:endParaRPr lang="en-US" sz="900" dirty="0"/>
           </a:p>
@@ -27773,14 +28502,14 @@
       </p:sp>
       <p:sp>
         <p:nvSpPr>
-          <p:cNvPr id="50" name="Shape 48"/>
-          <p:cNvSpPr/>
-          <p:nvPr/>
-        </p:nvSpPr>
-        <p:spPr>
-          <a:xfrm>
-            <a:off x="7677912" y="4169664"/>
-            <a:ext cx="685800" cy="475488"/>
+          <p:cNvPr id="60" name="Shape 58"/>
+          <p:cNvSpPr/>
+          <p:nvPr/>
+        </p:nvSpPr>
+        <p:spPr>
+          <a:xfrm>
+            <a:off x="6109855" y="4169664"/>
+            <a:ext cx="543652" cy="475488"/>
           </a:xfrm>
           <a:prstGeom prst="rect">
             <a:avLst>
@@ -27800,14 +28529,14 @@
       </p:sp>
       <p:sp>
         <p:nvSpPr>
-          <p:cNvPr id="51" name="Text 49"/>
-          <p:cNvSpPr/>
-          <p:nvPr/>
-        </p:nvSpPr>
-        <p:spPr>
-          <a:xfrm>
-            <a:off x="7677912" y="4169664"/>
-            <a:ext cx="685800" cy="475488"/>
+          <p:cNvPr id="61" name="Text 59"/>
+          <p:cNvSpPr/>
+          <p:nvPr/>
+        </p:nvSpPr>
+        <p:spPr>
+          <a:xfrm>
+            <a:off x="6109855" y="4169664"/>
+            <a:ext cx="543652" cy="475488"/>
           </a:xfrm>
           <a:prstGeom prst="rect">
             <a:avLst/>
@@ -27831,7 +28560,205 @@
                 <a:ea typeface="Trebuchet MS" pitchFamily="34" charset="-122"/>
                 <a:cs typeface="Trebuchet MS" pitchFamily="34" charset="-120"/>
               </a:rPr>
-              <a:t>s</a:t>
+              <a:t>d</a:t>
+            </a:r>
+            <a:endParaRPr lang="en-US" sz="900" dirty="0"/>
+          </a:p>
+        </p:txBody>
+      </p:sp>
+      <p:sp>
+        <p:nvSpPr>
+          <p:cNvPr id="62" name="Shape 60"/>
+          <p:cNvSpPr/>
+          <p:nvPr/>
+        </p:nvSpPr>
+        <p:spPr>
+          <a:xfrm>
+            <a:off x="6703799" y="4169664"/>
+            <a:ext cx="543652" cy="475488"/>
+          </a:xfrm>
+          <a:prstGeom prst="rect">
+            <a:avLst>
+              <a:gd name="adj" fmla="val 7692"/>
+            </a:avLst>
+          </a:prstGeom>
+          <a:solidFill>
+            <a:srgbClr val="FFFFFF"/>
+          </a:solidFill>
+          <a:ln w="12700">
+            <a:solidFill>
+              <a:srgbClr val="DB2777"/>
+            </a:solidFill>
+            <a:prstDash val="solid"/>
+          </a:ln>
+        </p:spPr>
+      </p:sp>
+      <p:sp>
+        <p:nvSpPr>
+          <p:cNvPr id="63" name="Text 61"/>
+          <p:cNvSpPr/>
+          <p:nvPr/>
+        </p:nvSpPr>
+        <p:spPr>
+          <a:xfrm>
+            <a:off x="6703799" y="4169664"/>
+            <a:ext cx="543652" cy="475488"/>
+          </a:xfrm>
+          <a:prstGeom prst="rect">
+            <a:avLst/>
+          </a:prstGeom>
+          <a:noFill/>
+          <a:ln/>
+        </p:spPr>
+        <p:txBody>
+          <a:bodyPr wrap="square" lIns="0" tIns="0" rIns="0" bIns="0" rtlCol="0" anchor="ctr"/>
+          <a:lstStyle/>
+          <a:p>
+            <a:pPr algn="ctr" indent="0" marL="0">
+              <a:buNone/>
+            </a:pPr>
+            <a:r>
+              <a:rPr lang="en-US" sz="900" b="1" dirty="0">
+                <a:solidFill>
+                  <a:srgbClr val="9D174D"/>
+                </a:solidFill>
+                <a:latin typeface="Trebuchet MS" pitchFamily="34" charset="0"/>
+                <a:ea typeface="Trebuchet MS" pitchFamily="34" charset="-122"/>
+                <a:cs typeface="Trebuchet MS" pitchFamily="34" charset="-120"/>
+              </a:rPr>
+              <a:t>u</a:t>
+            </a:r>
+            <a:endParaRPr lang="en-US" sz="900" dirty="0"/>
+          </a:p>
+        </p:txBody>
+      </p:sp>
+      <p:sp>
+        <p:nvSpPr>
+          <p:cNvPr id="64" name="Shape 62"/>
+          <p:cNvSpPr/>
+          <p:nvPr/>
+        </p:nvSpPr>
+        <p:spPr>
+          <a:xfrm>
+            <a:off x="7297743" y="4169664"/>
+            <a:ext cx="543652" cy="475488"/>
+          </a:xfrm>
+          <a:prstGeom prst="rect">
+            <a:avLst>
+              <a:gd name="adj" fmla="val 7692"/>
+            </a:avLst>
+          </a:prstGeom>
+          <a:solidFill>
+            <a:srgbClr val="FFFFFF"/>
+          </a:solidFill>
+          <a:ln w="12700">
+            <a:solidFill>
+              <a:srgbClr val="DB2777"/>
+            </a:solidFill>
+            <a:prstDash val="solid"/>
+          </a:ln>
+        </p:spPr>
+      </p:sp>
+      <p:sp>
+        <p:nvSpPr>
+          <p:cNvPr id="65" name="Text 63"/>
+          <p:cNvSpPr/>
+          <p:nvPr/>
+        </p:nvSpPr>
+        <p:spPr>
+          <a:xfrm>
+            <a:off x="7297743" y="4169664"/>
+            <a:ext cx="543652" cy="475488"/>
+          </a:xfrm>
+          <a:prstGeom prst="rect">
+            <a:avLst/>
+          </a:prstGeom>
+          <a:noFill/>
+          <a:ln/>
+        </p:spPr>
+        <p:txBody>
+          <a:bodyPr wrap="square" lIns="0" tIns="0" rIns="0" bIns="0" rtlCol="0" anchor="ctr"/>
+          <a:lstStyle/>
+          <a:p>
+            <a:pPr algn="ctr" indent="0" marL="0">
+              <a:buNone/>
+            </a:pPr>
+            <a:r>
+              <a:rPr lang="en-US" sz="900" b="1" dirty="0">
+                <a:solidFill>
+                  <a:srgbClr val="9D174D"/>
+                </a:solidFill>
+                <a:latin typeface="Trebuchet MS" pitchFamily="34" charset="0"/>
+                <a:ea typeface="Trebuchet MS" pitchFamily="34" charset="-122"/>
+                <a:cs typeface="Trebuchet MS" pitchFamily="34" charset="-120"/>
+              </a:rPr>
+              <a:t>a</a:t>
+            </a:r>
+            <a:endParaRPr lang="en-US" sz="900" dirty="0"/>
+          </a:p>
+        </p:txBody>
+      </p:sp>
+      <p:sp>
+        <p:nvSpPr>
+          <p:cNvPr id="66" name="Shape 64"/>
+          <p:cNvSpPr/>
+          <p:nvPr/>
+        </p:nvSpPr>
+        <p:spPr>
+          <a:xfrm>
+            <a:off x="7891688" y="4169664"/>
+            <a:ext cx="543652" cy="475488"/>
+          </a:xfrm>
+          <a:prstGeom prst="rect">
+            <a:avLst>
+              <a:gd name="adj" fmla="val 7692"/>
+            </a:avLst>
+          </a:prstGeom>
+          <a:solidFill>
+            <a:srgbClr val="FFFFFF"/>
+          </a:solidFill>
+          <a:ln w="12700">
+            <a:solidFill>
+              <a:srgbClr val="DB2777"/>
+            </a:solidFill>
+            <a:prstDash val="solid"/>
+          </a:ln>
+        </p:spPr>
+      </p:sp>
+      <p:sp>
+        <p:nvSpPr>
+          <p:cNvPr id="67" name="Text 65"/>
+          <p:cNvSpPr/>
+          <p:nvPr/>
+        </p:nvSpPr>
+        <p:spPr>
+          <a:xfrm>
+            <a:off x="7891688" y="4169664"/>
+            <a:ext cx="543652" cy="475488"/>
+          </a:xfrm>
+          <a:prstGeom prst="rect">
+            <a:avLst/>
+          </a:prstGeom>
+          <a:noFill/>
+          <a:ln/>
+        </p:spPr>
+        <p:txBody>
+          <a:bodyPr wrap="square" lIns="0" tIns="0" rIns="0" bIns="0" rtlCol="0" anchor="ctr"/>
+          <a:lstStyle/>
+          <a:p>
+            <a:pPr algn="ctr" indent="0" marL="0">
+              <a:buNone/>
+            </a:pPr>
+            <a:r>
+              <a:rPr lang="en-US" sz="900" b="1" dirty="0">
+                <a:solidFill>
+                  <a:srgbClr val="9D174D"/>
+                </a:solidFill>
+                <a:latin typeface="Trebuchet MS" pitchFamily="34" charset="0"/>
+                <a:ea typeface="Trebuchet MS" pitchFamily="34" charset="-122"/>
+                <a:cs typeface="Trebuchet MS" pitchFamily="34" charset="-120"/>
+              </a:rPr>
+              <a:t>te</a:t>
             </a:r>
             <a:endParaRPr lang="en-US" sz="900" dirty="0"/>
           </a:p>
@@ -28123,7 +29050,7 @@
                 <a:ea typeface="Calibri" pitchFamily="34" charset="-122"/>
                 <a:cs typeface="Calibri" pitchFamily="34" charset="-120"/>
               </a:rPr>
-              <a:t>Word Labs  •  wordlabs.app  •  Prefix: 'post-' = after, behind, later</a:t>
+              <a:t>Word Labs  •  wordlabs.app  •  Prefix: 'post-' = after, later, behind</a:t>
             </a:r>
             <a:endParaRPr lang="en-US" sz="800" dirty="0"/>
           </a:p>
@@ -28262,7 +29189,7 @@
                 <a:ea typeface="Trebuchet MS" pitchFamily="34" charset="-122"/>
                 <a:cs typeface="Trebuchet MS" pitchFamily="34" charset="-120"/>
               </a:rPr>
-              <a:t>postpone</a:t>
+              <a:t>postnatal</a:t>
             </a:r>
             <a:endParaRPr lang="en-US" sz="2800" dirty="0"/>
           </a:p>
@@ -28950,7 +29877,7 @@
                 <a:ea typeface="Calibri" pitchFamily="34" charset="-122"/>
                 <a:cs typeface="Calibri" pitchFamily="34" charset="-120"/>
               </a:rPr>
-              <a:t>Word Labs  •  wordlabs.app  •  Prefix: 'post-' = after, behind, later</a:t>
+              <a:t>Word Labs  •  wordlabs.app  •  Prefix: 'post-' = after, later, behind</a:t>
             </a:r>
             <a:endParaRPr lang="en-US" sz="800" dirty="0"/>
           </a:p>
@@ -29089,7 +30016,7 @@
                 <a:ea typeface="Trebuchet MS" pitchFamily="34" charset="-122"/>
                 <a:cs typeface="Trebuchet MS" pitchFamily="34" charset="-120"/>
               </a:rPr>
-              <a:t>postpone</a:t>
+              <a:t>postnatal</a:t>
             </a:r>
             <a:endParaRPr lang="en-US" sz="2800" dirty="0"/>
           </a:p>
@@ -29169,7 +30096,7 @@
         </p:nvSpPr>
         <p:spPr>
           <a:xfrm>
-            <a:off x="2938272" y="2258568"/>
+            <a:off x="2221992" y="2258568"/>
             <a:ext cx="1828800" cy="292608"/>
           </a:xfrm>
           <a:prstGeom prst="rect">
@@ -29203,7 +30130,7 @@
         </p:nvSpPr>
         <p:spPr>
           <a:xfrm>
-            <a:off x="2938272" y="2258568"/>
+            <a:off x="2221992" y="2258568"/>
             <a:ext cx="1828800" cy="292608"/>
           </a:xfrm>
           <a:prstGeom prst="rect">
@@ -29242,7 +30169,7 @@
         </p:nvSpPr>
         <p:spPr>
           <a:xfrm>
-            <a:off x="2938272" y="2569464"/>
+            <a:off x="2221992" y="2569464"/>
             <a:ext cx="1828800" cy="201168"/>
           </a:xfrm>
           <a:prstGeom prst="rect">
@@ -29281,7 +30208,7 @@
         </p:nvSpPr>
         <p:spPr>
           <a:xfrm>
-            <a:off x="5803392" y="2258568"/>
+            <a:off x="4370832" y="2258568"/>
             <a:ext cx="1828800" cy="292608"/>
           </a:xfrm>
           <a:prstGeom prst="rect">
@@ -29315,7 +30242,7 @@
         </p:nvSpPr>
         <p:spPr>
           <a:xfrm>
-            <a:off x="5803392" y="2258568"/>
+            <a:off x="4370832" y="2258568"/>
             <a:ext cx="1828800" cy="292608"/>
           </a:xfrm>
           <a:prstGeom prst="rect">
@@ -29340,7 +30267,7 @@
                 <a:ea typeface="Trebuchet MS" pitchFamily="34" charset="-122"/>
                 <a:cs typeface="Trebuchet MS" pitchFamily="34" charset="-120"/>
               </a:rPr>
-              <a:t>pone</a:t>
+              <a:t>nat</a:t>
             </a:r>
             <a:endParaRPr lang="en-US" sz="1300" dirty="0"/>
           </a:p>
@@ -29354,7 +30281,7 @@
         </p:nvSpPr>
         <p:spPr>
           <a:xfrm>
-            <a:off x="5803392" y="2569464"/>
+            <a:off x="4370832" y="2569464"/>
             <a:ext cx="1828800" cy="201168"/>
           </a:xfrm>
           <a:prstGeom prst="rect">
@@ -29379,7 +30306,7 @@
                 <a:ea typeface="Calibri" pitchFamily="34" charset="-122"/>
                 <a:cs typeface="Calibri" pitchFamily="34" charset="-120"/>
               </a:rPr>
-              <a:t>to place, to put</a:t>
+              <a:t>birth</a:t>
             </a:r>
             <a:endParaRPr lang="en-US" sz="850" dirty="0"/>
           </a:p>
@@ -29388,6 +30315,118 @@
       <p:sp>
         <p:nvSpPr>
           <p:cNvPr id="22" name="Shape 20"/>
+          <p:cNvSpPr/>
+          <p:nvPr/>
+        </p:nvSpPr>
+        <p:spPr>
+          <a:xfrm>
+            <a:off x="6519672" y="2258568"/>
+            <a:ext cx="1828800" cy="292608"/>
+          </a:xfrm>
+          <a:prstGeom prst="rect">
+            <a:avLst>
+              <a:gd name="adj" fmla="val 25000"/>
+            </a:avLst>
+          </a:prstGeom>
+          <a:solidFill>
+            <a:srgbClr val="FCE7F3"/>
+          </a:solidFill>
+          <a:ln w="19050">
+            <a:solidFill>
+              <a:srgbClr val="DB2777"/>
+            </a:solidFill>
+            <a:prstDash val="solid"/>
+          </a:ln>
+          <a:effectLst>
+            <a:outerShdw sx="100000" sy="100000" kx="0" ky="0" algn="bl" rotWithShape="0" blurRad="101600" dist="38100" dir="8100000">
+              <a:srgbClr val="000000">
+                <a:alpha val="12000"/>
+              </a:srgbClr>
+            </a:outerShdw>
+          </a:effectLst>
+        </p:spPr>
+      </p:sp>
+      <p:sp>
+        <p:nvSpPr>
+          <p:cNvPr id="23" name="Text 21"/>
+          <p:cNvSpPr/>
+          <p:nvPr/>
+        </p:nvSpPr>
+        <p:spPr>
+          <a:xfrm>
+            <a:off x="6519672" y="2258568"/>
+            <a:ext cx="1828800" cy="292608"/>
+          </a:xfrm>
+          <a:prstGeom prst="rect">
+            <a:avLst/>
+          </a:prstGeom>
+          <a:noFill/>
+          <a:ln/>
+        </p:spPr>
+        <p:txBody>
+          <a:bodyPr wrap="square" lIns="0" tIns="0" rIns="0" bIns="0" rtlCol="0" anchor="ctr"/>
+          <a:lstStyle/>
+          <a:p>
+            <a:pPr algn="ctr" indent="0" marL="0">
+              <a:buNone/>
+            </a:pPr>
+            <a:r>
+              <a:rPr lang="en-US" sz="1300" b="1" dirty="0">
+                <a:solidFill>
+                  <a:srgbClr val="9D174D"/>
+                </a:solidFill>
+                <a:latin typeface="Trebuchet MS" pitchFamily="34" charset="0"/>
+                <a:ea typeface="Trebuchet MS" pitchFamily="34" charset="-122"/>
+                <a:cs typeface="Trebuchet MS" pitchFamily="34" charset="-120"/>
+              </a:rPr>
+              <a:t>al</a:t>
+            </a:r>
+            <a:endParaRPr lang="en-US" sz="1300" dirty="0"/>
+          </a:p>
+        </p:txBody>
+      </p:sp>
+      <p:sp>
+        <p:nvSpPr>
+          <p:cNvPr id="24" name="Text 22"/>
+          <p:cNvSpPr/>
+          <p:nvPr/>
+        </p:nvSpPr>
+        <p:spPr>
+          <a:xfrm>
+            <a:off x="6519672" y="2569464"/>
+            <a:ext cx="1828800" cy="201168"/>
+          </a:xfrm>
+          <a:prstGeom prst="rect">
+            <a:avLst/>
+          </a:prstGeom>
+          <a:noFill/>
+          <a:ln/>
+        </p:spPr>
+        <p:txBody>
+          <a:bodyPr wrap="square" lIns="0" tIns="0" rIns="0" bIns="0" rtlCol="0" anchor="t"/>
+          <a:lstStyle/>
+          <a:p>
+            <a:pPr algn="ctr" indent="0" marL="0">
+              <a:buNone/>
+            </a:pPr>
+            <a:r>
+              <a:rPr lang="en-US" sz="850" dirty="0">
+                <a:solidFill>
+                  <a:srgbClr val="475569"/>
+                </a:solidFill>
+                <a:latin typeface="Calibri" pitchFamily="34" charset="0"/>
+                <a:ea typeface="Calibri" pitchFamily="34" charset="-122"/>
+                <a:cs typeface="Calibri" pitchFamily="34" charset="-120"/>
+              </a:rPr>
+              <a:t>relating to</a:t>
+            </a:r>
+            <a:endParaRPr lang="en-US" sz="850" dirty="0"/>
+          </a:p>
+        </p:txBody>
+      </p:sp>
+      <p:sp>
+        <p:nvSpPr>
+          <p:cNvPr id="25" name="Shape 23"/>
           <p:cNvSpPr/>
           <p:nvPr/>
         </p:nvSpPr>
@@ -29414,7 +30453,7 @@
       </p:sp>
       <p:sp>
         <p:nvSpPr>
-          <p:cNvPr id="23" name="Text 21"/>
+          <p:cNvPr id="26" name="Text 24"/>
           <p:cNvSpPr/>
           <p:nvPr/>
         </p:nvSpPr>
@@ -29453,7 +30492,7 @@
       </p:sp>
       <p:sp>
         <p:nvSpPr>
-          <p:cNvPr id="24" name="Shape 22"/>
+          <p:cNvPr id="27" name="Shape 25"/>
           <p:cNvSpPr/>
           <p:nvPr/>
         </p:nvSpPr>
@@ -29480,7 +30519,7 @@
       </p:sp>
       <p:sp>
         <p:nvSpPr>
-          <p:cNvPr id="25" name="Text 23"/>
+          <p:cNvPr id="28" name="Text 26"/>
           <p:cNvSpPr/>
           <p:nvPr/>
         </p:nvSpPr>
@@ -29519,7 +30558,7 @@
       </p:sp>
       <p:sp>
         <p:nvSpPr>
-          <p:cNvPr id="26" name="Shape 24"/>
+          <p:cNvPr id="29" name="Shape 27"/>
           <p:cNvSpPr/>
           <p:nvPr/>
         </p:nvSpPr>
@@ -29546,7 +30585,7 @@
       </p:sp>
       <p:sp>
         <p:nvSpPr>
-          <p:cNvPr id="27" name="Text 25"/>
+          <p:cNvPr id="30" name="Text 28"/>
           <p:cNvSpPr/>
           <p:nvPr/>
         </p:nvSpPr>
@@ -29585,7 +30624,7 @@
       </p:sp>
       <p:sp>
         <p:nvSpPr>
-          <p:cNvPr id="28" name="Shape 26"/>
+          <p:cNvPr id="31" name="Shape 29"/>
           <p:cNvSpPr/>
           <p:nvPr/>
         </p:nvSpPr>
@@ -29612,7 +30651,7 @@
       </p:sp>
       <p:sp>
         <p:nvSpPr>
-          <p:cNvPr id="29" name="Text 27"/>
+          <p:cNvPr id="32" name="Text 30"/>
           <p:cNvSpPr/>
           <p:nvPr/>
         </p:nvSpPr>
@@ -29935,7 +30974,7 @@
                 <a:ea typeface="Calibri" pitchFamily="34" charset="-122"/>
                 <a:cs typeface="Calibri" pitchFamily="34" charset="-120"/>
               </a:rPr>
-              <a:t>Word Labs  •  wordlabs.app  •  Prefix: 'post-' = after, behind, later</a:t>
+              <a:t>Word Labs  •  wordlabs.app  •  Prefix: 'post-' = after, later, behind</a:t>
             </a:r>
             <a:endParaRPr lang="en-US" sz="800" dirty="0"/>
           </a:p>
@@ -30074,7 +31113,7 @@
                 <a:ea typeface="Trebuchet MS" pitchFamily="34" charset="-122"/>
                 <a:cs typeface="Trebuchet MS" pitchFamily="34" charset="-120"/>
               </a:rPr>
-              <a:t>postpone</a:t>
+              <a:t>postnatal</a:t>
             </a:r>
             <a:endParaRPr lang="en-US" sz="2800" dirty="0"/>
           </a:p>
@@ -30154,7 +31193,7 @@
         </p:nvSpPr>
         <p:spPr>
           <a:xfrm>
-            <a:off x="2938272" y="2258568"/>
+            <a:off x="2221992" y="2258568"/>
             <a:ext cx="1828800" cy="292608"/>
           </a:xfrm>
           <a:prstGeom prst="rect">
@@ -30188,7 +31227,7 @@
         </p:nvSpPr>
         <p:spPr>
           <a:xfrm>
-            <a:off x="2938272" y="2258568"/>
+            <a:off x="2221992" y="2258568"/>
             <a:ext cx="1828800" cy="292608"/>
           </a:xfrm>
           <a:prstGeom prst="rect">
@@ -30227,7 +31266,7 @@
         </p:nvSpPr>
         <p:spPr>
           <a:xfrm>
-            <a:off x="2938272" y="2569464"/>
+            <a:off x="2221992" y="2569464"/>
             <a:ext cx="1828800" cy="201168"/>
           </a:xfrm>
           <a:prstGeom prst="rect">
@@ -30266,7 +31305,7 @@
         </p:nvSpPr>
         <p:spPr>
           <a:xfrm>
-            <a:off x="5803392" y="2258568"/>
+            <a:off x="4370832" y="2258568"/>
             <a:ext cx="1828800" cy="292608"/>
           </a:xfrm>
           <a:prstGeom prst="rect">
@@ -30300,7 +31339,7 @@
         </p:nvSpPr>
         <p:spPr>
           <a:xfrm>
-            <a:off x="5803392" y="2258568"/>
+            <a:off x="4370832" y="2258568"/>
             <a:ext cx="1828800" cy="292608"/>
           </a:xfrm>
           <a:prstGeom prst="rect">
@@ -30325,7 +31364,7 @@
                 <a:ea typeface="Trebuchet MS" pitchFamily="34" charset="-122"/>
                 <a:cs typeface="Trebuchet MS" pitchFamily="34" charset="-120"/>
               </a:rPr>
-              <a:t>pone</a:t>
+              <a:t>nat</a:t>
             </a:r>
             <a:endParaRPr lang="en-US" sz="1300" dirty="0"/>
           </a:p>
@@ -30339,7 +31378,7 @@
         </p:nvSpPr>
         <p:spPr>
           <a:xfrm>
-            <a:off x="5803392" y="2569464"/>
+            <a:off x="4370832" y="2569464"/>
             <a:ext cx="1828800" cy="201168"/>
           </a:xfrm>
           <a:prstGeom prst="rect">
@@ -30364,7 +31403,7 @@
                 <a:ea typeface="Calibri" pitchFamily="34" charset="-122"/>
                 <a:cs typeface="Calibri" pitchFamily="34" charset="-120"/>
               </a:rPr>
-              <a:t>to place, to put</a:t>
+              <a:t>birth</a:t>
             </a:r>
             <a:endParaRPr lang="en-US" sz="850" dirty="0"/>
           </a:p>
@@ -30373,6 +31412,118 @@
       <p:sp>
         <p:nvSpPr>
           <p:cNvPr id="22" name="Shape 20"/>
+          <p:cNvSpPr/>
+          <p:nvPr/>
+        </p:nvSpPr>
+        <p:spPr>
+          <a:xfrm>
+            <a:off x="6519672" y="2258568"/>
+            <a:ext cx="1828800" cy="292608"/>
+          </a:xfrm>
+          <a:prstGeom prst="rect">
+            <a:avLst>
+              <a:gd name="adj" fmla="val 25000"/>
+            </a:avLst>
+          </a:prstGeom>
+          <a:solidFill>
+            <a:srgbClr val="FCE7F3"/>
+          </a:solidFill>
+          <a:ln w="19050">
+            <a:solidFill>
+              <a:srgbClr val="DB2777"/>
+            </a:solidFill>
+            <a:prstDash val="solid"/>
+          </a:ln>
+          <a:effectLst>
+            <a:outerShdw sx="100000" sy="100000" kx="0" ky="0" algn="bl" rotWithShape="0" blurRad="101600" dist="38100" dir="8100000">
+              <a:srgbClr val="000000">
+                <a:alpha val="12000"/>
+              </a:srgbClr>
+            </a:outerShdw>
+          </a:effectLst>
+        </p:spPr>
+      </p:sp>
+      <p:sp>
+        <p:nvSpPr>
+          <p:cNvPr id="23" name="Text 21"/>
+          <p:cNvSpPr/>
+          <p:nvPr/>
+        </p:nvSpPr>
+        <p:spPr>
+          <a:xfrm>
+            <a:off x="6519672" y="2258568"/>
+            <a:ext cx="1828800" cy="292608"/>
+          </a:xfrm>
+          <a:prstGeom prst="rect">
+            <a:avLst/>
+          </a:prstGeom>
+          <a:noFill/>
+          <a:ln/>
+        </p:spPr>
+        <p:txBody>
+          <a:bodyPr wrap="square" lIns="0" tIns="0" rIns="0" bIns="0" rtlCol="0" anchor="ctr"/>
+          <a:lstStyle/>
+          <a:p>
+            <a:pPr algn="ctr" indent="0" marL="0">
+              <a:buNone/>
+            </a:pPr>
+            <a:r>
+              <a:rPr lang="en-US" sz="1300" b="1" dirty="0">
+                <a:solidFill>
+                  <a:srgbClr val="9D174D"/>
+                </a:solidFill>
+                <a:latin typeface="Trebuchet MS" pitchFamily="34" charset="0"/>
+                <a:ea typeface="Trebuchet MS" pitchFamily="34" charset="-122"/>
+                <a:cs typeface="Trebuchet MS" pitchFamily="34" charset="-120"/>
+              </a:rPr>
+              <a:t>al</a:t>
+            </a:r>
+            <a:endParaRPr lang="en-US" sz="1300" dirty="0"/>
+          </a:p>
+        </p:txBody>
+      </p:sp>
+      <p:sp>
+        <p:nvSpPr>
+          <p:cNvPr id="24" name="Text 22"/>
+          <p:cNvSpPr/>
+          <p:nvPr/>
+        </p:nvSpPr>
+        <p:spPr>
+          <a:xfrm>
+            <a:off x="6519672" y="2569464"/>
+            <a:ext cx="1828800" cy="201168"/>
+          </a:xfrm>
+          <a:prstGeom prst="rect">
+            <a:avLst/>
+          </a:prstGeom>
+          <a:noFill/>
+          <a:ln/>
+        </p:spPr>
+        <p:txBody>
+          <a:bodyPr wrap="square" lIns="0" tIns="0" rIns="0" bIns="0" rtlCol="0" anchor="t"/>
+          <a:lstStyle/>
+          <a:p>
+            <a:pPr algn="ctr" indent="0" marL="0">
+              <a:buNone/>
+            </a:pPr>
+            <a:r>
+              <a:rPr lang="en-US" sz="850" dirty="0">
+                <a:solidFill>
+                  <a:srgbClr val="475569"/>
+                </a:solidFill>
+                <a:latin typeface="Calibri" pitchFamily="34" charset="0"/>
+                <a:ea typeface="Calibri" pitchFamily="34" charset="-122"/>
+                <a:cs typeface="Calibri" pitchFamily="34" charset="-120"/>
+              </a:rPr>
+              <a:t>relating to</a:t>
+            </a:r>
+            <a:endParaRPr lang="en-US" sz="850" dirty="0"/>
+          </a:p>
+        </p:txBody>
+      </p:sp>
+      <p:sp>
+        <p:nvSpPr>
+          <p:cNvPr id="25" name="Shape 23"/>
           <p:cNvSpPr/>
           <p:nvPr/>
         </p:nvSpPr>
@@ -30399,7 +31550,7 @@
       </p:sp>
       <p:sp>
         <p:nvSpPr>
-          <p:cNvPr id="23" name="Text 21"/>
+          <p:cNvPr id="26" name="Text 24"/>
           <p:cNvSpPr/>
           <p:nvPr/>
         </p:nvSpPr>
@@ -30438,7 +31589,7 @@
       </p:sp>
       <p:sp>
         <p:nvSpPr>
-          <p:cNvPr id="24" name="Shape 22"/>
+          <p:cNvPr id="27" name="Shape 25"/>
           <p:cNvSpPr/>
           <p:nvPr/>
         </p:nvSpPr>
@@ -30465,13 +31616,13 @@
       </p:sp>
       <p:sp>
         <p:nvSpPr>
-          <p:cNvPr id="25" name="Shape 23"/>
-          <p:cNvSpPr/>
-          <p:nvPr/>
-        </p:nvSpPr>
-        <p:spPr>
-          <a:xfrm>
-            <a:off x="2999232" y="3364992"/>
+          <p:cNvPr id="28" name="Shape 26"/>
+          <p:cNvSpPr/>
+          <p:nvPr/>
+        </p:nvSpPr>
+        <p:spPr>
+          <a:xfrm>
+            <a:off x="2313432" y="3364992"/>
             <a:ext cx="1645920" cy="475488"/>
           </a:xfrm>
           <a:prstGeom prst="rect">
@@ -30492,13 +31643,13 @@
       </p:sp>
       <p:sp>
         <p:nvSpPr>
-          <p:cNvPr id="26" name="Text 24"/>
-          <p:cNvSpPr/>
-          <p:nvPr/>
-        </p:nvSpPr>
-        <p:spPr>
-          <a:xfrm>
-            <a:off x="2999232" y="3364992"/>
+          <p:cNvPr id="29" name="Text 27"/>
+          <p:cNvSpPr/>
+          <p:nvPr/>
+        </p:nvSpPr>
+        <p:spPr>
+          <a:xfrm>
+            <a:off x="2313432" y="3364992"/>
             <a:ext cx="1645920" cy="475488"/>
           </a:xfrm>
           <a:prstGeom prst="rect">
@@ -30531,14 +31682,14 @@
       </p:sp>
       <p:sp>
         <p:nvSpPr>
-          <p:cNvPr id="27" name="Text 25"/>
-          <p:cNvSpPr/>
-          <p:nvPr/>
-        </p:nvSpPr>
-        <p:spPr>
-          <a:xfrm>
-            <a:off x="4645152" y="3364992"/>
-            <a:ext cx="1097280" cy="475488"/>
+          <p:cNvPr id="30" name="Text 28"/>
+          <p:cNvSpPr/>
+          <p:nvPr/>
+        </p:nvSpPr>
+        <p:spPr>
+          <a:xfrm>
+            <a:off x="3959352" y="3364992"/>
+            <a:ext cx="411480" cy="475488"/>
           </a:xfrm>
           <a:prstGeom prst="rect">
             <a:avLst/>
@@ -30570,13 +31721,13 @@
       </p:sp>
       <p:sp>
         <p:nvSpPr>
-          <p:cNvPr id="28" name="Shape 26"/>
-          <p:cNvSpPr/>
-          <p:nvPr/>
-        </p:nvSpPr>
-        <p:spPr>
-          <a:xfrm>
-            <a:off x="5742432" y="3364992"/>
+          <p:cNvPr id="31" name="Shape 29"/>
+          <p:cNvSpPr/>
+          <p:nvPr/>
+        </p:nvSpPr>
+        <p:spPr>
+          <a:xfrm>
+            <a:off x="4370832" y="3364992"/>
             <a:ext cx="1645920" cy="475488"/>
           </a:xfrm>
           <a:prstGeom prst="rect">
@@ -30597,13 +31748,13 @@
       </p:sp>
       <p:sp>
         <p:nvSpPr>
-          <p:cNvPr id="29" name="Text 27"/>
-          <p:cNvSpPr/>
-          <p:nvPr/>
-        </p:nvSpPr>
-        <p:spPr>
-          <a:xfrm>
-            <a:off x="5742432" y="3364992"/>
+          <p:cNvPr id="32" name="Text 30"/>
+          <p:cNvSpPr/>
+          <p:nvPr/>
+        </p:nvSpPr>
+        <p:spPr>
+          <a:xfrm>
+            <a:off x="4370832" y="3364992"/>
             <a:ext cx="1645920" cy="475488"/>
           </a:xfrm>
           <a:prstGeom prst="rect">
@@ -30628,7 +31779,7 @@
                 <a:ea typeface="Trebuchet MS" pitchFamily="34" charset="-122"/>
                 <a:cs typeface="Trebuchet MS" pitchFamily="34" charset="-120"/>
               </a:rPr>
-              <a:t>pone</a:t>
+              <a:t>na</a:t>
             </a:r>
             <a:endParaRPr lang="en-US" sz="1400" dirty="0"/>
           </a:p>
@@ -30636,7 +31787,112 @@
       </p:sp>
       <p:sp>
         <p:nvSpPr>
-          <p:cNvPr id="30" name="Shape 28"/>
+          <p:cNvPr id="33" name="Text 31"/>
+          <p:cNvSpPr/>
+          <p:nvPr/>
+        </p:nvSpPr>
+        <p:spPr>
+          <a:xfrm>
+            <a:off x="6016752" y="3364992"/>
+            <a:ext cx="411480" cy="475488"/>
+          </a:xfrm>
+          <a:prstGeom prst="rect">
+            <a:avLst/>
+          </a:prstGeom>
+          <a:noFill/>
+          <a:ln/>
+        </p:spPr>
+        <p:txBody>
+          <a:bodyPr wrap="square" lIns="0" tIns="0" rIns="0" bIns="0" rtlCol="0" anchor="ctr"/>
+          <a:lstStyle/>
+          <a:p>
+            <a:pPr algn="ctr" indent="0" marL="0">
+              <a:buNone/>
+            </a:pPr>
+            <a:r>
+              <a:rPr lang="en-US" sz="1600" b="1" dirty="0">
+                <a:solidFill>
+                  <a:srgbClr val="0D9488"/>
+                </a:solidFill>
+                <a:latin typeface="Trebuchet MS" pitchFamily="34" charset="0"/>
+                <a:ea typeface="Trebuchet MS" pitchFamily="34" charset="-122"/>
+                <a:cs typeface="Trebuchet MS" pitchFamily="34" charset="-120"/>
+              </a:rPr>
+              <a:t>·</a:t>
+            </a:r>
+            <a:endParaRPr lang="en-US" sz="1600" dirty="0"/>
+          </a:p>
+        </p:txBody>
+      </p:sp>
+      <p:sp>
+        <p:nvSpPr>
+          <p:cNvPr id="34" name="Shape 32"/>
+          <p:cNvSpPr/>
+          <p:nvPr/>
+        </p:nvSpPr>
+        <p:spPr>
+          <a:xfrm>
+            <a:off x="6428232" y="3364992"/>
+            <a:ext cx="1645920" cy="475488"/>
+          </a:xfrm>
+          <a:prstGeom prst="rect">
+            <a:avLst>
+              <a:gd name="adj" fmla="val 9615"/>
+            </a:avLst>
+          </a:prstGeom>
+          <a:solidFill>
+            <a:srgbClr val="FFFFFF"/>
+          </a:solidFill>
+          <a:ln w="12700">
+            <a:solidFill>
+              <a:srgbClr val="0D9488"/>
+            </a:solidFill>
+            <a:prstDash val="solid"/>
+          </a:ln>
+        </p:spPr>
+      </p:sp>
+      <p:sp>
+        <p:nvSpPr>
+          <p:cNvPr id="35" name="Text 33"/>
+          <p:cNvSpPr/>
+          <p:nvPr/>
+        </p:nvSpPr>
+        <p:spPr>
+          <a:xfrm>
+            <a:off x="6428232" y="3364992"/>
+            <a:ext cx="1645920" cy="475488"/>
+          </a:xfrm>
+          <a:prstGeom prst="rect">
+            <a:avLst/>
+          </a:prstGeom>
+          <a:noFill/>
+          <a:ln/>
+        </p:spPr>
+        <p:txBody>
+          <a:bodyPr wrap="square" lIns="0" tIns="0" rIns="0" bIns="0" rtlCol="0" anchor="ctr"/>
+          <a:lstStyle/>
+          <a:p>
+            <a:pPr algn="ctr" indent="0" marL="0">
+              <a:buNone/>
+            </a:pPr>
+            <a:r>
+              <a:rPr lang="en-US" sz="1400" b="1" dirty="0">
+                <a:solidFill>
+                  <a:srgbClr val="0D9488"/>
+                </a:solidFill>
+                <a:latin typeface="Trebuchet MS" pitchFamily="34" charset="0"/>
+                <a:ea typeface="Trebuchet MS" pitchFamily="34" charset="-122"/>
+                <a:cs typeface="Trebuchet MS" pitchFamily="34" charset="-120"/>
+              </a:rPr>
+              <a:t>tal</a:t>
+            </a:r>
+            <a:endParaRPr lang="en-US" sz="1400" dirty="0"/>
+          </a:p>
+        </p:txBody>
+      </p:sp>
+      <p:sp>
+        <p:nvSpPr>
+          <p:cNvPr id="36" name="Shape 34"/>
           <p:cNvSpPr/>
           <p:nvPr/>
         </p:nvSpPr>
@@ -30663,7 +31919,7 @@
       </p:sp>
       <p:sp>
         <p:nvSpPr>
-          <p:cNvPr id="31" name="Text 29"/>
+          <p:cNvPr id="37" name="Text 35"/>
           <p:cNvSpPr/>
           <p:nvPr/>
         </p:nvSpPr>
@@ -30702,7 +31958,7 @@
       </p:sp>
       <p:sp>
         <p:nvSpPr>
-          <p:cNvPr id="32" name="Shape 30"/>
+          <p:cNvPr id="38" name="Shape 36"/>
           <p:cNvSpPr/>
           <p:nvPr/>
         </p:nvSpPr>
@@ -30729,7 +31985,7 @@
       </p:sp>
       <p:sp>
         <p:nvSpPr>
-          <p:cNvPr id="33" name="Text 31"/>
+          <p:cNvPr id="39" name="Text 37"/>
           <p:cNvSpPr/>
           <p:nvPr/>
         </p:nvSpPr>
@@ -31052,7 +32308,7 @@
                 <a:ea typeface="Calibri" pitchFamily="34" charset="-122"/>
                 <a:cs typeface="Calibri" pitchFamily="34" charset="-120"/>
               </a:rPr>
-              <a:t>Word Labs  •  wordlabs.app  •  Prefix: 'post-' = after, behind, later</a:t>
+              <a:t>Word Labs  •  wordlabs.app  •  Prefix: 'post-' = after, later, behind</a:t>
             </a:r>
             <a:endParaRPr lang="en-US" sz="800" dirty="0"/>
           </a:p>
@@ -31191,7 +32447,7 @@
                 <a:ea typeface="Trebuchet MS" pitchFamily="34" charset="-122"/>
                 <a:cs typeface="Trebuchet MS" pitchFamily="34" charset="-120"/>
               </a:rPr>
-              <a:t>postpone</a:t>
+              <a:t>postnatal</a:t>
             </a:r>
             <a:endParaRPr lang="en-US" sz="2800" dirty="0"/>
           </a:p>
@@ -31271,7 +32527,7 @@
         </p:nvSpPr>
         <p:spPr>
           <a:xfrm>
-            <a:off x="2938272" y="2258568"/>
+            <a:off x="2221992" y="2258568"/>
             <a:ext cx="1828800" cy="292608"/>
           </a:xfrm>
           <a:prstGeom prst="rect">
@@ -31305,7 +32561,7 @@
         </p:nvSpPr>
         <p:spPr>
           <a:xfrm>
-            <a:off x="2938272" y="2258568"/>
+            <a:off x="2221992" y="2258568"/>
             <a:ext cx="1828800" cy="292608"/>
           </a:xfrm>
           <a:prstGeom prst="rect">
@@ -31344,7 +32600,7 @@
         </p:nvSpPr>
         <p:spPr>
           <a:xfrm>
-            <a:off x="2938272" y="2569464"/>
+            <a:off x="2221992" y="2569464"/>
             <a:ext cx="1828800" cy="201168"/>
           </a:xfrm>
           <a:prstGeom prst="rect">
@@ -31383,7 +32639,7 @@
         </p:nvSpPr>
         <p:spPr>
           <a:xfrm>
-            <a:off x="5803392" y="2258568"/>
+            <a:off x="4370832" y="2258568"/>
             <a:ext cx="1828800" cy="292608"/>
           </a:xfrm>
           <a:prstGeom prst="rect">
@@ -31417,7 +32673,7 @@
         </p:nvSpPr>
         <p:spPr>
           <a:xfrm>
-            <a:off x="5803392" y="2258568"/>
+            <a:off x="4370832" y="2258568"/>
             <a:ext cx="1828800" cy="292608"/>
           </a:xfrm>
           <a:prstGeom prst="rect">
@@ -31442,7 +32698,7 @@
                 <a:ea typeface="Trebuchet MS" pitchFamily="34" charset="-122"/>
                 <a:cs typeface="Trebuchet MS" pitchFamily="34" charset="-120"/>
               </a:rPr>
-              <a:t>pone</a:t>
+              <a:t>nat</a:t>
             </a:r>
             <a:endParaRPr lang="en-US" sz="1300" dirty="0"/>
           </a:p>
@@ -31456,7 +32712,7 @@
         </p:nvSpPr>
         <p:spPr>
           <a:xfrm>
-            <a:off x="5803392" y="2569464"/>
+            <a:off x="4370832" y="2569464"/>
             <a:ext cx="1828800" cy="201168"/>
           </a:xfrm>
           <a:prstGeom prst="rect">
@@ -31481,7 +32737,7 @@
                 <a:ea typeface="Calibri" pitchFamily="34" charset="-122"/>
                 <a:cs typeface="Calibri" pitchFamily="34" charset="-120"/>
               </a:rPr>
-              <a:t>to place, to put</a:t>
+              <a:t>birth</a:t>
             </a:r>
             <a:endParaRPr lang="en-US" sz="850" dirty="0"/>
           </a:p>
@@ -31490,6 +32746,118 @@
       <p:sp>
         <p:nvSpPr>
           <p:cNvPr id="22" name="Shape 20"/>
+          <p:cNvSpPr/>
+          <p:nvPr/>
+        </p:nvSpPr>
+        <p:spPr>
+          <a:xfrm>
+            <a:off x="6519672" y="2258568"/>
+            <a:ext cx="1828800" cy="292608"/>
+          </a:xfrm>
+          <a:prstGeom prst="rect">
+            <a:avLst>
+              <a:gd name="adj" fmla="val 25000"/>
+            </a:avLst>
+          </a:prstGeom>
+          <a:solidFill>
+            <a:srgbClr val="FCE7F3"/>
+          </a:solidFill>
+          <a:ln w="19050">
+            <a:solidFill>
+              <a:srgbClr val="DB2777"/>
+            </a:solidFill>
+            <a:prstDash val="solid"/>
+          </a:ln>
+          <a:effectLst>
+            <a:outerShdw sx="100000" sy="100000" kx="0" ky="0" algn="bl" rotWithShape="0" blurRad="101600" dist="38100" dir="8100000">
+              <a:srgbClr val="000000">
+                <a:alpha val="12000"/>
+              </a:srgbClr>
+            </a:outerShdw>
+          </a:effectLst>
+        </p:spPr>
+      </p:sp>
+      <p:sp>
+        <p:nvSpPr>
+          <p:cNvPr id="23" name="Text 21"/>
+          <p:cNvSpPr/>
+          <p:nvPr/>
+        </p:nvSpPr>
+        <p:spPr>
+          <a:xfrm>
+            <a:off x="6519672" y="2258568"/>
+            <a:ext cx="1828800" cy="292608"/>
+          </a:xfrm>
+          <a:prstGeom prst="rect">
+            <a:avLst/>
+          </a:prstGeom>
+          <a:noFill/>
+          <a:ln/>
+        </p:spPr>
+        <p:txBody>
+          <a:bodyPr wrap="square" lIns="0" tIns="0" rIns="0" bIns="0" rtlCol="0" anchor="ctr"/>
+          <a:lstStyle/>
+          <a:p>
+            <a:pPr algn="ctr" indent="0" marL="0">
+              <a:buNone/>
+            </a:pPr>
+            <a:r>
+              <a:rPr lang="en-US" sz="1300" b="1" dirty="0">
+                <a:solidFill>
+                  <a:srgbClr val="9D174D"/>
+                </a:solidFill>
+                <a:latin typeface="Trebuchet MS" pitchFamily="34" charset="0"/>
+                <a:ea typeface="Trebuchet MS" pitchFamily="34" charset="-122"/>
+                <a:cs typeface="Trebuchet MS" pitchFamily="34" charset="-120"/>
+              </a:rPr>
+              <a:t>al</a:t>
+            </a:r>
+            <a:endParaRPr lang="en-US" sz="1300" dirty="0"/>
+          </a:p>
+        </p:txBody>
+      </p:sp>
+      <p:sp>
+        <p:nvSpPr>
+          <p:cNvPr id="24" name="Text 22"/>
+          <p:cNvSpPr/>
+          <p:nvPr/>
+        </p:nvSpPr>
+        <p:spPr>
+          <a:xfrm>
+            <a:off x="6519672" y="2569464"/>
+            <a:ext cx="1828800" cy="201168"/>
+          </a:xfrm>
+          <a:prstGeom prst="rect">
+            <a:avLst/>
+          </a:prstGeom>
+          <a:noFill/>
+          <a:ln/>
+        </p:spPr>
+        <p:txBody>
+          <a:bodyPr wrap="square" lIns="0" tIns="0" rIns="0" bIns="0" rtlCol="0" anchor="t"/>
+          <a:lstStyle/>
+          <a:p>
+            <a:pPr algn="ctr" indent="0" marL="0">
+              <a:buNone/>
+            </a:pPr>
+            <a:r>
+              <a:rPr lang="en-US" sz="850" dirty="0">
+                <a:solidFill>
+                  <a:srgbClr val="475569"/>
+                </a:solidFill>
+                <a:latin typeface="Calibri" pitchFamily="34" charset="0"/>
+                <a:ea typeface="Calibri" pitchFamily="34" charset="-122"/>
+                <a:cs typeface="Calibri" pitchFamily="34" charset="-120"/>
+              </a:rPr>
+              <a:t>relating to</a:t>
+            </a:r>
+            <a:endParaRPr lang="en-US" sz="850" dirty="0"/>
+          </a:p>
+        </p:txBody>
+      </p:sp>
+      <p:sp>
+        <p:nvSpPr>
+          <p:cNvPr id="25" name="Shape 23"/>
           <p:cNvSpPr/>
           <p:nvPr/>
         </p:nvSpPr>
@@ -31516,7 +32884,7 @@
       </p:sp>
       <p:sp>
         <p:nvSpPr>
-          <p:cNvPr id="23" name="Text 21"/>
+          <p:cNvPr id="26" name="Text 24"/>
           <p:cNvSpPr/>
           <p:nvPr/>
         </p:nvSpPr>
@@ -31555,7 +32923,7 @@
       </p:sp>
       <p:sp>
         <p:nvSpPr>
-          <p:cNvPr id="24" name="Shape 22"/>
+          <p:cNvPr id="27" name="Shape 25"/>
           <p:cNvSpPr/>
           <p:nvPr/>
         </p:nvSpPr>
@@ -31582,13 +32950,13 @@
       </p:sp>
       <p:sp>
         <p:nvSpPr>
-          <p:cNvPr id="25" name="Shape 23"/>
-          <p:cNvSpPr/>
-          <p:nvPr/>
-        </p:nvSpPr>
-        <p:spPr>
-          <a:xfrm>
-            <a:off x="2999232" y="3364992"/>
+          <p:cNvPr id="28" name="Shape 26"/>
+          <p:cNvSpPr/>
+          <p:nvPr/>
+        </p:nvSpPr>
+        <p:spPr>
+          <a:xfrm>
+            <a:off x="2313432" y="3364992"/>
             <a:ext cx="1645920" cy="475488"/>
           </a:xfrm>
           <a:prstGeom prst="rect">
@@ -31609,13 +32977,13 @@
       </p:sp>
       <p:sp>
         <p:nvSpPr>
-          <p:cNvPr id="26" name="Text 24"/>
-          <p:cNvSpPr/>
-          <p:nvPr/>
-        </p:nvSpPr>
-        <p:spPr>
-          <a:xfrm>
-            <a:off x="2999232" y="3364992"/>
+          <p:cNvPr id="29" name="Text 27"/>
+          <p:cNvSpPr/>
+          <p:nvPr/>
+        </p:nvSpPr>
+        <p:spPr>
+          <a:xfrm>
+            <a:off x="2313432" y="3364992"/>
             <a:ext cx="1645920" cy="475488"/>
           </a:xfrm>
           <a:prstGeom prst="rect">
@@ -31648,14 +33016,14 @@
       </p:sp>
       <p:sp>
         <p:nvSpPr>
-          <p:cNvPr id="27" name="Text 25"/>
-          <p:cNvSpPr/>
-          <p:nvPr/>
-        </p:nvSpPr>
-        <p:spPr>
-          <a:xfrm>
-            <a:off x="4645152" y="3364992"/>
-            <a:ext cx="1097280" cy="475488"/>
+          <p:cNvPr id="30" name="Text 28"/>
+          <p:cNvSpPr/>
+          <p:nvPr/>
+        </p:nvSpPr>
+        <p:spPr>
+          <a:xfrm>
+            <a:off x="3959352" y="3364992"/>
+            <a:ext cx="411480" cy="475488"/>
           </a:xfrm>
           <a:prstGeom prst="rect">
             <a:avLst/>
@@ -31687,13 +33055,13 @@
       </p:sp>
       <p:sp>
         <p:nvSpPr>
-          <p:cNvPr id="28" name="Shape 26"/>
-          <p:cNvSpPr/>
-          <p:nvPr/>
-        </p:nvSpPr>
-        <p:spPr>
-          <a:xfrm>
-            <a:off x="5742432" y="3364992"/>
+          <p:cNvPr id="31" name="Shape 29"/>
+          <p:cNvSpPr/>
+          <p:nvPr/>
+        </p:nvSpPr>
+        <p:spPr>
+          <a:xfrm>
+            <a:off x="4370832" y="3364992"/>
             <a:ext cx="1645920" cy="475488"/>
           </a:xfrm>
           <a:prstGeom prst="rect">
@@ -31714,13 +33082,13 @@
       </p:sp>
       <p:sp>
         <p:nvSpPr>
-          <p:cNvPr id="29" name="Text 27"/>
-          <p:cNvSpPr/>
-          <p:nvPr/>
-        </p:nvSpPr>
-        <p:spPr>
-          <a:xfrm>
-            <a:off x="5742432" y="3364992"/>
+          <p:cNvPr id="32" name="Text 30"/>
+          <p:cNvSpPr/>
+          <p:nvPr/>
+        </p:nvSpPr>
+        <p:spPr>
+          <a:xfrm>
+            <a:off x="4370832" y="3364992"/>
             <a:ext cx="1645920" cy="475488"/>
           </a:xfrm>
           <a:prstGeom prst="rect">
@@ -31745,7 +33113,7 @@
                 <a:ea typeface="Trebuchet MS" pitchFamily="34" charset="-122"/>
                 <a:cs typeface="Trebuchet MS" pitchFamily="34" charset="-120"/>
               </a:rPr>
-              <a:t>pone</a:t>
+              <a:t>na</a:t>
             </a:r>
             <a:endParaRPr lang="en-US" sz="1400" dirty="0"/>
           </a:p>
@@ -31753,7 +33121,112 @@
       </p:sp>
       <p:sp>
         <p:nvSpPr>
-          <p:cNvPr id="30" name="Shape 28"/>
+          <p:cNvPr id="33" name="Text 31"/>
+          <p:cNvSpPr/>
+          <p:nvPr/>
+        </p:nvSpPr>
+        <p:spPr>
+          <a:xfrm>
+            <a:off x="6016752" y="3364992"/>
+            <a:ext cx="411480" cy="475488"/>
+          </a:xfrm>
+          <a:prstGeom prst="rect">
+            <a:avLst/>
+          </a:prstGeom>
+          <a:noFill/>
+          <a:ln/>
+        </p:spPr>
+        <p:txBody>
+          <a:bodyPr wrap="square" lIns="0" tIns="0" rIns="0" bIns="0" rtlCol="0" anchor="ctr"/>
+          <a:lstStyle/>
+          <a:p>
+            <a:pPr algn="ctr" indent="0" marL="0">
+              <a:buNone/>
+            </a:pPr>
+            <a:r>
+              <a:rPr lang="en-US" sz="1600" b="1" dirty="0">
+                <a:solidFill>
+                  <a:srgbClr val="0D9488"/>
+                </a:solidFill>
+                <a:latin typeface="Trebuchet MS" pitchFamily="34" charset="0"/>
+                <a:ea typeface="Trebuchet MS" pitchFamily="34" charset="-122"/>
+                <a:cs typeface="Trebuchet MS" pitchFamily="34" charset="-120"/>
+              </a:rPr>
+              <a:t>·</a:t>
+            </a:r>
+            <a:endParaRPr lang="en-US" sz="1600" dirty="0"/>
+          </a:p>
+        </p:txBody>
+      </p:sp>
+      <p:sp>
+        <p:nvSpPr>
+          <p:cNvPr id="34" name="Shape 32"/>
+          <p:cNvSpPr/>
+          <p:nvPr/>
+        </p:nvSpPr>
+        <p:spPr>
+          <a:xfrm>
+            <a:off x="6428232" y="3364992"/>
+            <a:ext cx="1645920" cy="475488"/>
+          </a:xfrm>
+          <a:prstGeom prst="rect">
+            <a:avLst>
+              <a:gd name="adj" fmla="val 9615"/>
+            </a:avLst>
+          </a:prstGeom>
+          <a:solidFill>
+            <a:srgbClr val="FFFFFF"/>
+          </a:solidFill>
+          <a:ln w="12700">
+            <a:solidFill>
+              <a:srgbClr val="0D9488"/>
+            </a:solidFill>
+            <a:prstDash val="solid"/>
+          </a:ln>
+        </p:spPr>
+      </p:sp>
+      <p:sp>
+        <p:nvSpPr>
+          <p:cNvPr id="35" name="Text 33"/>
+          <p:cNvSpPr/>
+          <p:nvPr/>
+        </p:nvSpPr>
+        <p:spPr>
+          <a:xfrm>
+            <a:off x="6428232" y="3364992"/>
+            <a:ext cx="1645920" cy="475488"/>
+          </a:xfrm>
+          <a:prstGeom prst="rect">
+            <a:avLst/>
+          </a:prstGeom>
+          <a:noFill/>
+          <a:ln/>
+        </p:spPr>
+        <p:txBody>
+          <a:bodyPr wrap="square" lIns="0" tIns="0" rIns="0" bIns="0" rtlCol="0" anchor="ctr"/>
+          <a:lstStyle/>
+          <a:p>
+            <a:pPr algn="ctr" indent="0" marL="0">
+              <a:buNone/>
+            </a:pPr>
+            <a:r>
+              <a:rPr lang="en-US" sz="1400" b="1" dirty="0">
+                <a:solidFill>
+                  <a:srgbClr val="0D9488"/>
+                </a:solidFill>
+                <a:latin typeface="Trebuchet MS" pitchFamily="34" charset="0"/>
+                <a:ea typeface="Trebuchet MS" pitchFamily="34" charset="-122"/>
+                <a:cs typeface="Trebuchet MS" pitchFamily="34" charset="-120"/>
+              </a:rPr>
+              <a:t>tal</a:t>
+            </a:r>
+            <a:endParaRPr lang="en-US" sz="1400" dirty="0"/>
+          </a:p>
+        </p:txBody>
+      </p:sp>
+      <p:sp>
+        <p:nvSpPr>
+          <p:cNvPr id="36" name="Shape 34"/>
           <p:cNvSpPr/>
           <p:nvPr/>
         </p:nvSpPr>
@@ -31780,7 +33253,7 @@
       </p:sp>
       <p:sp>
         <p:nvSpPr>
-          <p:cNvPr id="31" name="Text 29"/>
+          <p:cNvPr id="37" name="Text 35"/>
           <p:cNvSpPr/>
           <p:nvPr/>
         </p:nvSpPr>
@@ -31819,7 +33292,7 @@
       </p:sp>
       <p:sp>
         <p:nvSpPr>
-          <p:cNvPr id="32" name="Shape 30"/>
+          <p:cNvPr id="38" name="Shape 36"/>
           <p:cNvSpPr/>
           <p:nvPr/>
         </p:nvSpPr>
@@ -31846,13 +33319,13 @@
       </p:sp>
       <p:sp>
         <p:nvSpPr>
-          <p:cNvPr id="33" name="Shape 31"/>
-          <p:cNvSpPr/>
-          <p:nvPr/>
-        </p:nvSpPr>
-        <p:spPr>
-          <a:xfrm>
-            <a:off x="2124837" y="4169664"/>
+          <p:cNvPr id="39" name="Shape 37"/>
+          <p:cNvSpPr/>
+          <p:nvPr/>
+        </p:nvSpPr>
+        <p:spPr>
+          <a:xfrm>
+            <a:off x="2023872" y="4169664"/>
             <a:ext cx="685800" cy="475488"/>
           </a:xfrm>
           <a:prstGeom prst="rect">
@@ -31873,13 +33346,13 @@
       </p:sp>
       <p:sp>
         <p:nvSpPr>
-          <p:cNvPr id="34" name="Text 32"/>
-          <p:cNvSpPr/>
-          <p:nvPr/>
-        </p:nvSpPr>
-        <p:spPr>
-          <a:xfrm>
-            <a:off x="2124837" y="4169664"/>
+          <p:cNvPr id="40" name="Text 38"/>
+          <p:cNvSpPr/>
+          <p:nvPr/>
+        </p:nvSpPr>
+        <p:spPr>
+          <a:xfrm>
+            <a:off x="2023872" y="4169664"/>
             <a:ext cx="685800" cy="475488"/>
           </a:xfrm>
           <a:prstGeom prst="rect">
@@ -31912,13 +33385,13 @@
       </p:sp>
       <p:sp>
         <p:nvSpPr>
-          <p:cNvPr id="35" name="Shape 33"/>
-          <p:cNvSpPr/>
-          <p:nvPr/>
-        </p:nvSpPr>
-        <p:spPr>
-          <a:xfrm>
-            <a:off x="3033522" y="4169664"/>
+          <p:cNvPr id="41" name="Shape 39"/>
+          <p:cNvSpPr/>
+          <p:nvPr/>
+        </p:nvSpPr>
+        <p:spPr>
+          <a:xfrm>
+            <a:off x="2831592" y="4169664"/>
             <a:ext cx="685800" cy="475488"/>
           </a:xfrm>
           <a:prstGeom prst="rect">
@@ -31939,13 +33412,13 @@
       </p:sp>
       <p:sp>
         <p:nvSpPr>
-          <p:cNvPr id="36" name="Text 34"/>
-          <p:cNvSpPr/>
-          <p:nvPr/>
-        </p:nvSpPr>
-        <p:spPr>
-          <a:xfrm>
-            <a:off x="3033522" y="4169664"/>
+          <p:cNvPr id="42" name="Text 40"/>
+          <p:cNvSpPr/>
+          <p:nvPr/>
+        </p:nvSpPr>
+        <p:spPr>
+          <a:xfrm>
+            <a:off x="2831592" y="4169664"/>
             <a:ext cx="685800" cy="475488"/>
           </a:xfrm>
           <a:prstGeom prst="rect">
@@ -31978,13 +33451,13 @@
       </p:sp>
       <p:sp>
         <p:nvSpPr>
-          <p:cNvPr id="37" name="Shape 35"/>
-          <p:cNvSpPr/>
-          <p:nvPr/>
-        </p:nvSpPr>
-        <p:spPr>
-          <a:xfrm>
-            <a:off x="3942207" y="4169664"/>
+          <p:cNvPr id="43" name="Shape 41"/>
+          <p:cNvSpPr/>
+          <p:nvPr/>
+        </p:nvSpPr>
+        <p:spPr>
+          <a:xfrm>
+            <a:off x="3639312" y="4169664"/>
             <a:ext cx="685800" cy="475488"/>
           </a:xfrm>
           <a:prstGeom prst="rect">
@@ -32005,13 +33478,13 @@
       </p:sp>
       <p:sp>
         <p:nvSpPr>
-          <p:cNvPr id="38" name="Text 36"/>
-          <p:cNvSpPr/>
-          <p:nvPr/>
-        </p:nvSpPr>
-        <p:spPr>
-          <a:xfrm>
-            <a:off x="3942207" y="4169664"/>
+          <p:cNvPr id="44" name="Text 42"/>
+          <p:cNvSpPr/>
+          <p:nvPr/>
+        </p:nvSpPr>
+        <p:spPr>
+          <a:xfrm>
+            <a:off x="3639312" y="4169664"/>
             <a:ext cx="685800" cy="475488"/>
           </a:xfrm>
           <a:prstGeom prst="rect">
@@ -32044,13 +33517,13 @@
       </p:sp>
       <p:sp>
         <p:nvSpPr>
-          <p:cNvPr id="39" name="Shape 37"/>
-          <p:cNvSpPr/>
-          <p:nvPr/>
-        </p:nvSpPr>
-        <p:spPr>
-          <a:xfrm>
-            <a:off x="4850892" y="4169664"/>
+          <p:cNvPr id="45" name="Shape 43"/>
+          <p:cNvSpPr/>
+          <p:nvPr/>
+        </p:nvSpPr>
+        <p:spPr>
+          <a:xfrm>
+            <a:off x="4447032" y="4169664"/>
             <a:ext cx="685800" cy="475488"/>
           </a:xfrm>
           <a:prstGeom prst="rect">
@@ -32071,13 +33544,13 @@
       </p:sp>
       <p:sp>
         <p:nvSpPr>
-          <p:cNvPr id="40" name="Text 38"/>
-          <p:cNvSpPr/>
-          <p:nvPr/>
-        </p:nvSpPr>
-        <p:spPr>
-          <a:xfrm>
-            <a:off x="4850892" y="4169664"/>
+          <p:cNvPr id="46" name="Text 44"/>
+          <p:cNvSpPr/>
+          <p:nvPr/>
+        </p:nvSpPr>
+        <p:spPr>
+          <a:xfrm>
+            <a:off x="4447032" y="4169664"/>
             <a:ext cx="685800" cy="475488"/>
           </a:xfrm>
           <a:prstGeom prst="rect">
@@ -32110,13 +33583,13 @@
       </p:sp>
       <p:sp>
         <p:nvSpPr>
-          <p:cNvPr id="41" name="Shape 39"/>
-          <p:cNvSpPr/>
-          <p:nvPr/>
-        </p:nvSpPr>
-        <p:spPr>
-          <a:xfrm>
-            <a:off x="5759577" y="4169664"/>
+          <p:cNvPr id="47" name="Shape 45"/>
+          <p:cNvSpPr/>
+          <p:nvPr/>
+        </p:nvSpPr>
+        <p:spPr>
+          <a:xfrm>
+            <a:off x="5254752" y="4169664"/>
             <a:ext cx="685800" cy="475488"/>
           </a:xfrm>
           <a:prstGeom prst="rect">
@@ -32137,13 +33610,13 @@
       </p:sp>
       <p:sp>
         <p:nvSpPr>
-          <p:cNvPr id="42" name="Text 40"/>
-          <p:cNvSpPr/>
-          <p:nvPr/>
-        </p:nvSpPr>
-        <p:spPr>
-          <a:xfrm>
-            <a:off x="5759577" y="4169664"/>
+          <p:cNvPr id="48" name="Text 46"/>
+          <p:cNvSpPr/>
+          <p:nvPr/>
+        </p:nvSpPr>
+        <p:spPr>
+          <a:xfrm>
+            <a:off x="5254752" y="4169664"/>
             <a:ext cx="685800" cy="475488"/>
           </a:xfrm>
           <a:prstGeom prst="rect">
@@ -32168,7 +33641,7 @@
                 <a:ea typeface="Trebuchet MS" pitchFamily="34" charset="-122"/>
                 <a:cs typeface="Trebuchet MS" pitchFamily="34" charset="-120"/>
               </a:rPr>
-              <a:t>p</a:t>
+              <a:t>n</a:t>
             </a:r>
             <a:endParaRPr lang="en-US" sz="900" dirty="0"/>
           </a:p>
@@ -32176,13 +33649,13 @@
       </p:sp>
       <p:sp>
         <p:nvSpPr>
-          <p:cNvPr id="43" name="Shape 41"/>
-          <p:cNvSpPr/>
-          <p:nvPr/>
-        </p:nvSpPr>
-        <p:spPr>
-          <a:xfrm>
-            <a:off x="6668262" y="4169664"/>
+          <p:cNvPr id="49" name="Shape 47"/>
+          <p:cNvSpPr/>
+          <p:nvPr/>
+        </p:nvSpPr>
+        <p:spPr>
+          <a:xfrm>
+            <a:off x="6062472" y="4169664"/>
             <a:ext cx="685800" cy="475488"/>
           </a:xfrm>
           <a:prstGeom prst="rect">
@@ -32203,13 +33676,13 @@
       </p:sp>
       <p:sp>
         <p:nvSpPr>
-          <p:cNvPr id="44" name="Text 42"/>
-          <p:cNvSpPr/>
-          <p:nvPr/>
-        </p:nvSpPr>
-        <p:spPr>
-          <a:xfrm>
-            <a:off x="6668262" y="4169664"/>
+          <p:cNvPr id="50" name="Text 48"/>
+          <p:cNvSpPr/>
+          <p:nvPr/>
+        </p:nvSpPr>
+        <p:spPr>
+          <a:xfrm>
+            <a:off x="6062472" y="4169664"/>
             <a:ext cx="685800" cy="475488"/>
           </a:xfrm>
           <a:prstGeom prst="rect">
@@ -32234,7 +33707,7 @@
                 <a:ea typeface="Trebuchet MS" pitchFamily="34" charset="-122"/>
                 <a:cs typeface="Trebuchet MS" pitchFamily="34" charset="-120"/>
               </a:rPr>
-              <a:t>o</a:t>
+              <a:t>a</a:t>
             </a:r>
             <a:endParaRPr lang="en-US" sz="900" dirty="0"/>
           </a:p>
@@ -32242,13 +33715,13 @@
       </p:sp>
       <p:sp>
         <p:nvSpPr>
-          <p:cNvPr id="45" name="Shape 43"/>
-          <p:cNvSpPr/>
-          <p:nvPr/>
-        </p:nvSpPr>
-        <p:spPr>
-          <a:xfrm>
-            <a:off x="7576947" y="4169664"/>
+          <p:cNvPr id="51" name="Shape 49"/>
+          <p:cNvSpPr/>
+          <p:nvPr/>
+        </p:nvSpPr>
+        <p:spPr>
+          <a:xfrm>
+            <a:off x="6870192" y="4169664"/>
             <a:ext cx="685800" cy="475488"/>
           </a:xfrm>
           <a:prstGeom prst="rect">
@@ -32269,13 +33742,13 @@
       </p:sp>
       <p:sp>
         <p:nvSpPr>
-          <p:cNvPr id="46" name="Text 44"/>
-          <p:cNvSpPr/>
-          <p:nvPr/>
-        </p:nvSpPr>
-        <p:spPr>
-          <a:xfrm>
-            <a:off x="7576947" y="4169664"/>
+          <p:cNvPr id="52" name="Text 50"/>
+          <p:cNvSpPr/>
+          <p:nvPr/>
+        </p:nvSpPr>
+        <p:spPr>
+          <a:xfrm>
+            <a:off x="6870192" y="4169664"/>
             <a:ext cx="685800" cy="475488"/>
           </a:xfrm>
           <a:prstGeom prst="rect">
@@ -32300,7 +33773,73 @@
                 <a:ea typeface="Trebuchet MS" pitchFamily="34" charset="-122"/>
                 <a:cs typeface="Trebuchet MS" pitchFamily="34" charset="-120"/>
               </a:rPr>
-              <a:t>ne</a:t>
+              <a:t>t</a:t>
+            </a:r>
+            <a:endParaRPr lang="en-US" sz="900" dirty="0"/>
+          </a:p>
+        </p:txBody>
+      </p:sp>
+      <p:sp>
+        <p:nvSpPr>
+          <p:cNvPr id="53" name="Shape 51"/>
+          <p:cNvSpPr/>
+          <p:nvPr/>
+        </p:nvSpPr>
+        <p:spPr>
+          <a:xfrm>
+            <a:off x="7677912" y="4169664"/>
+            <a:ext cx="685800" cy="475488"/>
+          </a:xfrm>
+          <a:prstGeom prst="rect">
+            <a:avLst>
+              <a:gd name="adj" fmla="val 7692"/>
+            </a:avLst>
+          </a:prstGeom>
+          <a:solidFill>
+            <a:srgbClr val="FFFFFF"/>
+          </a:solidFill>
+          <a:ln w="12700">
+            <a:solidFill>
+              <a:srgbClr val="DB2777"/>
+            </a:solidFill>
+            <a:prstDash val="solid"/>
+          </a:ln>
+        </p:spPr>
+      </p:sp>
+      <p:sp>
+        <p:nvSpPr>
+          <p:cNvPr id="54" name="Text 52"/>
+          <p:cNvSpPr/>
+          <p:nvPr/>
+        </p:nvSpPr>
+        <p:spPr>
+          <a:xfrm>
+            <a:off x="7677912" y="4169664"/>
+            <a:ext cx="685800" cy="475488"/>
+          </a:xfrm>
+          <a:prstGeom prst="rect">
+            <a:avLst/>
+          </a:prstGeom>
+          <a:noFill/>
+          <a:ln/>
+        </p:spPr>
+        <p:txBody>
+          <a:bodyPr wrap="square" lIns="0" tIns="0" rIns="0" bIns="0" rtlCol="0" anchor="ctr"/>
+          <a:lstStyle/>
+          <a:p>
+            <a:pPr algn="ctr" indent="0" marL="0">
+              <a:buNone/>
+            </a:pPr>
+            <a:r>
+              <a:rPr lang="en-US" sz="900" b="1" dirty="0">
+                <a:solidFill>
+                  <a:srgbClr val="9D174D"/>
+                </a:solidFill>
+                <a:latin typeface="Trebuchet MS" pitchFamily="34" charset="0"/>
+                <a:ea typeface="Trebuchet MS" pitchFamily="34" charset="-122"/>
+                <a:cs typeface="Trebuchet MS" pitchFamily="34" charset="-120"/>
+              </a:rPr>
+              <a:t>al</a:t>
             </a:r>
             <a:endParaRPr lang="en-US" sz="900" dirty="0"/>
           </a:p>
@@ -32592,7 +34131,7 @@
                 <a:ea typeface="Calibri" pitchFamily="34" charset="-122"/>
                 <a:cs typeface="Calibri" pitchFamily="34" charset="-120"/>
               </a:rPr>
-              <a:t>Word Labs  •  wordlabs.app  •  Prefix: 'post-' = after, behind, later</a:t>
+              <a:t>Word Labs  •  wordlabs.app  •  Prefix: 'post-' = after, later, behind</a:t>
             </a:r>
             <a:endParaRPr lang="en-US" sz="800" dirty="0"/>
           </a:p>
@@ -33761,7 +35300,7 @@
                 <a:ea typeface="Calibri" pitchFamily="34" charset="-122"/>
                 <a:cs typeface="Calibri" pitchFamily="34" charset="-120"/>
               </a:rPr>
-              <a:t>Word Labs  •  wordlabs.app  •  Prefix: 'post-' = after, behind, later</a:t>
+              <a:t>Word Labs  •  wordlabs.app  •  Prefix: 'post-' = after, later, behind</a:t>
             </a:r>
             <a:endParaRPr lang="en-US" sz="800" dirty="0"/>
           </a:p>
@@ -34279,7 +35818,7 @@
                 <a:ea typeface="Trebuchet MS" pitchFamily="34" charset="-122"/>
                 <a:cs typeface="Trebuchet MS" pitchFamily="34" charset="-120"/>
               </a:rPr>
-              <a:t>pone</a:t>
+              <a:t>game</a:t>
             </a:r>
             <a:endParaRPr lang="en-US" sz="1300" dirty="0"/>
           </a:p>
@@ -34496,7 +36035,7 @@
                 <a:ea typeface="Trebuchet MS" pitchFamily="34" charset="-122"/>
                 <a:cs typeface="Trebuchet MS" pitchFamily="34" charset="-120"/>
               </a:rPr>
-              <a:t>-ment</a:t>
+              <a:t>-s</a:t>
             </a:r>
             <a:endParaRPr lang="en-US" sz="1300" dirty="0"/>
           </a:p>
@@ -34585,7 +36124,7 @@
                 <a:ea typeface="Trebuchet MS" pitchFamily="34" charset="-122"/>
                 <a:cs typeface="Trebuchet MS" pitchFamily="34" charset="-120"/>
               </a:rPr>
-              <a:t>code</a:t>
+              <a:t>date</a:t>
             </a:r>
             <a:endParaRPr lang="en-US" sz="1300" dirty="0"/>
           </a:p>
@@ -35105,7 +36644,7 @@
                 <a:ea typeface="Trebuchet MS" pitchFamily="34" charset="-122"/>
                 <a:cs typeface="Trebuchet MS" pitchFamily="34" charset="-120"/>
               </a:rPr>
-              <a:t>postcode</a:t>
+              <a:t>postgraduate</a:t>
             </a:r>
             <a:endParaRPr lang="en-US" sz="1200" dirty="0"/>
           </a:p>
@@ -35171,7 +36710,7 @@
                 <a:ea typeface="Trebuchet MS" pitchFamily="34" charset="-122"/>
                 <a:cs typeface="Trebuchet MS" pitchFamily="34" charset="-120"/>
               </a:rPr>
-              <a:t>postgraduate</a:t>
+              <a:t>postscript</a:t>
             </a:r>
             <a:endParaRPr lang="en-US" sz="1200" dirty="0"/>
           </a:p>
@@ -35303,7 +36842,7 @@
                 <a:ea typeface="Trebuchet MS" pitchFamily="34" charset="-122"/>
                 <a:cs typeface="Trebuchet MS" pitchFamily="34" charset="-120"/>
               </a:rPr>
-              <a:t>postscript</a:t>
+              <a:t>postdate</a:t>
             </a:r>
             <a:endParaRPr lang="en-US" sz="1200" dirty="0"/>
           </a:p>
@@ -35369,7 +36908,7 @@
                 <a:ea typeface="Trebuchet MS" pitchFamily="34" charset="-122"/>
                 <a:cs typeface="Trebuchet MS" pitchFamily="34" charset="-120"/>
               </a:rPr>
-              <a:t>postseason</a:t>
+              <a:t>postmortem</a:t>
             </a:r>
             <a:endParaRPr lang="en-US" sz="1200" dirty="0"/>
           </a:p>
@@ -35661,7 +37200,7 @@
                 <a:ea typeface="Calibri" pitchFamily="34" charset="-122"/>
                 <a:cs typeface="Calibri" pitchFamily="34" charset="-120"/>
               </a:rPr>
-              <a:t>Word Labs  •  wordlabs.app  •  Prefix: 'post-' = after, behind, later</a:t>
+              <a:t>Word Labs  •  wordlabs.app  •  Prefix: 'post-' = after, later, behind</a:t>
             </a:r>
             <a:endParaRPr lang="en-US" sz="800" dirty="0"/>
           </a:p>
@@ -35825,7 +37364,7 @@
                 <a:ea typeface="Calibri" pitchFamily="34" charset="-122"/>
                 <a:cs typeface="Calibri" pitchFamily="34" charset="-120"/>
               </a:rPr>
-              <a:t>A meaningful word part added to the beginning of a root to change its meaning. The prefix 'post-' means 'after, behind, later'.</a:t>
+              <a:t>A meaningful word part added to the beginning of a root to change its meaning. The prefix 'post-' means 'after, later, behind'.</a:t>
             </a:r>
             <a:endParaRPr lang="en-US" sz="1350" dirty="0"/>
           </a:p>
@@ -36445,7 +37984,7 @@
                 <a:ea typeface="Calibri" pitchFamily="34" charset="-122"/>
                 <a:cs typeface="Calibri" pitchFamily="34" charset="-120"/>
               </a:rPr>
-              <a:t>Word Labs  •  wordlabs.app  •  Prefix: 'post-' = after, behind, later</a:t>
+              <a:t>Word Labs  •  wordlabs.app  •  Prefix: 'post-' = after, later, behind</a:t>
             </a:r>
             <a:endParaRPr lang="en-US" sz="800" dirty="0"/>
           </a:p>
@@ -36557,7 +38096,7 @@
                 <a:ea typeface="Calibri" pitchFamily="34" charset="-122"/>
                 <a:cs typeface="Calibri" pitchFamily="34" charset="-120"/>
               </a:rPr>
-              <a:t>1.  The prefix 'post-' means 'after' or 'later in time'.</a:t>
+              <a:t>1.  The prefix 'post-' means the same as the prefix 'pre-'.</a:t>
             </a:r>
             <a:endParaRPr lang="en-US" sz="1300" dirty="0"/>
           </a:p>
@@ -36580,11 +38119,11 @@
             </a:avLst>
           </a:prstGeom>
           <a:solidFill>
-            <a:srgbClr val="DCFCE7"/>
-          </a:solidFill>
-          <a:ln w="12700">
-            <a:solidFill>
-              <a:srgbClr val="16A34A"/>
+            <a:srgbClr val="FEE2E2"/>
+          </a:solidFill>
+          <a:ln w="12700">
+            <a:solidFill>
+              <a:srgbClr val="DC2626"/>
             </a:solidFill>
             <a:prstDash val="solid"/>
           </a:ln>
@@ -36617,13 +38156,13 @@
             <a:r>
               <a:rPr lang="en-US" sz="1100" b="1" dirty="0">
                 <a:solidFill>
-                  <a:srgbClr val="16A34A"/>
+                  <a:srgbClr val="DC2626"/>
                 </a:solidFill>
                 <a:latin typeface="Trebuchet MS" pitchFamily="34" charset="0"/>
                 <a:ea typeface="Trebuchet MS" pitchFamily="34" charset="-122"/>
                 <a:cs typeface="Trebuchet MS" pitchFamily="34" charset="-120"/>
               </a:rPr>
-              <a:t>TRUE</a:t>
+              <a:t>FALSE</a:t>
             </a:r>
             <a:endParaRPr lang="en-US" sz="1100" dirty="0"/>
           </a:p>
@@ -36696,7 +38235,7 @@
                 <a:ea typeface="Calibri" pitchFamily="34" charset="-122"/>
                 <a:cs typeface="Calibri" pitchFamily="34" charset="-120"/>
               </a:rPr>
-              <a:t>2.  The word 'postcard' means a card you send before an event happens.</a:t>
+              <a:t>2.  Postpone means to move something to a later time.</a:t>
             </a:r>
             <a:endParaRPr lang="en-US" sz="1300" dirty="0"/>
           </a:p>
@@ -36719,11 +38258,11 @@
             </a:avLst>
           </a:prstGeom>
           <a:solidFill>
-            <a:srgbClr val="FEE2E2"/>
-          </a:solidFill>
-          <a:ln w="12700">
-            <a:solidFill>
-              <a:srgbClr val="DC2626"/>
+            <a:srgbClr val="DCFCE7"/>
+          </a:solidFill>
+          <a:ln w="12700">
+            <a:solidFill>
+              <a:srgbClr val="16A34A"/>
             </a:solidFill>
             <a:prstDash val="solid"/>
           </a:ln>
@@ -36756,13 +38295,13 @@
             <a:r>
               <a:rPr lang="en-US" sz="1100" b="1" dirty="0">
                 <a:solidFill>
-                  <a:srgbClr val="DC2626"/>
+                  <a:srgbClr val="16A34A"/>
                 </a:solidFill>
                 <a:latin typeface="Trebuchet MS" pitchFamily="34" charset="0"/>
                 <a:ea typeface="Trebuchet MS" pitchFamily="34" charset="-122"/>
                 <a:cs typeface="Trebuchet MS" pitchFamily="34" charset="-120"/>
               </a:rPr>
-              <a:t>FALSE</a:t>
+              <a:t>TRUE</a:t>
             </a:r>
             <a:endParaRPr lang="en-US" sz="1100" dirty="0"/>
           </a:p>
@@ -36835,7 +38374,7 @@
                 <a:ea typeface="Calibri" pitchFamily="34" charset="-122"/>
                 <a:cs typeface="Calibri" pitchFamily="34" charset="-120"/>
               </a:rPr>
-              <a:t>3.  The prefix 'post-' comes from Latin.</a:t>
+              <a:t>3.  The word 'postcard' means a card you send before an event.</a:t>
             </a:r>
             <a:endParaRPr lang="en-US" sz="1300" dirty="0"/>
           </a:p>
@@ -36858,11 +38397,11 @@
             </a:avLst>
           </a:prstGeom>
           <a:solidFill>
-            <a:srgbClr val="DCFCE7"/>
-          </a:solidFill>
-          <a:ln w="12700">
-            <a:solidFill>
-              <a:srgbClr val="16A34A"/>
+            <a:srgbClr val="FEE2E2"/>
+          </a:solidFill>
+          <a:ln w="12700">
+            <a:solidFill>
+              <a:srgbClr val="DC2626"/>
             </a:solidFill>
             <a:prstDash val="solid"/>
           </a:ln>
@@ -36895,13 +38434,13 @@
             <a:r>
               <a:rPr lang="en-US" sz="1100" b="1" dirty="0">
                 <a:solidFill>
-                  <a:srgbClr val="16A34A"/>
+                  <a:srgbClr val="DC2626"/>
                 </a:solidFill>
                 <a:latin typeface="Trebuchet MS" pitchFamily="34" charset="0"/>
                 <a:ea typeface="Trebuchet MS" pitchFamily="34" charset="-122"/>
                 <a:cs typeface="Trebuchet MS" pitchFamily="34" charset="-120"/>
               </a:rPr>
-              <a:t>TRUE</a:t>
+              <a:t>FALSE</a:t>
             </a:r>
             <a:endParaRPr lang="en-US" sz="1100" dirty="0"/>
           </a:p>
@@ -36974,7 +38513,7 @@
                 <a:ea typeface="Calibri" pitchFamily="34" charset="-122"/>
                 <a:cs typeface="Calibri" pitchFamily="34" charset="-120"/>
               </a:rPr>
-              <a:t>4.  To postpone something means to do it at a later time.</a:t>
+              <a:t>4.  'Post-' comes from Latin.</a:t>
             </a:r>
             <a:endParaRPr lang="en-US" sz="1300" dirty="0"/>
           </a:p>
@@ -37113,7 +38652,7 @@
                 <a:ea typeface="Calibri" pitchFamily="34" charset="-122"/>
                 <a:cs typeface="Calibri" pitchFamily="34" charset="-120"/>
               </a:rPr>
-              <a:t>5.  The prefix 'post-' means the same thing as the prefix 'pre-'.</a:t>
+              <a:t>5.  The prefix 'post-' means after or later.</a:t>
             </a:r>
             <a:endParaRPr lang="en-US" sz="1300" dirty="0"/>
           </a:p>
@@ -37136,11 +38675,11 @@
             </a:avLst>
           </a:prstGeom>
           <a:solidFill>
-            <a:srgbClr val="FEE2E2"/>
-          </a:solidFill>
-          <a:ln w="12700">
-            <a:solidFill>
-              <a:srgbClr val="DC2626"/>
+            <a:srgbClr val="DCFCE7"/>
+          </a:solidFill>
+          <a:ln w="12700">
+            <a:solidFill>
+              <a:srgbClr val="16A34A"/>
             </a:solidFill>
             <a:prstDash val="solid"/>
           </a:ln>
@@ -37173,13 +38712,13 @@
             <a:r>
               <a:rPr lang="en-US" sz="1100" b="1" dirty="0">
                 <a:solidFill>
-                  <a:srgbClr val="DC2626"/>
+                  <a:srgbClr val="16A34A"/>
                 </a:solidFill>
                 <a:latin typeface="Trebuchet MS" pitchFamily="34" charset="0"/>
                 <a:ea typeface="Trebuchet MS" pitchFamily="34" charset="-122"/>
                 <a:cs typeface="Trebuchet MS" pitchFamily="34" charset="-120"/>
               </a:rPr>
-              <a:t>FALSE</a:t>
+              <a:t>TRUE</a:t>
             </a:r>
             <a:endParaRPr lang="en-US" sz="1100" dirty="0"/>
           </a:p>
@@ -37471,7 +39010,7 @@
                 <a:ea typeface="Calibri" pitchFamily="34" charset="-122"/>
                 <a:cs typeface="Calibri" pitchFamily="34" charset="-120"/>
               </a:rPr>
-              <a:t>Word Labs  •  wordlabs.app  •  Prefix: 'post-' = after, behind, later</a:t>
+              <a:t>Word Labs  •  wordlabs.app  •  Prefix: 'post-' = after, later, behind</a:t>
             </a:r>
             <a:endParaRPr lang="en-US" sz="800" dirty="0"/>
           </a:p>
@@ -37608,7 +39147,7 @@
                 <a:ea typeface="Trebuchet MS" pitchFamily="34" charset="-122"/>
                 <a:cs typeface="Trebuchet MS" pitchFamily="34" charset="-120"/>
               </a:rPr>
-              <a:t>after, behind, later</a:t>
+              <a:t>after, later, behind</a:t>
             </a:r>
             <a:endParaRPr lang="en-US" sz="2000" dirty="0"/>
           </a:p>
@@ -37950,7 +39489,7 @@
                 <a:ea typeface="Trebuchet MS" pitchFamily="34" charset="-122"/>
                 <a:cs typeface="Trebuchet MS" pitchFamily="34" charset="-120"/>
               </a:rPr>
-              <a:t>postcode</a:t>
+              <a:t>postgraduate</a:t>
             </a:r>
             <a:endParaRPr lang="en-US" sz="1300" dirty="0"/>
           </a:p>
@@ -38016,7 +39555,7 @@
                 <a:ea typeface="Trebuchet MS" pitchFamily="34" charset="-122"/>
                 <a:cs typeface="Trebuchet MS" pitchFamily="34" charset="-120"/>
               </a:rPr>
-              <a:t>postgraduate</a:t>
+              <a:t>postscript</a:t>
             </a:r>
             <a:endParaRPr lang="en-US" sz="1300" dirty="0"/>
           </a:p>
@@ -38148,7 +39687,7 @@
                 <a:ea typeface="Trebuchet MS" pitchFamily="34" charset="-122"/>
                 <a:cs typeface="Trebuchet MS" pitchFamily="34" charset="-120"/>
               </a:rPr>
-              <a:t>postscript</a:t>
+              <a:t>postdate</a:t>
             </a:r>
             <a:endParaRPr lang="en-US" sz="1300" dirty="0"/>
           </a:p>
@@ -38440,7 +39979,7 @@
                 <a:ea typeface="Calibri" pitchFamily="34" charset="-122"/>
                 <a:cs typeface="Calibri" pitchFamily="34" charset="-120"/>
               </a:rPr>
-              <a:t>Word Labs  •  wordlabs.app  •  Prefix: 'post-' = after, behind, later</a:t>
+              <a:t>Word Labs  •  wordlabs.app  •  Prefix: 'post-' = after, later, behind</a:t>
             </a:r>
             <a:endParaRPr lang="en-US" sz="800" dirty="0"/>
           </a:p>
@@ -38958,7 +40497,7 @@
                 <a:ea typeface="Trebuchet MS" pitchFamily="34" charset="-122"/>
                 <a:cs typeface="Trebuchet MS" pitchFamily="34" charset="-120"/>
               </a:rPr>
-              <a:t>pone</a:t>
+              <a:t>game</a:t>
             </a:r>
             <a:endParaRPr lang="en-US" sz="1300" dirty="0"/>
           </a:p>
@@ -39175,7 +40714,7 @@
                 <a:ea typeface="Trebuchet MS" pitchFamily="34" charset="-122"/>
                 <a:cs typeface="Trebuchet MS" pitchFamily="34" charset="-120"/>
               </a:rPr>
-              <a:t>-ment</a:t>
+              <a:t>-s</a:t>
             </a:r>
             <a:endParaRPr lang="en-US" sz="1300" dirty="0"/>
           </a:p>
@@ -39264,7 +40803,7 @@
                 <a:ea typeface="Trebuchet MS" pitchFamily="34" charset="-122"/>
                 <a:cs typeface="Trebuchet MS" pitchFamily="34" charset="-120"/>
               </a:rPr>
-              <a:t>code</a:t>
+              <a:t>date</a:t>
             </a:r>
             <a:endParaRPr lang="en-US" sz="1300" dirty="0"/>
           </a:p>
@@ -40214,7 +41753,7 @@
                 <a:ea typeface="Calibri" pitchFamily="34" charset="-122"/>
                 <a:cs typeface="Calibri" pitchFamily="34" charset="-120"/>
               </a:rPr>
-              <a:t>Word Labs  •  wordlabs.app  •  Prefix: 'post-' = after, behind, later</a:t>
+              <a:t>Word Labs  •  wordlabs.app  •  Prefix: 'post-' = after, later, behind</a:t>
             </a:r>
             <a:endParaRPr lang="en-US" sz="800" dirty="0"/>
           </a:p>
@@ -40531,7 +42070,7 @@
                 <a:ea typeface="Calibri" pitchFamily="34" charset="-122"/>
                 <a:cs typeface="Calibri" pitchFamily="34" charset="-120"/>
               </a:rPr>
-              <a:t>A person who continues studying at university after finishing their first degree.</a:t>
+              <a:t>A note added at the end of a letter, after you have already signed it.</a:t>
             </a:r>
             <a:endParaRPr lang="en-US" sz="1200" dirty="0"/>
           </a:p>
@@ -40743,7 +42282,7 @@
                 <a:ea typeface="Trebuchet MS" pitchFamily="34" charset="-122"/>
                 <a:cs typeface="Trebuchet MS" pitchFamily="34" charset="-120"/>
               </a:rPr>
-              <a:t>postcode</a:t>
+              <a:t>postgraduate</a:t>
             </a:r>
             <a:endParaRPr lang="en-US" sz="1200" dirty="0"/>
           </a:p>
@@ -40809,7 +42348,7 @@
                 <a:ea typeface="Calibri" pitchFamily="34" charset="-122"/>
                 <a:cs typeface="Calibri" pitchFamily="34" charset="-120"/>
               </a:rPr>
-              <a:t>Relating to the time just after a baby is born.</a:t>
+              <a:t>Happening after a baby is born.</a:t>
             </a:r>
             <a:endParaRPr lang="en-US" sz="1200" dirty="0"/>
           </a:p>
@@ -40882,7 +42421,7 @@
                 <a:ea typeface="Trebuchet MS" pitchFamily="34" charset="-122"/>
                 <a:cs typeface="Trebuchet MS" pitchFamily="34" charset="-120"/>
               </a:rPr>
-              <a:t>postgraduate</a:t>
+              <a:t>postscript</a:t>
             </a:r>
             <a:endParaRPr lang="en-US" sz="1200" dirty="0"/>
           </a:p>
@@ -40948,7 +42487,7 @@
                 <a:ea typeface="Calibri" pitchFamily="34" charset="-122"/>
                 <a:cs typeface="Calibri" pitchFamily="34" charset="-120"/>
               </a:rPr>
-              <a:t>An extra message added at the end of a letter, usually written as 'P.S.'</a:t>
+              <a:t>To write a date on something that is later than the actual day.</a:t>
             </a:r>
             <a:endParaRPr lang="en-US" sz="1200" dirty="0"/>
           </a:p>
@@ -41087,7 +42626,7 @@
                 <a:ea typeface="Calibri" pitchFamily="34" charset="-122"/>
                 <a:cs typeface="Calibri" pitchFamily="34" charset="-120"/>
               </a:rPr>
-              <a:t>A group of numbers used in an address to help sort and deliver mail.</a:t>
+              <a:t>Studying at university after you have already finished your first degree.</a:t>
             </a:r>
             <a:endParaRPr lang="en-US" sz="1200" dirty="0"/>
           </a:p>
@@ -41160,7 +42699,7 @@
                 <a:ea typeface="Trebuchet MS" pitchFamily="34" charset="-122"/>
                 <a:cs typeface="Trebuchet MS" pitchFamily="34" charset="-120"/>
               </a:rPr>
-              <a:t>postscript</a:t>
+              <a:t>postdate</a:t>
             </a:r>
             <a:endParaRPr lang="en-US" sz="1200" dirty="0"/>
           </a:p>
@@ -41226,7 +42765,7 @@
                 <a:ea typeface="Calibri" pitchFamily="34" charset="-122"/>
                 <a:cs typeface="Calibri" pitchFamily="34" charset="-120"/>
               </a:rPr>
-              <a:t>A small card you send in the mail, often with a picture on one side.</a:t>
+              <a:t>A flat card you send through the mail, often with a picture on one side.</a:t>
             </a:r>
             <a:endParaRPr lang="en-US" sz="1200" dirty="0"/>
           </a:p>
@@ -41518,7 +43057,7 @@
                 <a:ea typeface="Calibri" pitchFamily="34" charset="-122"/>
                 <a:cs typeface="Calibri" pitchFamily="34" charset="-120"/>
               </a:rPr>
-              <a:t>Word Labs  •  wordlabs.app  •  Prefix: 'post-' = after, behind, later</a:t>
+              <a:t>Word Labs  •  wordlabs.app  •  Prefix: 'post-' = after, later, behind</a:t>
             </a:r>
             <a:endParaRPr lang="en-US" sz="800" dirty="0"/>
           </a:p>
@@ -41721,7 +43260,7 @@
                 <a:ea typeface="Calibri" pitchFamily="34" charset="-122"/>
                 <a:cs typeface="Calibri" pitchFamily="34" charset="-120"/>
               </a:rPr>
-              <a:t>We decided to postpone the sports carnival because of the heavy rain.</a:t>
+              <a:t>The team held a postmatch discussion to talk about how they played.</a:t>
             </a:r>
             <a:endParaRPr lang="en-US" sz="1500" dirty="0"/>
           </a:p>
@@ -41885,7 +43424,7 @@
                 <a:ea typeface="Calibri" pitchFamily="34" charset="-122"/>
                 <a:cs typeface="Calibri" pitchFamily="34" charset="-120"/>
               </a:rPr>
-              <a:t>Grandma sent me a postcard from her holiday in Queensland.</a:t>
+              <a:t>Mum wrote a postscript at the bottom of her letter to remind us about dinner.</a:t>
             </a:r>
             <a:endParaRPr lang="en-US" sz="1500" dirty="0"/>
           </a:p>
@@ -42049,7 +43588,7 @@
                 <a:ea typeface="Calibri" pitchFamily="34" charset="-122"/>
                 <a:cs typeface="Calibri" pitchFamily="34" charset="-120"/>
               </a:rPr>
-              <a:t>The postcode helps the post office know exactly where to deliver your letters.</a:t>
+              <a:t>The council decided to postpone the school fete because of the rain.</a:t>
             </a:r>
             <a:endParaRPr lang="en-US" sz="1500" dirty="0"/>
           </a:p>
